--- a/Pres+report/Soutenance-PFE.pptx
+++ b/Pres+report/Soutenance-PFE.pptx
@@ -18903,8 +18903,8 @@
         </p:nvSpPr>
         <p:spPr>
           <a:xfrm>
-            <a:off x="868680" y="1965960"/>
-            <a:ext cx="45720" cy="2240280"/>
+            <a:off x="868680" y="1874519"/>
+            <a:ext cx="45720" cy="2057400"/>
           </a:xfrm>
           <a:prstGeom prst="rect">
             <a:avLst/>
@@ -18947,8 +18947,8 @@
         </p:nvSpPr>
         <p:spPr>
           <a:xfrm>
-            <a:off x="1463040" y="2011680"/>
-            <a:ext cx="9357055" cy="2194560"/>
+            <a:off x="1463040" y="1920240"/>
+            <a:ext cx="9357055" cy="2011680"/>
           </a:xfrm>
           <a:prstGeom prst="rect">
             <a:avLst/>
@@ -18967,31 +18967,31 @@
               </a:lnSpc>
             </a:pPr>
             <a:r>
-              <a:rPr sz="2500" b="0" i="0">
+              <a:rPr sz="2600" b="0" i="0">
                 <a:solidFill>
                   <a:srgbClr val="D5D5D5"/>
                 </a:solidFill>
                 <a:latin typeface="Arial"/>
               </a:rPr>
-              <a:t>« Si vous parlez à un homme dans une langue qu'il comprend, vous parlez à sa tête. </a:t>
-            </a:r>
-            <a:r>
-              <a:rPr sz="2500" b="1" i="0">
+              <a:t>“The first principle is that you must not fool yourself — </a:t>
+            </a:r>
+            <a:r>
+              <a:rPr sz="2600" b="1" i="0">
                 <a:solidFill>
                   <a:srgbClr val="FFFFFF"/>
                 </a:solidFill>
                 <a:latin typeface="Arial"/>
               </a:rPr>
-              <a:t>Si vous lui parlez dans sa langue, vous parlez à son cœur.</a:t>
-            </a:r>
-            <a:r>
-              <a:rPr sz="2500" b="0" i="0">
+              <a:t>and you are the easiest person to fool.</a:t>
+            </a:r>
+            <a:r>
+              <a:rPr sz="2600" b="0" i="0">
                 <a:solidFill>
                   <a:srgbClr val="D5D5D5"/>
                 </a:solidFill>
                 <a:latin typeface="Arial"/>
               </a:rPr>
-              <a:t> »</a:t>
+              <a:t>”</a:t>
             </a:r>
           </a:p>
         </p:txBody>
@@ -19004,7 +19004,7 @@
         </p:nvSpPr>
         <p:spPr>
           <a:xfrm>
-            <a:off x="1463040" y="4370832"/>
+            <a:off x="1463040" y="4078224"/>
             <a:ext cx="9357055" cy="292608"/>
           </a:xfrm>
           <a:prstGeom prst="rect">
@@ -19025,7 +19025,16 @@
                 </a:solidFill>
                 <a:latin typeface="Arial"/>
               </a:rPr>
-              <a:t>Nelson Mandela</a:t>
+              <a:t>Richard P. Feynman</a:t>
+            </a:r>
+            <a:r>
+              <a:rPr sz="1250" b="0" i="0">
+                <a:solidFill>
+                  <a:srgbClr val="7E7E7E"/>
+                </a:solidFill>
+                <a:latin typeface="Arial"/>
+              </a:rPr>
+              <a:t>   ·   Caltech, 1974</a:t>
             </a:r>
           </a:p>
         </p:txBody>
@@ -19038,8 +19047,8 @@
         </p:nvSpPr>
         <p:spPr>
           <a:xfrm>
-            <a:off x="1463040" y="4882896"/>
-            <a:ext cx="9357055" cy="822960"/>
+            <a:off x="1463040" y="4590288"/>
+            <a:ext cx="9357055" cy="1280160"/>
           </a:xfrm>
           <a:prstGeom prst="rect">
             <a:avLst/>
@@ -19054,17 +19063,53 @@
           <a:p>
             <a:pPr>
               <a:lnSpc>
-                <a:spcPct val="122000"/>
+                <a:spcPct val="124000"/>
               </a:lnSpc>
             </a:pPr>
             <a:r>
               <a:rPr sz="1400" b="0" i="0">
                 <a:solidFill>
-                  <a:srgbClr val="9C9C9C"/>
-                </a:solidFill>
-                <a:latin typeface="Arial"/>
-              </a:rPr>
-              <a:t>Le technicien de câblage pense, compte et raconte sa journée en darija. Tout le projet tient dans le refus de lui demander de se traduire lui-même : c'est au système de faire le trajet, pas à lui.</a:t>
+                  <a:srgbClr val="B8B8B8"/>
+                </a:solidFill>
+                <a:latin typeface="Arial"/>
+              </a:rPr>
+              <a:t>Le banc d'essai de ce projet s'est trompé deux fois avant de trancher : </a:t>
+            </a:r>
+            <a:r>
+              <a:rPr sz="1400" b="1" i="0">
+                <a:solidFill>
+                  <a:srgbClr val="E2E2E2"/>
+                </a:solidFill>
+                <a:latin typeface="Arial"/>
+              </a:rPr>
+              <a:t>un score de confiance qui couronnait un moteur ayant perdu le « 40 »</a:t>
+            </a:r>
+            <a:r>
+              <a:rPr sz="1400" b="0" i="0">
+                <a:solidFill>
+                  <a:srgbClr val="B8B8B8"/>
+                </a:solidFill>
+                <a:latin typeface="Arial"/>
+              </a:rPr>
+              <a:t>, puis </a:t>
+            </a:r>
+            <a:r>
+              <a:rPr sz="1400" b="1" i="0">
+                <a:solidFill>
+                  <a:srgbClr val="E2E2E2"/>
+                </a:solidFill>
+                <a:latin typeface="Arial"/>
+              </a:rPr>
+              <a:t>un bogue de harnais qui désignait un vainqueur sur une transcription jamais produite</a:t>
+            </a:r>
+            <a:r>
+              <a:rPr sz="1400" b="0" i="0">
+                <a:solidFill>
+                  <a:srgbClr val="B8B8B8"/>
+                </a:solidFill>
+                <a:latin typeface="Arial"/>
+              </a:rPr>
+              <a:t>. La même exigence gouverne le système lui-même : aucune donnée inventée, aucun échec silencieux, et un écart de stock signalé plutôt que deviné.</a:t>
             </a:r>
           </a:p>
         </p:txBody>

--- a/Pres+report/Soutenance-PFE.pptx
+++ b/Pres+report/Soutenance-PFE.pptx
@@ -18897,14 +18897,97 @@
       </p:sp>
       <p:sp>
         <p:nvSpPr>
-          <p:cNvPr id="4" name="Rectangle 3"/>
+          <p:cNvPr id="4" name="TextBox 3"/>
+          <p:cNvSpPr txBox="1"/>
+          <p:nvPr/>
+        </p:nvSpPr>
+        <p:spPr>
+          <a:xfrm>
+            <a:off x="502920" y="960120"/>
+            <a:ext cx="2743200" cy="2743200"/>
+          </a:xfrm>
+          <a:prstGeom prst="rect">
+            <a:avLst/>
+          </a:prstGeom>
+          <a:noFill/>
+        </p:spPr>
+        <p:txBody>
+          <a:bodyPr wrap="square" lIns="0" rIns="0" tIns="0" bIns="0">
+            <a:spAutoFit/>
+          </a:bodyPr>
+          <a:lstStyle/>
+          <a:p>
+            <a:r>
+              <a:rPr sz="20000" b="1" i="0">
+                <a:solidFill>
+                  <a:srgbClr val="2B3138"/>
+                </a:solidFill>
+                <a:latin typeface="Georgia"/>
+              </a:rPr>
+              <a:t>“</a:t>
+            </a:r>
+          </a:p>
+        </p:txBody>
+      </p:sp>
+      <p:sp>
+        <p:nvSpPr>
+          <p:cNvPr id="5" name="TextBox 4"/>
+          <p:cNvSpPr txBox="1"/>
+          <p:nvPr/>
+        </p:nvSpPr>
+        <p:spPr>
+          <a:xfrm>
+            <a:off x="1645919" y="2029968"/>
+            <a:ext cx="9174175" cy="2286000"/>
+          </a:xfrm>
+          <a:prstGeom prst="rect">
+            <a:avLst/>
+          </a:prstGeom>
+          <a:noFill/>
+        </p:spPr>
+        <p:txBody>
+          <a:bodyPr wrap="square" lIns="0" rIns="0" tIns="0" bIns="0">
+            <a:spAutoFit/>
+          </a:bodyPr>
+          <a:lstStyle/>
+          <a:p>
+            <a:pPr>
+              <a:lnSpc>
+                <a:spcPct val="116000"/>
+              </a:lnSpc>
+            </a:pPr>
+            <a:r>
+              <a:rPr sz="4200" b="0" i="0">
+                <a:solidFill>
+                  <a:srgbClr val="9AA2AB"/>
+                </a:solidFill>
+                <a:latin typeface="Georgia"/>
+              </a:rPr>
+              <a:t>The limits of my language
+</a:t>
+            </a:r>
+            <a:r>
+              <a:rPr sz="4200" b="1" i="0">
+                <a:solidFill>
+                  <a:srgbClr val="FFFFFF"/>
+                </a:solidFill>
+                <a:latin typeface="Georgia"/>
+              </a:rPr>
+              <a:t>mean the limits of my world.</a:t>
+            </a:r>
+          </a:p>
+        </p:txBody>
+      </p:sp>
+      <p:sp>
+        <p:nvSpPr>
+          <p:cNvPr id="6" name="Rectangle 5"/>
           <p:cNvSpPr/>
           <p:nvPr/>
         </p:nvSpPr>
         <p:spPr>
           <a:xfrm>
-            <a:off x="868680" y="1874519"/>
-            <a:ext cx="45720" cy="2057400"/>
+            <a:off x="1673352" y="4297680"/>
+            <a:ext cx="777240" cy="27432"/>
           </a:xfrm>
           <a:prstGeom prst="rect">
             <a:avLst/>
@@ -18941,14 +19024,82 @@
       </p:sp>
       <p:sp>
         <p:nvSpPr>
-          <p:cNvPr id="5" name="TextBox 4"/>
-          <p:cNvSpPr txBox="1"/>
-          <p:nvPr/>
-        </p:nvSpPr>
-        <p:spPr>
-          <a:xfrm>
-            <a:off x="1463040" y="1920240"/>
-            <a:ext cx="9357055" cy="2011680"/>
+          <p:cNvPr id="7" name="TextBox 6"/>
+          <p:cNvSpPr txBox="1"/>
+          <p:nvPr/>
+        </p:nvSpPr>
+        <p:spPr>
+          <a:xfrm>
+            <a:off x="1673352" y="4553712"/>
+            <a:ext cx="9174175" cy="274320"/>
+          </a:xfrm>
+          <a:prstGeom prst="rect">
+            <a:avLst/>
+          </a:prstGeom>
+          <a:noFill/>
+        </p:spPr>
+        <p:txBody>
+          <a:bodyPr wrap="square" lIns="0" rIns="0" tIns="0" bIns="0">
+            <a:spAutoFit/>
+          </a:bodyPr>
+          <a:lstStyle/>
+          <a:p>
+            <a:r>
+              <a:rPr sz="1200" b="1" i="0" spc="220">
+                <a:solidFill>
+                  <a:srgbClr val="5CB0F7"/>
+                </a:solidFill>
+                <a:latin typeface="Arial"/>
+              </a:rPr>
+              <a:t>LUDWIG WITTGENSTEIN</a:t>
+            </a:r>
+          </a:p>
+        </p:txBody>
+      </p:sp>
+      <p:sp>
+        <p:nvSpPr>
+          <p:cNvPr id="8" name="TextBox 7"/>
+          <p:cNvSpPr txBox="1"/>
+          <p:nvPr/>
+        </p:nvSpPr>
+        <p:spPr>
+          <a:xfrm>
+            <a:off x="1673352" y="4846320"/>
+            <a:ext cx="9174175" cy="274320"/>
+          </a:xfrm>
+          <a:prstGeom prst="rect">
+            <a:avLst/>
+          </a:prstGeom>
+          <a:noFill/>
+        </p:spPr>
+        <p:txBody>
+          <a:bodyPr wrap="square" lIns="0" rIns="0" tIns="0" bIns="0">
+            <a:spAutoFit/>
+          </a:bodyPr>
+          <a:lstStyle/>
+          <a:p>
+            <a:r>
+              <a:rPr sz="1200" b="0" i="1">
+                <a:solidFill>
+                  <a:srgbClr val="767C84"/>
+                </a:solidFill>
+                <a:latin typeface="Georgia"/>
+              </a:rPr>
+              <a:t>Tractatus Logico-Philosophicus, §5.6 — 1921</a:t>
+            </a:r>
+          </a:p>
+        </p:txBody>
+      </p:sp>
+      <p:sp>
+        <p:nvSpPr>
+          <p:cNvPr id="9" name="TextBox 8"/>
+          <p:cNvSpPr txBox="1"/>
+          <p:nvPr/>
+        </p:nvSpPr>
+        <p:spPr>
+          <a:xfrm>
+            <a:off x="1673352" y="5413248"/>
+            <a:ext cx="8442655" cy="822960"/>
           </a:xfrm>
           <a:prstGeom prst="rect">
             <a:avLst/>
@@ -18963,160 +19114,42 @@
           <a:p>
             <a:pPr>
               <a:lnSpc>
-                <a:spcPct val="130000"/>
+                <a:spcPct val="126000"/>
               </a:lnSpc>
             </a:pPr>
             <a:r>
-              <a:rPr sz="2600" b="0" i="0">
-                <a:solidFill>
-                  <a:srgbClr val="D5D5D5"/>
-                </a:solidFill>
-                <a:latin typeface="Arial"/>
-              </a:rPr>
-              <a:t>“The first principle is that you must not fool yourself — </a:t>
-            </a:r>
-            <a:r>
-              <a:rPr sz="2600" b="1" i="0">
-                <a:solidFill>
-                  <a:srgbClr val="FFFFFF"/>
-                </a:solidFill>
-                <a:latin typeface="Arial"/>
-              </a:rPr>
-              <a:t>and you are the easiest person to fool.</a:t>
-            </a:r>
-            <a:r>
-              <a:rPr sz="2600" b="0" i="0">
-                <a:solidFill>
-                  <a:srgbClr val="D5D5D5"/>
-                </a:solidFill>
-                <a:latin typeface="Arial"/>
-              </a:rPr>
-              <a:t>”</a:t>
-            </a:r>
-          </a:p>
-        </p:txBody>
-      </p:sp>
-      <p:sp>
-        <p:nvSpPr>
-          <p:cNvPr id="6" name="TextBox 5"/>
-          <p:cNvSpPr txBox="1"/>
-          <p:nvPr/>
-        </p:nvSpPr>
-        <p:spPr>
-          <a:xfrm>
-            <a:off x="1463040" y="4078224"/>
-            <a:ext cx="9357055" cy="292608"/>
-          </a:xfrm>
-          <a:prstGeom prst="rect">
-            <a:avLst/>
-          </a:prstGeom>
-          <a:noFill/>
-        </p:spPr>
-        <p:txBody>
-          <a:bodyPr wrap="square" lIns="0" rIns="0" tIns="0" bIns="0">
-            <a:spAutoFit/>
-          </a:bodyPr>
-          <a:lstStyle/>
-          <a:p>
-            <a:r>
-              <a:rPr sz="1400" b="1" i="0">
-                <a:solidFill>
-                  <a:srgbClr val="4FA9F5"/>
-                </a:solidFill>
-                <a:latin typeface="Arial"/>
-              </a:rPr>
-              <a:t>Richard P. Feynman</a:t>
-            </a:r>
-            <a:r>
-              <a:rPr sz="1250" b="0" i="0">
-                <a:solidFill>
-                  <a:srgbClr val="7E7E7E"/>
-                </a:solidFill>
-                <a:latin typeface="Arial"/>
-              </a:rPr>
-              <a:t>   ·   Caltech, 1974</a:t>
-            </a:r>
-          </a:p>
-        </p:txBody>
-      </p:sp>
-      <p:sp>
-        <p:nvSpPr>
-          <p:cNvPr id="7" name="TextBox 6"/>
-          <p:cNvSpPr txBox="1"/>
-          <p:nvPr/>
-        </p:nvSpPr>
-        <p:spPr>
-          <a:xfrm>
-            <a:off x="1463040" y="4590288"/>
-            <a:ext cx="9357055" cy="1280160"/>
-          </a:xfrm>
-          <a:prstGeom prst="rect">
-            <a:avLst/>
-          </a:prstGeom>
-          <a:noFill/>
-        </p:spPr>
-        <p:txBody>
-          <a:bodyPr wrap="square" lIns="0" rIns="0" tIns="0" bIns="0">
-            <a:spAutoFit/>
-          </a:bodyPr>
-          <a:lstStyle/>
-          <a:p>
-            <a:pPr>
-              <a:lnSpc>
-                <a:spcPct val="124000"/>
-              </a:lnSpc>
-            </a:pPr>
-            <a:r>
-              <a:rPr sz="1400" b="0" i="0">
-                <a:solidFill>
-                  <a:srgbClr val="B8B8B8"/>
-                </a:solidFill>
-                <a:latin typeface="Arial"/>
-              </a:rPr>
-              <a:t>Le banc d'essai de ce projet s'est trompé deux fois avant de trancher : </a:t>
-            </a:r>
-            <a:r>
-              <a:rPr sz="1400" b="1" i="0">
-                <a:solidFill>
-                  <a:srgbClr val="E2E2E2"/>
-                </a:solidFill>
-                <a:latin typeface="Arial"/>
-              </a:rPr>
-              <a:t>un score de confiance qui couronnait un moteur ayant perdu le « 40 »</a:t>
-            </a:r>
-            <a:r>
-              <a:rPr sz="1400" b="0" i="0">
-                <a:solidFill>
-                  <a:srgbClr val="B8B8B8"/>
-                </a:solidFill>
-                <a:latin typeface="Arial"/>
-              </a:rPr>
-              <a:t>, puis </a:t>
-            </a:r>
-            <a:r>
-              <a:rPr sz="1400" b="1" i="0">
-                <a:solidFill>
-                  <a:srgbClr val="E2E2E2"/>
-                </a:solidFill>
-                <a:latin typeface="Arial"/>
-              </a:rPr>
-              <a:t>un bogue de harnais qui désignait un vainqueur sur une transcription jamais produite</a:t>
-            </a:r>
-            <a:r>
-              <a:rPr sz="1400" b="0" i="0">
-                <a:solidFill>
-                  <a:srgbClr val="B8B8B8"/>
-                </a:solidFill>
-                <a:latin typeface="Arial"/>
-              </a:rPr>
-              <a:t>. La même exigence gouverne le système lui-même : aucune donnée inventée, aucun échec silencieux, et un écart de stock signalé plutôt que deviné.</a:t>
-            </a:r>
-          </a:p>
-        </p:txBody>
-      </p:sp>
-      <p:sp>
-        <p:nvSpPr>
-          <p:cNvPr id="8" name="TextBox 7"/>
+              <a:rPr sz="1350" b="0" i="0">
+                <a:solidFill>
+                  <a:srgbClr val="8E959C"/>
+                </a:solidFill>
+                <a:latin typeface="Arial"/>
+              </a:rPr>
+              <a:t>Le technicien de câblage pense, compte et raconte sa journée en darija. </a:t>
+            </a:r>
+            <a:r>
+              <a:rPr sz="1350" b="1" i="0">
+                <a:solidFill>
+                  <a:srgbClr val="D3D8DD"/>
+                </a:solidFill>
+                <a:latin typeface="Arial"/>
+              </a:rPr>
+              <a:t>Lui demander un rapport en français, c'est rétrécir ce qu'il peut dire.</a:t>
+            </a:r>
+            <a:r>
+              <a:rPr sz="1350" b="0" i="0">
+                <a:solidFill>
+                  <a:srgbClr val="8E959C"/>
+                </a:solidFill>
+                <a:latin typeface="Arial"/>
+              </a:rPr>
+              <a:t> Tout le projet tient dans le refus de lui faire faire ce trajet.</a:t>
+            </a:r>
+          </a:p>
+        </p:txBody>
+      </p:sp>
+      <p:sp>
+        <p:nvSpPr>
+          <p:cNvPr id="10" name="TextBox 9"/>
           <p:cNvSpPr txBox="1"/>
           <p:nvPr/>
         </p:nvSpPr>
@@ -19150,7 +19183,7 @@
       </p:sp>
       <p:sp>
         <p:nvSpPr>
-          <p:cNvPr id="9" name="TextBox 8"/>
+          <p:cNvPr id="11" name="TextBox 10"/>
           <p:cNvSpPr txBox="1"/>
           <p:nvPr/>
         </p:nvSpPr>

--- a/Pres+report/Soutenance-PFE.pptx
+++ b/Pres+report/Soutenance-PFE.pptx
@@ -18795,7 +18795,7 @@
     <p:bg>
       <p:bgPr>
         <a:solidFill>
-          <a:srgbClr val="1C1F23"/>
+          <a:srgbClr val="FFFFFF"/>
         </a:solidFill>
         <a:effectLst/>
       </p:bgPr>
@@ -18807,415 +18807,30 @@
         <p:nvPr/>
       </p:nvGrpSpPr>
       <p:grpSpPr/>
-      <p:sp>
-        <p:nvSpPr>
-          <p:cNvPr id="2" name="Rectangle 1"/>
-          <p:cNvSpPr/>
-          <p:nvPr/>
-        </p:nvSpPr>
+      <p:pic>
+        <p:nvPicPr>
+          <p:cNvPr id="2" name="Picture 1" descr="quote-wittgenstein.png"/>
+          <p:cNvPicPr>
+            <a:picLocks noChangeAspect="1"/>
+          </p:cNvPicPr>
+          <p:nvPr/>
+        </p:nvPicPr>
+        <p:blipFill>
+          <a:blip r:embed="rId2"/>
+          <a:stretch>
+            <a:fillRect/>
+          </a:stretch>
+        </p:blipFill>
         <p:spPr>
           <a:xfrm>
             <a:off x="0" y="0"/>
-            <a:ext cx="12191695" cy="91440"/>
-          </a:xfrm>
-          <a:prstGeom prst="rect">
-            <a:avLst/>
-          </a:prstGeom>
-          <a:solidFill>
-            <a:srgbClr val="0B8E36"/>
-          </a:solidFill>
-          <a:ln>
-            <a:noFill/>
-          </a:ln>
-          <a:effectLst/>
-        </p:spPr>
-        <p:style>
-          <a:lnRef idx="1">
-            <a:schemeClr val="accent1"/>
-          </a:lnRef>
-          <a:fillRef idx="3">
-            <a:schemeClr val="accent1"/>
-          </a:fillRef>
-          <a:effectRef idx="2">
-            <a:schemeClr val="accent1"/>
-          </a:effectRef>
-          <a:fontRef idx="minor">
-            <a:schemeClr val="lt1"/>
-          </a:fontRef>
-        </p:style>
-        <p:txBody>
-          <a:bodyPr rtlCol="0" anchor="ctr" wrap="square"/>
-          <a:lstStyle/>
-          <a:p>
-            <a:pPr algn="ctr"/>
-          </a:p>
-        </p:txBody>
-      </p:sp>
-      <p:sp>
-        <p:nvSpPr>
-          <p:cNvPr id="3" name="Rectangle 2"/>
-          <p:cNvSpPr/>
-          <p:nvPr/>
-        </p:nvSpPr>
-        <p:spPr>
-          <a:xfrm>
-            <a:off x="0" y="6766560"/>
-            <a:ext cx="12191695" cy="91440"/>
-          </a:xfrm>
-          <a:prstGeom prst="rect">
-            <a:avLst/>
-          </a:prstGeom>
-          <a:solidFill>
-            <a:srgbClr val="0278E4"/>
-          </a:solidFill>
-          <a:ln>
-            <a:noFill/>
-          </a:ln>
-          <a:effectLst/>
-        </p:spPr>
-        <p:style>
-          <a:lnRef idx="1">
-            <a:schemeClr val="accent1"/>
-          </a:lnRef>
-          <a:fillRef idx="3">
-            <a:schemeClr val="accent1"/>
-          </a:fillRef>
-          <a:effectRef idx="2">
-            <a:schemeClr val="accent1"/>
-          </a:effectRef>
-          <a:fontRef idx="minor">
-            <a:schemeClr val="lt1"/>
-          </a:fontRef>
-        </p:style>
-        <p:txBody>
-          <a:bodyPr rtlCol="0" anchor="ctr" wrap="square"/>
-          <a:lstStyle/>
-          <a:p>
-            <a:pPr algn="ctr"/>
-          </a:p>
-        </p:txBody>
-      </p:sp>
-      <p:sp>
-        <p:nvSpPr>
-          <p:cNvPr id="4" name="TextBox 3"/>
-          <p:cNvSpPr txBox="1"/>
-          <p:nvPr/>
-        </p:nvSpPr>
-        <p:spPr>
-          <a:xfrm>
-            <a:off x="502920" y="960120"/>
-            <a:ext cx="2743200" cy="2743200"/>
-          </a:xfrm>
-          <a:prstGeom prst="rect">
-            <a:avLst/>
-          </a:prstGeom>
-          <a:noFill/>
-        </p:spPr>
-        <p:txBody>
-          <a:bodyPr wrap="square" lIns="0" rIns="0" tIns="0" bIns="0">
-            <a:spAutoFit/>
-          </a:bodyPr>
-          <a:lstStyle/>
-          <a:p>
-            <a:r>
-              <a:rPr sz="20000" b="1" i="0">
-                <a:solidFill>
-                  <a:srgbClr val="2B3138"/>
-                </a:solidFill>
-                <a:latin typeface="Georgia"/>
-              </a:rPr>
-              <a:t>“</a:t>
-            </a:r>
-          </a:p>
-        </p:txBody>
-      </p:sp>
-      <p:sp>
-        <p:nvSpPr>
-          <p:cNvPr id="5" name="TextBox 4"/>
-          <p:cNvSpPr txBox="1"/>
-          <p:nvPr/>
-        </p:nvSpPr>
-        <p:spPr>
-          <a:xfrm>
-            <a:off x="1645919" y="2029968"/>
-            <a:ext cx="9174175" cy="2286000"/>
-          </a:xfrm>
-          <a:prstGeom prst="rect">
-            <a:avLst/>
-          </a:prstGeom>
-          <a:noFill/>
-        </p:spPr>
-        <p:txBody>
-          <a:bodyPr wrap="square" lIns="0" rIns="0" tIns="0" bIns="0">
-            <a:spAutoFit/>
-          </a:bodyPr>
-          <a:lstStyle/>
-          <a:p>
-            <a:pPr>
-              <a:lnSpc>
-                <a:spcPct val="116000"/>
-              </a:lnSpc>
-            </a:pPr>
-            <a:r>
-              <a:rPr sz="4200" b="0" i="0">
-                <a:solidFill>
-                  <a:srgbClr val="9AA2AB"/>
-                </a:solidFill>
-                <a:latin typeface="Georgia"/>
-              </a:rPr>
-              <a:t>The limits of my language
-</a:t>
-            </a:r>
-            <a:r>
-              <a:rPr sz="4200" b="1" i="0">
-                <a:solidFill>
-                  <a:srgbClr val="FFFFFF"/>
-                </a:solidFill>
-                <a:latin typeface="Georgia"/>
-              </a:rPr>
-              <a:t>mean the limits of my world.</a:t>
-            </a:r>
-          </a:p>
-        </p:txBody>
-      </p:sp>
-      <p:sp>
-        <p:nvSpPr>
-          <p:cNvPr id="6" name="Rectangle 5"/>
-          <p:cNvSpPr/>
-          <p:nvPr/>
-        </p:nvSpPr>
-        <p:spPr>
-          <a:xfrm>
-            <a:off x="1673352" y="4297680"/>
-            <a:ext cx="777240" cy="27432"/>
-          </a:xfrm>
-          <a:prstGeom prst="rect">
-            <a:avLst/>
-          </a:prstGeom>
-          <a:solidFill>
-            <a:srgbClr val="0278E4"/>
-          </a:solidFill>
-          <a:ln>
-            <a:noFill/>
-          </a:ln>
-          <a:effectLst/>
-        </p:spPr>
-        <p:style>
-          <a:lnRef idx="1">
-            <a:schemeClr val="accent1"/>
-          </a:lnRef>
-          <a:fillRef idx="3">
-            <a:schemeClr val="accent1"/>
-          </a:fillRef>
-          <a:effectRef idx="2">
-            <a:schemeClr val="accent1"/>
-          </a:effectRef>
-          <a:fontRef idx="minor">
-            <a:schemeClr val="lt1"/>
-          </a:fontRef>
-        </p:style>
-        <p:txBody>
-          <a:bodyPr rtlCol="0" anchor="ctr" wrap="square"/>
-          <a:lstStyle/>
-          <a:p>
-            <a:pPr algn="ctr"/>
-          </a:p>
-        </p:txBody>
-      </p:sp>
-      <p:sp>
-        <p:nvSpPr>
-          <p:cNvPr id="7" name="TextBox 6"/>
-          <p:cNvSpPr txBox="1"/>
-          <p:nvPr/>
-        </p:nvSpPr>
-        <p:spPr>
-          <a:xfrm>
-            <a:off x="1673352" y="4553712"/>
-            <a:ext cx="9174175" cy="274320"/>
-          </a:xfrm>
-          <a:prstGeom prst="rect">
-            <a:avLst/>
-          </a:prstGeom>
-          <a:noFill/>
-        </p:spPr>
-        <p:txBody>
-          <a:bodyPr wrap="square" lIns="0" rIns="0" tIns="0" bIns="0">
-            <a:spAutoFit/>
-          </a:bodyPr>
-          <a:lstStyle/>
-          <a:p>
-            <a:r>
-              <a:rPr sz="1200" b="1" i="0" spc="220">
-                <a:solidFill>
-                  <a:srgbClr val="5CB0F7"/>
-                </a:solidFill>
-                <a:latin typeface="Arial"/>
-              </a:rPr>
-              <a:t>LUDWIG WITTGENSTEIN</a:t>
-            </a:r>
-          </a:p>
-        </p:txBody>
-      </p:sp>
-      <p:sp>
-        <p:nvSpPr>
-          <p:cNvPr id="8" name="TextBox 7"/>
-          <p:cNvSpPr txBox="1"/>
-          <p:nvPr/>
-        </p:nvSpPr>
-        <p:spPr>
-          <a:xfrm>
-            <a:off x="1673352" y="4846320"/>
-            <a:ext cx="9174175" cy="274320"/>
-          </a:xfrm>
-          <a:prstGeom prst="rect">
-            <a:avLst/>
-          </a:prstGeom>
-          <a:noFill/>
-        </p:spPr>
-        <p:txBody>
-          <a:bodyPr wrap="square" lIns="0" rIns="0" tIns="0" bIns="0">
-            <a:spAutoFit/>
-          </a:bodyPr>
-          <a:lstStyle/>
-          <a:p>
-            <a:r>
-              <a:rPr sz="1200" b="0" i="1">
-                <a:solidFill>
-                  <a:srgbClr val="767C84"/>
-                </a:solidFill>
-                <a:latin typeface="Georgia"/>
-              </a:rPr>
-              <a:t>Tractatus Logico-Philosophicus, §5.6 — 1921</a:t>
-            </a:r>
-          </a:p>
-        </p:txBody>
-      </p:sp>
-      <p:sp>
-        <p:nvSpPr>
-          <p:cNvPr id="9" name="TextBox 8"/>
-          <p:cNvSpPr txBox="1"/>
-          <p:nvPr/>
-        </p:nvSpPr>
-        <p:spPr>
-          <a:xfrm>
-            <a:off x="1673352" y="5413248"/>
-            <a:ext cx="8442655" cy="822960"/>
-          </a:xfrm>
-          <a:prstGeom prst="rect">
-            <a:avLst/>
-          </a:prstGeom>
-          <a:noFill/>
-        </p:spPr>
-        <p:txBody>
-          <a:bodyPr wrap="square" lIns="0" rIns="0" tIns="0" bIns="0">
-            <a:spAutoFit/>
-          </a:bodyPr>
-          <a:lstStyle/>
-          <a:p>
-            <a:pPr>
-              <a:lnSpc>
-                <a:spcPct val="126000"/>
-              </a:lnSpc>
-            </a:pPr>
-            <a:r>
-              <a:rPr sz="1350" b="0" i="0">
-                <a:solidFill>
-                  <a:srgbClr val="8E959C"/>
-                </a:solidFill>
-                <a:latin typeface="Arial"/>
-              </a:rPr>
-              <a:t>Le technicien de câblage pense, compte et raconte sa journée en darija. </a:t>
-            </a:r>
-            <a:r>
-              <a:rPr sz="1350" b="1" i="0">
-                <a:solidFill>
-                  <a:srgbClr val="D3D8DD"/>
-                </a:solidFill>
-                <a:latin typeface="Arial"/>
-              </a:rPr>
-              <a:t>Lui demander un rapport en français, c'est rétrécir ce qu'il peut dire.</a:t>
-            </a:r>
-            <a:r>
-              <a:rPr sz="1350" b="0" i="0">
-                <a:solidFill>
-                  <a:srgbClr val="8E959C"/>
-                </a:solidFill>
-                <a:latin typeface="Arial"/>
-              </a:rPr>
-              <a:t> Tout le projet tient dans le refus de lui faire faire ce trajet.</a:t>
-            </a:r>
-          </a:p>
-        </p:txBody>
-      </p:sp>
-      <p:sp>
-        <p:nvSpPr>
-          <p:cNvPr id="10" name="TextBox 9"/>
-          <p:cNvSpPr txBox="1"/>
-          <p:nvPr/>
-        </p:nvSpPr>
-        <p:spPr>
-          <a:xfrm>
-            <a:off x="777240" y="6327648"/>
-            <a:ext cx="10088575" cy="201168"/>
-          </a:xfrm>
-          <a:prstGeom prst="rect">
-            <a:avLst/>
-          </a:prstGeom>
-          <a:noFill/>
-        </p:spPr>
-        <p:txBody>
-          <a:bodyPr wrap="square" lIns="0" rIns="0" tIns="0" bIns="0">
-            <a:spAutoFit/>
-          </a:bodyPr>
-          <a:lstStyle/>
-          <a:p>
-            <a:r>
-              <a:rPr sz="850" b="0" i="0">
-                <a:solidFill>
-                  <a:srgbClr val="9A9A9A"/>
-                </a:solidFill>
-                <a:latin typeface="Arial"/>
-              </a:rPr>
-              <a:t>AZnet — Automatisation des rapports journaliers de chantier par IA</a:t>
-            </a:r>
-          </a:p>
-        </p:txBody>
-      </p:sp>
-      <p:sp>
-        <p:nvSpPr>
-          <p:cNvPr id="11" name="TextBox 10"/>
-          <p:cNvSpPr txBox="1"/>
-          <p:nvPr/>
-        </p:nvSpPr>
-        <p:spPr>
-          <a:xfrm>
-            <a:off x="10865815" y="6327648"/>
-            <a:ext cx="548640" cy="201168"/>
-          </a:xfrm>
-          <a:prstGeom prst="rect">
-            <a:avLst/>
-          </a:prstGeom>
-          <a:noFill/>
-        </p:spPr>
-        <p:txBody>
-          <a:bodyPr wrap="square" lIns="0" rIns="0" tIns="0" bIns="0">
-            <a:spAutoFit/>
-          </a:bodyPr>
-          <a:lstStyle/>
-          <a:p>
-            <a:pPr algn="r"/>
-            <a:r>
-              <a:rPr sz="850" b="1" i="0">
-                <a:solidFill>
-                  <a:srgbClr val="9A9A9A"/>
-                </a:solidFill>
-                <a:latin typeface="Arial"/>
-              </a:rPr>
-              <a:t>3</a:t>
-            </a:r>
-          </a:p>
-        </p:txBody>
-      </p:sp>
+            <a:ext cx="12191695" cy="6858000"/>
+          </a:xfrm>
+          <a:prstGeom prst="rect">
+            <a:avLst/>
+          </a:prstGeom>
+        </p:spPr>
+      </p:pic>
     </p:spTree>
   </p:cSld>
   <p:clrMapOvr>

--- a/Pres+report/Soutenance-PFE.pptx
+++ b/Pres+report/Soutenance-PFE.pptx
@@ -3572,7 +3572,7 @@
                 </a:solidFill>
                 <a:latin typeface="Arial"/>
               </a:rPr>
-              <a:t>AZNET — Casablanca</a:t>
+              <a:t>AZNET — Rabat</a:t>
             </a:r>
           </a:p>
           <a:p>

--- a/Pres+report/Soutenance-PFE.pptx
+++ b/Pres+report/Soutenance-PFE.pptx
@@ -6,37 +6,37 @@
   </p:sldMasterIdLst>
   <p:sldIdLst>
     <p:sldId id="256" r:id="rId7"/>
-    <p:sldId id="257" r:id="rId8"/>
-    <p:sldId id="258" r:id="rId9"/>
-    <p:sldId id="259" r:id="rId10"/>
-    <p:sldId id="260" r:id="rId11"/>
-    <p:sldId id="261" r:id="rId12"/>
-    <p:sldId id="262" r:id="rId13"/>
-    <p:sldId id="263" r:id="rId14"/>
-    <p:sldId id="264" r:id="rId15"/>
-    <p:sldId id="265" r:id="rId16"/>
-    <p:sldId id="266" r:id="rId17"/>
-    <p:sldId id="267" r:id="rId18"/>
-    <p:sldId id="268" r:id="rId19"/>
-    <p:sldId id="269" r:id="rId20"/>
-    <p:sldId id="270" r:id="rId21"/>
-    <p:sldId id="271" r:id="rId22"/>
-    <p:sldId id="272" r:id="rId23"/>
-    <p:sldId id="273" r:id="rId24"/>
-    <p:sldId id="274" r:id="rId25"/>
-    <p:sldId id="275" r:id="rId26"/>
-    <p:sldId id="276" r:id="rId27"/>
-    <p:sldId id="277" r:id="rId28"/>
-    <p:sldId id="278" r:id="rId29"/>
-    <p:sldId id="279" r:id="rId30"/>
-    <p:sldId id="280" r:id="rId31"/>
-    <p:sldId id="281" r:id="rId32"/>
-    <p:sldId id="282" r:id="rId33"/>
-    <p:sldId id="283" r:id="rId34"/>
-    <p:sldId id="284" r:id="rId35"/>
-    <p:sldId id="285" r:id="rId36"/>
-    <p:sldId id="286" r:id="rId37"/>
-    <p:sldId id="287" r:id="rId38"/>
+    <p:sldId id="257" r:id="rId9"/>
+    <p:sldId id="258" r:id="rId10"/>
+    <p:sldId id="259" r:id="rId11"/>
+    <p:sldId id="260" r:id="rId12"/>
+    <p:sldId id="261" r:id="rId13"/>
+    <p:sldId id="262" r:id="rId14"/>
+    <p:sldId id="263" r:id="rId15"/>
+    <p:sldId id="264" r:id="rId16"/>
+    <p:sldId id="265" r:id="rId17"/>
+    <p:sldId id="266" r:id="rId18"/>
+    <p:sldId id="267" r:id="rId19"/>
+    <p:sldId id="268" r:id="rId20"/>
+    <p:sldId id="269" r:id="rId21"/>
+    <p:sldId id="270" r:id="rId22"/>
+    <p:sldId id="271" r:id="rId23"/>
+    <p:sldId id="272" r:id="rId24"/>
+    <p:sldId id="273" r:id="rId25"/>
+    <p:sldId id="274" r:id="rId26"/>
+    <p:sldId id="275" r:id="rId27"/>
+    <p:sldId id="276" r:id="rId28"/>
+    <p:sldId id="277" r:id="rId29"/>
+    <p:sldId id="278" r:id="rId30"/>
+    <p:sldId id="279" r:id="rId31"/>
+    <p:sldId id="280" r:id="rId32"/>
+    <p:sldId id="281" r:id="rId33"/>
+    <p:sldId id="282" r:id="rId34"/>
+    <p:sldId id="283" r:id="rId35"/>
+    <p:sldId id="284" r:id="rId36"/>
+    <p:sldId id="285" r:id="rId37"/>
+    <p:sldId id="286" r:id="rId38"/>
+    <p:sldId id="287" r:id="rId39"/>
   </p:sldIdLst>
   <p:sldSz cx="12191695" cy="6858000" type="screen4x3"/>
   <p:notesSz cx="6858000" cy="9144000"/>
@@ -136,6 +136,2481 @@
     </a:lvl9pPr>
   </p:defaultTextStyle>
 </p:presentation>
+</file>
+
+<file path=ppt/notesMasters/notesMaster1.xml><?xml version="1.0" encoding="utf-8"?>
+<p:notesMaster xmlns:a="http://schemas.openxmlformats.org/drawingml/2006/main" xmlns:p="http://schemas.openxmlformats.org/presentationml/2006/main" xmlns:r="http://schemas.openxmlformats.org/officeDocument/2006/relationships">
+  <p:cSld>
+    <p:bg>
+      <p:bgRef idx="1001">
+        <a:schemeClr val="bg1"/>
+      </p:bgRef>
+    </p:bg>
+    <p:spTree>
+      <p:nvGrpSpPr>
+        <p:cNvPr id="1" name=""/>
+        <p:cNvGrpSpPr/>
+        <p:nvPr/>
+      </p:nvGrpSpPr>
+      <p:grpSpPr>
+        <a:xfrm>
+          <a:off x="0" y="0"/>
+          <a:ext cx="0" cy="0"/>
+          <a:chOff x="0" y="0"/>
+          <a:chExt cx="0" cy="0"/>
+        </a:xfrm>
+      </p:grpSpPr>
+      <p:sp>
+        <p:nvSpPr>
+          <p:cNvPr id="2" name="Header Placeholder 1"/>
+          <p:cNvSpPr>
+            <a:spLocks noGrp="1"/>
+          </p:cNvSpPr>
+          <p:nvPr>
+            <p:ph type="hdr" sz="quarter"/>
+          </p:nvPr>
+        </p:nvSpPr>
+        <p:spPr>
+          <a:xfrm>
+            <a:off x="0" y="0"/>
+            <a:ext cx="2971800" cy="457200"/>
+          </a:xfrm>
+          <a:prstGeom prst="rect">
+            <a:avLst/>
+          </a:prstGeom>
+        </p:spPr>
+        <p:txBody>
+          <a:bodyPr vert="horz" lIns="91440" tIns="45720" rIns="91440" bIns="45720" rtlCol="0"/>
+          <a:lstStyle>
+            <a:lvl1pPr algn="l">
+              <a:defRPr sz="1200"/>
+            </a:lvl1pPr>
+          </a:lstStyle>
+          <a:p>
+            <a:endParaRPr lang="en-US"/>
+          </a:p>
+        </p:txBody>
+      </p:sp>
+      <p:sp>
+        <p:nvSpPr>
+          <p:cNvPr id="3" name="Date Placeholder 2"/>
+          <p:cNvSpPr>
+            <a:spLocks noGrp="1"/>
+          </p:cNvSpPr>
+          <p:nvPr>
+            <p:ph type="dt" idx="1"/>
+          </p:nvPr>
+        </p:nvSpPr>
+        <p:spPr>
+          <a:xfrm>
+            <a:off x="3884613" y="0"/>
+            <a:ext cx="2971800" cy="457200"/>
+          </a:xfrm>
+          <a:prstGeom prst="rect">
+            <a:avLst/>
+          </a:prstGeom>
+        </p:spPr>
+        <p:txBody>
+          <a:bodyPr vert="horz" lIns="91440" tIns="45720" rIns="91440" bIns="45720" rtlCol="0"/>
+          <a:lstStyle>
+            <a:lvl1pPr algn="r">
+              <a:defRPr sz="1200"/>
+            </a:lvl1pPr>
+          </a:lstStyle>
+          <a:p>
+            <a:fld id="{0F89C1C7-3DCD-1040-A9CF-14679D8B5DDD}" type="datetimeFigureOut">
+              <a:rPr lang="en-US" smtClean="0"/>
+              <a:t>10/17/16</a:t>
+            </a:fld>
+            <a:endParaRPr lang="en-US"/>
+          </a:p>
+        </p:txBody>
+      </p:sp>
+      <p:sp>
+        <p:nvSpPr>
+          <p:cNvPr id="4" name="Slide Image Placeholder 3"/>
+          <p:cNvSpPr>
+            <a:spLocks noGrp="1" noRot="1" noChangeAspect="1"/>
+          </p:cNvSpPr>
+          <p:nvPr>
+            <p:ph type="sldImg" idx="2"/>
+          </p:nvPr>
+        </p:nvSpPr>
+        <p:spPr>
+          <a:xfrm>
+            <a:off x="1143000" y="685800"/>
+            <a:ext cx="4572000" cy="3429000"/>
+          </a:xfrm>
+          <a:prstGeom prst="rect">
+            <a:avLst/>
+          </a:prstGeom>
+          <a:noFill/>
+          <a:ln w="12700">
+            <a:solidFill>
+              <a:prstClr val="black"/>
+            </a:solidFill>
+          </a:ln>
+        </p:spPr>
+        <p:txBody>
+          <a:bodyPr vert="horz" lIns="91440" tIns="45720" rIns="91440" bIns="45720" rtlCol="0" anchor="ctr"/>
+          <a:lstStyle/>
+          <a:p>
+            <a:endParaRPr lang="en-US"/>
+          </a:p>
+        </p:txBody>
+      </p:sp>
+      <p:sp>
+        <p:nvSpPr>
+          <p:cNvPr id="5" name="Notes Placeholder 4"/>
+          <p:cNvSpPr>
+            <a:spLocks noGrp="1"/>
+          </p:cNvSpPr>
+          <p:nvPr>
+            <p:ph type="body" sz="quarter" idx="3"/>
+          </p:nvPr>
+        </p:nvSpPr>
+        <p:spPr>
+          <a:xfrm>
+            <a:off x="685800" y="4343400"/>
+            <a:ext cx="5486400" cy="4114800"/>
+          </a:xfrm>
+          <a:prstGeom prst="rect">
+            <a:avLst/>
+          </a:prstGeom>
+        </p:spPr>
+        <p:txBody>
+          <a:bodyPr vert="horz" lIns="91440" tIns="45720" rIns="91440" bIns="45720" rtlCol="0"/>
+          <a:lstStyle/>
+          <a:p>
+            <a:pPr lvl="0"/>
+            <a:r>
+              <a:rPr lang="en-US" smtClean="0"/>
+              <a:t>Click to edit Master text styles</a:t>
+            </a:r>
+          </a:p>
+          <a:p>
+            <a:pPr lvl="1"/>
+            <a:r>
+              <a:rPr lang="en-US" smtClean="0"/>
+              <a:t>Second level</a:t>
+            </a:r>
+          </a:p>
+          <a:p>
+            <a:pPr lvl="2"/>
+            <a:r>
+              <a:rPr lang="en-US" smtClean="0"/>
+              <a:t>Third level</a:t>
+            </a:r>
+          </a:p>
+          <a:p>
+            <a:pPr lvl="3"/>
+            <a:r>
+              <a:rPr lang="en-US" smtClean="0"/>
+              <a:t>Fourth level</a:t>
+            </a:r>
+          </a:p>
+          <a:p>
+            <a:pPr lvl="4"/>
+            <a:r>
+              <a:rPr lang="en-US" smtClean="0"/>
+              <a:t>Fifth level</a:t>
+            </a:r>
+            <a:endParaRPr lang="en-US"/>
+          </a:p>
+        </p:txBody>
+      </p:sp>
+      <p:sp>
+        <p:nvSpPr>
+          <p:cNvPr id="6" name="Footer Placeholder 5"/>
+          <p:cNvSpPr>
+            <a:spLocks noGrp="1"/>
+          </p:cNvSpPr>
+          <p:nvPr>
+            <p:ph type="ftr" sz="quarter" idx="4"/>
+          </p:nvPr>
+        </p:nvSpPr>
+        <p:spPr>
+          <a:xfrm>
+            <a:off x="0" y="8685213"/>
+            <a:ext cx="2971800" cy="457200"/>
+          </a:xfrm>
+          <a:prstGeom prst="rect">
+            <a:avLst/>
+          </a:prstGeom>
+        </p:spPr>
+        <p:txBody>
+          <a:bodyPr vert="horz" lIns="91440" tIns="45720" rIns="91440" bIns="45720" rtlCol="0" anchor="b"/>
+          <a:lstStyle>
+            <a:lvl1pPr algn="l">
+              <a:defRPr sz="1200"/>
+            </a:lvl1pPr>
+          </a:lstStyle>
+          <a:p>
+            <a:endParaRPr lang="en-US"/>
+          </a:p>
+        </p:txBody>
+      </p:sp>
+      <p:sp>
+        <p:nvSpPr>
+          <p:cNvPr id="7" name="Slide Number Placeholder 6"/>
+          <p:cNvSpPr>
+            <a:spLocks noGrp="1"/>
+          </p:cNvSpPr>
+          <p:nvPr>
+            <p:ph type="sldNum" sz="quarter" idx="5"/>
+          </p:nvPr>
+        </p:nvSpPr>
+        <p:spPr>
+          <a:xfrm>
+            <a:off x="3884613" y="8685213"/>
+            <a:ext cx="2971800" cy="457200"/>
+          </a:xfrm>
+          <a:prstGeom prst="rect">
+            <a:avLst/>
+          </a:prstGeom>
+        </p:spPr>
+        <p:txBody>
+          <a:bodyPr vert="horz" lIns="91440" tIns="45720" rIns="91440" bIns="45720" rtlCol="0" anchor="b"/>
+          <a:lstStyle>
+            <a:lvl1pPr algn="r">
+              <a:defRPr sz="1200"/>
+            </a:lvl1pPr>
+          </a:lstStyle>
+          <a:p>
+            <a:fld id="{BB5E49A5-4136-284D-997B-48E1D791AD67}" type="slidenum">
+              <a:rPr lang="en-US" smtClean="0"/>
+              <a:t>‹#›</a:t>
+            </a:fld>
+            <a:endParaRPr lang="en-US"/>
+          </a:p>
+        </p:txBody>
+      </p:sp>
+    </p:spTree>
+    <p:extLst>
+      <p:ext uri="{BB962C8B-B14F-4D97-AF65-F5344CB8AC3E}">
+        <p14:creationId xmlns:p14="http://schemas.microsoft.com/office/powerpoint/2010/main" val="2623252185"/>
+      </p:ext>
+    </p:extLst>
+  </p:cSld>
+  <p:clrMap bg1="lt1" tx1="dk1" bg2="lt2" tx2="dk2" accent1="accent1" accent2="accent2" accent3="accent3" accent4="accent4" accent5="accent5" accent6="accent6" hlink="hlink" folHlink="folHlink"/>
+  <p:notesStyle>
+    <a:lvl1pPr marL="0" algn="l" defTabSz="457200" rtl="0" eaLnBrk="1" latinLnBrk="0" hangingPunct="1">
+      <a:defRPr sz="1200" kern="1200">
+        <a:solidFill>
+          <a:schemeClr val="tx1"/>
+        </a:solidFill>
+        <a:latin typeface="+mn-lt"/>
+        <a:ea typeface="+mn-ea"/>
+        <a:cs typeface="+mn-cs"/>
+      </a:defRPr>
+    </a:lvl1pPr>
+    <a:lvl2pPr marL="457200" algn="l" defTabSz="457200" rtl="0" eaLnBrk="1" latinLnBrk="0" hangingPunct="1">
+      <a:defRPr sz="1200" kern="1200">
+        <a:solidFill>
+          <a:schemeClr val="tx1"/>
+        </a:solidFill>
+        <a:latin typeface="+mn-lt"/>
+        <a:ea typeface="+mn-ea"/>
+        <a:cs typeface="+mn-cs"/>
+      </a:defRPr>
+    </a:lvl2pPr>
+    <a:lvl3pPr marL="914400" algn="l" defTabSz="457200" rtl="0" eaLnBrk="1" latinLnBrk="0" hangingPunct="1">
+      <a:defRPr sz="1200" kern="1200">
+        <a:solidFill>
+          <a:schemeClr val="tx1"/>
+        </a:solidFill>
+        <a:latin typeface="+mn-lt"/>
+        <a:ea typeface="+mn-ea"/>
+        <a:cs typeface="+mn-cs"/>
+      </a:defRPr>
+    </a:lvl3pPr>
+    <a:lvl4pPr marL="1371600" algn="l" defTabSz="457200" rtl="0" eaLnBrk="1" latinLnBrk="0" hangingPunct="1">
+      <a:defRPr sz="1200" kern="1200">
+        <a:solidFill>
+          <a:schemeClr val="tx1"/>
+        </a:solidFill>
+        <a:latin typeface="+mn-lt"/>
+        <a:ea typeface="+mn-ea"/>
+        <a:cs typeface="+mn-cs"/>
+      </a:defRPr>
+    </a:lvl4pPr>
+    <a:lvl5pPr marL="1828800" algn="l" defTabSz="457200" rtl="0" eaLnBrk="1" latinLnBrk="0" hangingPunct="1">
+      <a:defRPr sz="1200" kern="1200">
+        <a:solidFill>
+          <a:schemeClr val="tx1"/>
+        </a:solidFill>
+        <a:latin typeface="+mn-lt"/>
+        <a:ea typeface="+mn-ea"/>
+        <a:cs typeface="+mn-cs"/>
+      </a:defRPr>
+    </a:lvl5pPr>
+    <a:lvl6pPr marL="2286000" algn="l" defTabSz="457200" rtl="0" eaLnBrk="1" latinLnBrk="0" hangingPunct="1">
+      <a:defRPr sz="1200" kern="1200">
+        <a:solidFill>
+          <a:schemeClr val="tx1"/>
+        </a:solidFill>
+        <a:latin typeface="+mn-lt"/>
+        <a:ea typeface="+mn-ea"/>
+        <a:cs typeface="+mn-cs"/>
+      </a:defRPr>
+    </a:lvl6pPr>
+    <a:lvl7pPr marL="2743200" algn="l" defTabSz="457200" rtl="0" eaLnBrk="1" latinLnBrk="0" hangingPunct="1">
+      <a:defRPr sz="1200" kern="1200">
+        <a:solidFill>
+          <a:schemeClr val="tx1"/>
+        </a:solidFill>
+        <a:latin typeface="+mn-lt"/>
+        <a:ea typeface="+mn-ea"/>
+        <a:cs typeface="+mn-cs"/>
+      </a:defRPr>
+    </a:lvl7pPr>
+    <a:lvl8pPr marL="3200400" algn="l" defTabSz="457200" rtl="0" eaLnBrk="1" latinLnBrk="0" hangingPunct="1">
+      <a:defRPr sz="1200" kern="1200">
+        <a:solidFill>
+          <a:schemeClr val="tx1"/>
+        </a:solidFill>
+        <a:latin typeface="+mn-lt"/>
+        <a:ea typeface="+mn-ea"/>
+        <a:cs typeface="+mn-cs"/>
+      </a:defRPr>
+    </a:lvl8pPr>
+    <a:lvl9pPr marL="3657600" algn="l" defTabSz="457200" rtl="0" eaLnBrk="1" latinLnBrk="0" hangingPunct="1">
+      <a:defRPr sz="1200" kern="1200">
+        <a:solidFill>
+          <a:schemeClr val="tx1"/>
+        </a:solidFill>
+        <a:latin typeface="+mn-lt"/>
+        <a:ea typeface="+mn-ea"/>
+        <a:cs typeface="+mn-cs"/>
+      </a:defRPr>
+    </a:lvl9pPr>
+  </p:notesStyle>
+</p:notesMaster>
+</file>
+
+<file path=ppt/notesSlides/notesSlide1.xml><?xml version="1.0" encoding="utf-8"?>
+<p:notes xmlns:a="http://schemas.openxmlformats.org/drawingml/2006/main" xmlns:p="http://schemas.openxmlformats.org/presentationml/2006/main" xmlns:r="http://schemas.openxmlformats.org/officeDocument/2006/relationships">
+  <p:cSld>
+    <p:spTree>
+      <p:nvGrpSpPr>
+        <p:cNvPr id="1" name=""/>
+        <p:cNvGrpSpPr/>
+        <p:nvPr/>
+      </p:nvGrpSpPr>
+      <p:grpSpPr>
+        <a:xfrm>
+          <a:off x="0" y="0"/>
+          <a:ext cx="0" cy="0"/>
+          <a:chOff x="0" y="0"/>
+          <a:chExt cx="0" cy="0"/>
+        </a:xfrm>
+      </p:grpSpPr>
+      <p:sp>
+        <p:nvSpPr>
+          <p:cNvPr id="2" name="Slide Image Placeholder 1"/>
+          <p:cNvSpPr>
+            <a:spLocks noGrp="1"/>
+          </p:cNvSpPr>
+          <p:nvPr>
+            <p:ph type="sldImg" idx="2"/>
+          </p:nvPr>
+        </p:nvSpPr>
+        <p:spPr/>
+      </p:sp>
+      <p:sp>
+        <p:nvSpPr>
+          <p:cNvPr id="3" name="Notes Placeholder 2"/>
+          <p:cNvSpPr>
+            <a:spLocks noGrp="1"/>
+          </p:cNvSpPr>
+          <p:nvPr>
+            <p:ph type="body" idx="3" sz="quarter"/>
+          </p:nvPr>
+        </p:nvSpPr>
+        <p:spPr/>
+        <p:txBody>
+          <a:bodyPr/>
+          <a:lstStyle/>
+          <a:p>
+            <a:r>
+              <a:t>[30 s] Bonjour. Mohammed Yassine MAGRI, filière Ingénierie Informatique et</a:t>
+            </a:r>
+          </a:p>
+          <a:p>
+            <a:r>
+              <a:t>Réseaux. Sujet : automatiser les rapports journaliers de chantier chez AZNET,</a:t>
+            </a:r>
+          </a:p>
+          <a:p>
+            <a:r>
+              <a:t>à Rabat, à partir de notes vocales en darija.</a:t>
+            </a:r>
+          </a:p>
+          <a:p>
+            <a:r>
+              <a:t>Attendre que le jury soit installé avant de commencer.</a:t>
+            </a:r>
+          </a:p>
+        </p:txBody>
+      </p:sp>
+      <p:sp>
+        <p:nvSpPr>
+          <p:cNvPr id="4" name="Slide Number Placeholder 3"/>
+          <p:cNvSpPr>
+            <a:spLocks noGrp="1"/>
+          </p:cNvSpPr>
+          <p:nvPr>
+            <p:ph type="sldNum" idx="5" sz="quarter"/>
+          </p:nvPr>
+        </p:nvSpPr>
+        <p:spPr/>
+      </p:sp>
+    </p:spTree>
+  </p:cSld>
+  <p:clrMapOvr>
+    <a:masterClrMapping/>
+  </p:clrMapOvr>
+</p:notes>
+</file>
+
+<file path=ppt/notesSlides/notesSlide10.xml><?xml version="1.0" encoding="utf-8"?>
+<p:notes xmlns:a="http://schemas.openxmlformats.org/drawingml/2006/main" xmlns:p="http://schemas.openxmlformats.org/presentationml/2006/main" xmlns:r="http://schemas.openxmlformats.org/officeDocument/2006/relationships">
+  <p:cSld>
+    <p:spTree>
+      <p:nvGrpSpPr>
+        <p:cNvPr id="1" name=""/>
+        <p:cNvGrpSpPr/>
+        <p:nvPr/>
+      </p:nvGrpSpPr>
+      <p:grpSpPr>
+        <a:xfrm>
+          <a:off x="0" y="0"/>
+          <a:ext cx="0" cy="0"/>
+          <a:chOff x="0" y="0"/>
+          <a:chExt cx="0" cy="0"/>
+        </a:xfrm>
+      </p:grpSpPr>
+      <p:sp>
+        <p:nvSpPr>
+          <p:cNvPr id="2" name="Slide Image Placeholder 1"/>
+          <p:cNvSpPr>
+            <a:spLocks noGrp="1"/>
+          </p:cNvSpPr>
+          <p:nvPr>
+            <p:ph type="sldImg" idx="2"/>
+          </p:nvPr>
+        </p:nvSpPr>
+        <p:spPr/>
+      </p:sp>
+      <p:sp>
+        <p:nvSpPr>
+          <p:cNvPr id="3" name="Notes Placeholder 2"/>
+          <p:cNvSpPr>
+            <a:spLocks noGrp="1"/>
+          </p:cNvSpPr>
+          <p:nvPr>
+            <p:ph type="body" idx="3" sz="quarter"/>
+          </p:nvPr>
+        </p:nvSpPr>
+        <p:spPr/>
+        <p:txBody>
+          <a:bodyPr/>
+          <a:lstStyle/>
+          <a:p>
+            <a:r>
+              <a:t>[1 min 30] Architecture hybride : n8n orchestre, le service Python fait l'IA.</a:t>
+            </a:r>
+          </a:p>
+          <a:p>
+            <a:r>
+              <a:t>La frontière est le sujet de la diapositive suivante, ne pas l'anticiper ici.</a:t>
+            </a:r>
+          </a:p>
+          <a:p>
+            <a:r>
+              <a:t>Cinq services, une seule origine publique.</a:t>
+            </a:r>
+          </a:p>
+        </p:txBody>
+      </p:sp>
+      <p:sp>
+        <p:nvSpPr>
+          <p:cNvPr id="4" name="Slide Number Placeholder 3"/>
+          <p:cNvSpPr>
+            <a:spLocks noGrp="1"/>
+          </p:cNvSpPr>
+          <p:nvPr>
+            <p:ph type="sldNum" idx="5" sz="quarter"/>
+          </p:nvPr>
+        </p:nvSpPr>
+        <p:spPr/>
+      </p:sp>
+    </p:spTree>
+  </p:cSld>
+  <p:clrMapOvr>
+    <a:masterClrMapping/>
+  </p:clrMapOvr>
+</p:notes>
+</file>
+
+<file path=ppt/notesSlides/notesSlide11.xml><?xml version="1.0" encoding="utf-8"?>
+<p:notes xmlns:a="http://schemas.openxmlformats.org/drawingml/2006/main" xmlns:p="http://schemas.openxmlformats.org/presentationml/2006/main" xmlns:r="http://schemas.openxmlformats.org/officeDocument/2006/relationships">
+  <p:cSld>
+    <p:spTree>
+      <p:nvGrpSpPr>
+        <p:cNvPr id="1" name=""/>
+        <p:cNvGrpSpPr/>
+        <p:nvPr/>
+      </p:nvGrpSpPr>
+      <p:grpSpPr>
+        <a:xfrm>
+          <a:off x="0" y="0"/>
+          <a:ext cx="0" cy="0"/>
+          <a:chOff x="0" y="0"/>
+          <a:chExt cx="0" cy="0"/>
+        </a:xfrm>
+      </p:grpSpPr>
+      <p:sp>
+        <p:nvSpPr>
+          <p:cNvPr id="2" name="Slide Image Placeholder 1"/>
+          <p:cNvSpPr>
+            <a:spLocks noGrp="1"/>
+          </p:cNvSpPr>
+          <p:nvPr>
+            <p:ph type="sldImg" idx="2"/>
+          </p:nvPr>
+        </p:nvSpPr>
+        <p:spPr/>
+      </p:sp>
+      <p:sp>
+        <p:nvSpPr>
+          <p:cNvPr id="3" name="Notes Placeholder 2"/>
+          <p:cNvSpPr>
+            <a:spLocks noGrp="1"/>
+          </p:cNvSpPr>
+          <p:nvPr>
+            <p:ph type="body" idx="3" sz="quarter"/>
+          </p:nvPr>
+        </p:nvSpPr>
+        <p:spPr/>
+        <p:txBody>
+          <a:bodyPr/>
+          <a:lstStyle/>
+          <a:p>
+            <a:r>
+              <a:t>[1 min] Pourquoi cette frontière : ce qui est testable va dans le code, ce qui</a:t>
+            </a:r>
+          </a:p>
+          <a:p>
+            <a:r>
+              <a:t>est du câblage reste dans n8n. Exemple concret si on demande — la fusion d'une</a:t>
+            </a:r>
+          </a:p>
+          <a:p>
+            <a:r>
+              <a:t>ligne de journal a quitté n8n parce qu'un nœud IF ne sait pas relire une ligne.</a:t>
+            </a:r>
+          </a:p>
+        </p:txBody>
+      </p:sp>
+      <p:sp>
+        <p:nvSpPr>
+          <p:cNvPr id="4" name="Slide Number Placeholder 3"/>
+          <p:cNvSpPr>
+            <a:spLocks noGrp="1"/>
+          </p:cNvSpPr>
+          <p:nvPr>
+            <p:ph type="sldNum" idx="5" sz="quarter"/>
+          </p:nvPr>
+        </p:nvSpPr>
+        <p:spPr/>
+      </p:sp>
+    </p:spTree>
+  </p:cSld>
+  <p:clrMapOvr>
+    <a:masterClrMapping/>
+  </p:clrMapOvr>
+</p:notes>
+</file>
+
+<file path=ppt/notesSlides/notesSlide12.xml><?xml version="1.0" encoding="utf-8"?>
+<p:notes xmlns:a="http://schemas.openxmlformats.org/drawingml/2006/main" xmlns:p="http://schemas.openxmlformats.org/presentationml/2006/main" xmlns:r="http://schemas.openxmlformats.org/officeDocument/2006/relationships">
+  <p:cSld>
+    <p:spTree>
+      <p:nvGrpSpPr>
+        <p:cNvPr id="1" name=""/>
+        <p:cNvGrpSpPr/>
+        <p:nvPr/>
+      </p:nvGrpSpPr>
+      <p:grpSpPr>
+        <a:xfrm>
+          <a:off x="0" y="0"/>
+          <a:ext cx="0" cy="0"/>
+          <a:chOff x="0" y="0"/>
+          <a:chExt cx="0" cy="0"/>
+        </a:xfrm>
+      </p:grpSpPr>
+      <p:sp>
+        <p:nvSpPr>
+          <p:cNvPr id="2" name="Slide Image Placeholder 1"/>
+          <p:cNvSpPr>
+            <a:spLocks noGrp="1"/>
+          </p:cNvSpPr>
+          <p:nvPr>
+            <p:ph type="sldImg" idx="2"/>
+          </p:nvPr>
+        </p:nvSpPr>
+        <p:spPr/>
+      </p:sp>
+      <p:sp>
+        <p:nvSpPr>
+          <p:cNvPr id="3" name="Notes Placeholder 2"/>
+          <p:cNvSpPr>
+            <a:spLocks noGrp="1"/>
+          </p:cNvSpPr>
+          <p:nvPr>
+            <p:ph type="body" idx="3" sz="quarter"/>
+          </p:nvPr>
+        </p:nvSpPr>
+        <p:spPr/>
+        <p:txBody>
+          <a:bodyPr/>
+          <a:lstStyle/>
+          <a:p>
+            <a:r>
+              <a:t>[1 min 30] Dérouler le flux une fois, lentement. Le point non évident :</a:t>
+            </a:r>
+          </a:p>
+          <a:p>
+            <a:r>
+              <a:t>la réponse au technicien part AVANT l'écriture du Sheet. Une panne Google ne</a:t>
+            </a:r>
+          </a:p>
+          <a:p>
+            <a:r>
+              <a:t>doit jamais coûter son résumé au technicien ; la ligne est mise en file.</a:t>
+            </a:r>
+          </a:p>
+        </p:txBody>
+      </p:sp>
+      <p:sp>
+        <p:nvSpPr>
+          <p:cNvPr id="4" name="Slide Number Placeholder 3"/>
+          <p:cNvSpPr>
+            <a:spLocks noGrp="1"/>
+          </p:cNvSpPr>
+          <p:nvPr>
+            <p:ph type="sldNum" idx="5" sz="quarter"/>
+          </p:nvPr>
+        </p:nvSpPr>
+        <p:spPr/>
+      </p:sp>
+    </p:spTree>
+  </p:cSld>
+  <p:clrMapOvr>
+    <a:masterClrMapping/>
+  </p:clrMapOvr>
+</p:notes>
+</file>
+
+<file path=ppt/notesSlides/notesSlide13.xml><?xml version="1.0" encoding="utf-8"?>
+<p:notes xmlns:a="http://schemas.openxmlformats.org/drawingml/2006/main" xmlns:p="http://schemas.openxmlformats.org/presentationml/2006/main" xmlns:r="http://schemas.openxmlformats.org/officeDocument/2006/relationships">
+  <p:cSld>
+    <p:spTree>
+      <p:nvGrpSpPr>
+        <p:cNvPr id="1" name=""/>
+        <p:cNvGrpSpPr/>
+        <p:nvPr/>
+      </p:nvGrpSpPr>
+      <p:grpSpPr>
+        <a:xfrm>
+          <a:off x="0" y="0"/>
+          <a:ext cx="0" cy="0"/>
+          <a:chOff x="0" y="0"/>
+          <a:chExt cx="0" cy="0"/>
+        </a:xfrm>
+      </p:grpSpPr>
+      <p:sp>
+        <p:nvSpPr>
+          <p:cNvPr id="2" name="Slide Image Placeholder 1"/>
+          <p:cNvSpPr>
+            <a:spLocks noGrp="1"/>
+          </p:cNvSpPr>
+          <p:nvPr>
+            <p:ph type="sldImg" idx="2"/>
+          </p:nvPr>
+        </p:nvSpPr>
+        <p:spPr/>
+      </p:sp>
+      <p:sp>
+        <p:nvSpPr>
+          <p:cNvPr id="3" name="Notes Placeholder 2"/>
+          <p:cNvSpPr>
+            <a:spLocks noGrp="1"/>
+          </p:cNvSpPr>
+          <p:nvPr>
+            <p:ph type="body" idx="3" sz="quarter"/>
+          </p:nvPr>
+        </p:nvSpPr>
+        <p:spPr/>
+        <p:txBody>
+          <a:bodyPr/>
+          <a:lstStyle/>
+          <a:p>
+            <a:r>
+              <a:t>[1 min 30] Le journal reproduit le fichier du directeur, colonne pour colonne.</a:t>
+            </a:r>
+          </a:p>
+          <a:p>
+            <a:r>
+              <a:t>Deux règles : une ligne par message (jamais de réécriture, une correction</a:t>
+            </a:r>
+          </a:p>
+          <a:p>
+            <a:r>
+              <a:t>fausse ne détruit pas un chiffre juste) et le stock réconcilié, jamais supposé.</a:t>
+            </a:r>
+          </a:p>
+        </p:txBody>
+      </p:sp>
+      <p:sp>
+        <p:nvSpPr>
+          <p:cNvPr id="4" name="Slide Number Placeholder 3"/>
+          <p:cNvSpPr>
+            <a:spLocks noGrp="1"/>
+          </p:cNvSpPr>
+          <p:nvPr>
+            <p:ph type="sldNum" idx="5" sz="quarter"/>
+          </p:nvPr>
+        </p:nvSpPr>
+        <p:spPr/>
+      </p:sp>
+    </p:spTree>
+  </p:cSld>
+  <p:clrMapOvr>
+    <a:masterClrMapping/>
+  </p:clrMapOvr>
+</p:notes>
+</file>
+
+<file path=ppt/notesSlides/notesSlide14.xml><?xml version="1.0" encoding="utf-8"?>
+<p:notes xmlns:a="http://schemas.openxmlformats.org/drawingml/2006/main" xmlns:p="http://schemas.openxmlformats.org/presentationml/2006/main" xmlns:r="http://schemas.openxmlformats.org/officeDocument/2006/relationships">
+  <p:cSld>
+    <p:spTree>
+      <p:nvGrpSpPr>
+        <p:cNvPr id="1" name=""/>
+        <p:cNvGrpSpPr/>
+        <p:nvPr/>
+      </p:nvGrpSpPr>
+      <p:grpSpPr>
+        <a:xfrm>
+          <a:off x="0" y="0"/>
+          <a:ext cx="0" cy="0"/>
+          <a:chOff x="0" y="0"/>
+          <a:chExt cx="0" cy="0"/>
+        </a:xfrm>
+      </p:grpSpPr>
+      <p:sp>
+        <p:nvSpPr>
+          <p:cNvPr id="2" name="Slide Image Placeholder 1"/>
+          <p:cNvSpPr>
+            <a:spLocks noGrp="1"/>
+          </p:cNvSpPr>
+          <p:nvPr>
+            <p:ph type="sldImg" idx="2"/>
+          </p:nvPr>
+        </p:nvSpPr>
+        <p:spPr/>
+      </p:sp>
+      <p:sp>
+        <p:nvSpPr>
+          <p:cNvPr id="3" name="Notes Placeholder 2"/>
+          <p:cNvSpPr>
+            <a:spLocks noGrp="1"/>
+          </p:cNvSpPr>
+          <p:nvPr>
+            <p:ph type="body" idx="3" sz="quarter"/>
+          </p:nvPr>
+        </p:nvSpPr>
+        <p:spPr/>
+        <p:txBody>
+          <a:bodyPr/>
+          <a:lstStyle/>
+          <a:p>
+            <a:r>
+              <a:t>[1 min] Protocole. Assumer la décision de méthode : ni WER ni CER. Le journal</a:t>
+            </a:r>
+          </a:p>
+          <a:p>
+            <a:r>
+              <a:t>ne consomme que des chiffres et des emprunts techniques — c'est cela qu'on</a:t>
+            </a:r>
+          </a:p>
+          <a:p>
+            <a:r>
+              <a:t>mesure, jugé par un locuteur natif contre l'audio.</a:t>
+            </a:r>
+          </a:p>
+        </p:txBody>
+      </p:sp>
+      <p:sp>
+        <p:nvSpPr>
+          <p:cNvPr id="4" name="Slide Number Placeholder 3"/>
+          <p:cNvSpPr>
+            <a:spLocks noGrp="1"/>
+          </p:cNvSpPr>
+          <p:nvPr>
+            <p:ph type="sldNum" idx="5" sz="quarter"/>
+          </p:nvPr>
+        </p:nvSpPr>
+        <p:spPr/>
+      </p:sp>
+    </p:spTree>
+  </p:cSld>
+  <p:clrMapOvr>
+    <a:masterClrMapping/>
+  </p:clrMapOvr>
+</p:notes>
+</file>
+
+<file path=ppt/notesSlides/notesSlide15.xml><?xml version="1.0" encoding="utf-8"?>
+<p:notes xmlns:a="http://schemas.openxmlformats.org/drawingml/2006/main" xmlns:p="http://schemas.openxmlformats.org/presentationml/2006/main" xmlns:r="http://schemas.openxmlformats.org/officeDocument/2006/relationships">
+  <p:cSld>
+    <p:spTree>
+      <p:nvGrpSpPr>
+        <p:cNvPr id="1" name=""/>
+        <p:cNvGrpSpPr/>
+        <p:nvPr/>
+      </p:nvGrpSpPr>
+      <p:grpSpPr>
+        <a:xfrm>
+          <a:off x="0" y="0"/>
+          <a:ext cx="0" cy="0"/>
+          <a:chOff x="0" y="0"/>
+          <a:chExt cx="0" cy="0"/>
+        </a:xfrm>
+      </p:grpSpPr>
+      <p:sp>
+        <p:nvSpPr>
+          <p:cNvPr id="2" name="Slide Image Placeholder 1"/>
+          <p:cNvSpPr>
+            <a:spLocks noGrp="1"/>
+          </p:cNvSpPr>
+          <p:nvPr>
+            <p:ph type="sldImg" idx="2"/>
+          </p:nvPr>
+        </p:nvSpPr>
+        <p:spPr/>
+      </p:sp>
+      <p:sp>
+        <p:nvSpPr>
+          <p:cNvPr id="3" name="Notes Placeholder 2"/>
+          <p:cNvSpPr>
+            <a:spLocks noGrp="1"/>
+          </p:cNvSpPr>
+          <p:nvPr>
+            <p:ph type="body" idx="3" sz="quarter"/>
+          </p:nvPr>
+        </p:nvSpPr>
+        <p:spPr/>
+        <p:txBody>
+          <a:bodyPr/>
+          <a:lstStyle/>
+          <a:p>
+            <a:r>
+              <a:t>[45 s] Trois moteurs par API. Groq est rapide, et c'est le plancher toujours</a:t>
+            </a:r>
+          </a:p>
+          <a:p>
+            <a:r>
+              <a:t>disponible de la chaîne — pas le meilleur.</a:t>
+            </a:r>
+          </a:p>
+        </p:txBody>
+      </p:sp>
+      <p:sp>
+        <p:nvSpPr>
+          <p:cNvPr id="4" name="Slide Number Placeholder 3"/>
+          <p:cNvSpPr>
+            <a:spLocks noGrp="1"/>
+          </p:cNvSpPr>
+          <p:nvPr>
+            <p:ph type="sldNum" idx="5" sz="quarter"/>
+          </p:nvPr>
+        </p:nvSpPr>
+        <p:spPr/>
+      </p:sp>
+    </p:spTree>
+  </p:cSld>
+  <p:clrMapOvr>
+    <a:masterClrMapping/>
+  </p:clrMapOvr>
+</p:notes>
+</file>
+
+<file path=ppt/notesSlides/notesSlide16.xml><?xml version="1.0" encoding="utf-8"?>
+<p:notes xmlns:a="http://schemas.openxmlformats.org/drawingml/2006/main" xmlns:p="http://schemas.openxmlformats.org/presentationml/2006/main" xmlns:r="http://schemas.openxmlformats.org/officeDocument/2006/relationships">
+  <p:cSld>
+    <p:spTree>
+      <p:nvGrpSpPr>
+        <p:cNvPr id="1" name=""/>
+        <p:cNvGrpSpPr/>
+        <p:nvPr/>
+      </p:nvGrpSpPr>
+      <p:grpSpPr>
+        <a:xfrm>
+          <a:off x="0" y="0"/>
+          <a:ext cx="0" cy="0"/>
+          <a:chOff x="0" y="0"/>
+          <a:chExt cx="0" cy="0"/>
+        </a:xfrm>
+      </p:grpSpPr>
+      <p:sp>
+        <p:nvSpPr>
+          <p:cNvPr id="2" name="Slide Image Placeholder 1"/>
+          <p:cNvSpPr>
+            <a:spLocks noGrp="1"/>
+          </p:cNvSpPr>
+          <p:nvPr>
+            <p:ph type="sldImg" idx="2"/>
+          </p:nvPr>
+        </p:nvSpPr>
+        <p:spPr/>
+      </p:sp>
+      <p:sp>
+        <p:nvSpPr>
+          <p:cNvPr id="3" name="Notes Placeholder 2"/>
+          <p:cNvSpPr>
+            <a:spLocks noGrp="1"/>
+          </p:cNvSpPr>
+          <p:nvPr>
+            <p:ph type="body" idx="3" sz="quarter"/>
+          </p:nvPr>
+        </p:nvSpPr>
+        <p:spPr/>
+        <p:txBody>
+          <a:bodyPr/>
+          <a:lstStyle/>
+          <a:p>
+            <a:r>
+              <a:t>[1 min] Douze moteurs en local sur la 3070. Raconter l'hypothèse renversée</a:t>
+            </a:r>
+          </a:p>
+          <a:p>
+            <a:r>
+              <a:t>puis rétablie : les petits affinages darija perdaient, les grands gagnent.</a:t>
+            </a:r>
+          </a:p>
+          <a:p>
+            <a:r>
+              <a:t>C'est la diapositive où l'on montre que le résultat n'était pas acquis.</a:t>
+            </a:r>
+          </a:p>
+        </p:txBody>
+      </p:sp>
+      <p:sp>
+        <p:nvSpPr>
+          <p:cNvPr id="4" name="Slide Number Placeholder 3"/>
+          <p:cNvSpPr>
+            <a:spLocks noGrp="1"/>
+          </p:cNvSpPr>
+          <p:nvPr>
+            <p:ph type="sldNum" idx="5" sz="quarter"/>
+          </p:nvPr>
+        </p:nvSpPr>
+        <p:spPr/>
+      </p:sp>
+    </p:spTree>
+  </p:cSld>
+  <p:clrMapOvr>
+    <a:masterClrMapping/>
+  </p:clrMapOvr>
+</p:notes>
+</file>
+
+<file path=ppt/notesSlides/notesSlide17.xml><?xml version="1.0" encoding="utf-8"?>
+<p:notes xmlns:a="http://schemas.openxmlformats.org/drawingml/2006/main" xmlns:p="http://schemas.openxmlformats.org/presentationml/2006/main" xmlns:r="http://schemas.openxmlformats.org/officeDocument/2006/relationships">
+  <p:cSld>
+    <p:spTree>
+      <p:nvGrpSpPr>
+        <p:cNvPr id="1" name=""/>
+        <p:cNvGrpSpPr/>
+        <p:nvPr/>
+      </p:nvGrpSpPr>
+      <p:grpSpPr>
+        <a:xfrm>
+          <a:off x="0" y="0"/>
+          <a:ext cx="0" cy="0"/>
+          <a:chOff x="0" y="0"/>
+          <a:chExt cx="0" cy="0"/>
+        </a:xfrm>
+      </p:grpSpPr>
+      <p:sp>
+        <p:nvSpPr>
+          <p:cNvPr id="2" name="Slide Image Placeholder 1"/>
+          <p:cNvSpPr>
+            <a:spLocks noGrp="1"/>
+          </p:cNvSpPr>
+          <p:nvPr>
+            <p:ph type="sldImg" idx="2"/>
+          </p:nvPr>
+        </p:nvSpPr>
+        <p:spPr/>
+      </p:sp>
+      <p:sp>
+        <p:nvSpPr>
+          <p:cNvPr id="3" name="Notes Placeholder 2"/>
+          <p:cNvSpPr>
+            <a:spLocks noGrp="1"/>
+          </p:cNvSpPr>
+          <p:nvPr>
+            <p:ph type="body" idx="3" sz="quarter"/>
+          </p:nvPr>
+        </p:nvSpPr>
+        <p:spPr/>
+        <p:txBody>
+          <a:bodyPr/>
+          <a:lstStyle/>
+          <a:p>
+            <a:r>
+              <a:t>[1 min 30] La référence d'exactitude est le modèle darija open-source. Dire</a:t>
+            </a:r>
+          </a:p>
+          <a:p>
+            <a:r>
+              <a:t>tout de suite ce qui suit, avant qu'on le trouve dans la config : il est en</a:t>
+            </a:r>
+          </a:p>
+          <a:p>
+            <a:r>
+              <a:t>REPLI en production, pas en tête. 7,7 s et 4 Go de VRAM se paient sur chaque</a:t>
+            </a:r>
+          </a:p>
+          <a:p>
+            <a:r>
+              <a:t>note ; Gemini répond d'abord, le local prend le relais quand le quota tombe.</a:t>
+            </a:r>
+          </a:p>
+          <a:p>
+            <a:r>
+              <a:t>Le banc d'essai désigne une référence, l'ordre d'appel est une décision</a:t>
+            </a:r>
+          </a:p>
+          <a:p>
+            <a:r>
+              <a:t>d'exploitation.</a:t>
+            </a:r>
+          </a:p>
+        </p:txBody>
+      </p:sp>
+      <p:sp>
+        <p:nvSpPr>
+          <p:cNvPr id="4" name="Slide Number Placeholder 3"/>
+          <p:cNvSpPr>
+            <a:spLocks noGrp="1"/>
+          </p:cNvSpPr>
+          <p:nvPr>
+            <p:ph type="sldNum" idx="5" sz="quarter"/>
+          </p:nvPr>
+        </p:nvSpPr>
+        <p:spPr/>
+      </p:sp>
+    </p:spTree>
+  </p:cSld>
+  <p:clrMapOvr>
+    <a:masterClrMapping/>
+  </p:clrMapOvr>
+</p:notes>
+</file>
+
+<file path=ppt/notesSlides/notesSlide18.xml><?xml version="1.0" encoding="utf-8"?>
+<p:notes xmlns:a="http://schemas.openxmlformats.org/drawingml/2006/main" xmlns:p="http://schemas.openxmlformats.org/presentationml/2006/main" xmlns:r="http://schemas.openxmlformats.org/officeDocument/2006/relationships">
+  <p:cSld>
+    <p:spTree>
+      <p:nvGrpSpPr>
+        <p:cNvPr id="1" name=""/>
+        <p:cNvGrpSpPr/>
+        <p:nvPr/>
+      </p:nvGrpSpPr>
+      <p:grpSpPr>
+        <a:xfrm>
+          <a:off x="0" y="0"/>
+          <a:ext cx="0" cy="0"/>
+          <a:chOff x="0" y="0"/>
+          <a:chExt cx="0" cy="0"/>
+        </a:xfrm>
+      </p:grpSpPr>
+      <p:sp>
+        <p:nvSpPr>
+          <p:cNvPr id="2" name="Slide Image Placeholder 1"/>
+          <p:cNvSpPr>
+            <a:spLocks noGrp="1"/>
+          </p:cNvSpPr>
+          <p:nvPr>
+            <p:ph type="sldImg" idx="2"/>
+          </p:nvPr>
+        </p:nvSpPr>
+        <p:spPr/>
+      </p:sp>
+      <p:sp>
+        <p:nvSpPr>
+          <p:cNvPr id="3" name="Notes Placeholder 2"/>
+          <p:cNvSpPr>
+            <a:spLocks noGrp="1"/>
+          </p:cNvSpPr>
+          <p:nvPr>
+            <p:ph type="body" idx="3" sz="quarter"/>
+          </p:nvPr>
+        </p:nvSpPr>
+        <p:spPr/>
+        <p:txBody>
+          <a:bodyPr/>
+          <a:lstStyle/>
+          <a:p>
+            <a:r>
+              <a:t>[1 min 30] Deuxième banc d'essai. Le chiffre qui frappe : llama-3.1-8b-instant</a:t>
+            </a:r>
+          </a:p>
+          <a:p>
+            <a:r>
+              <a:t>est le plus rapide du tableau ET invente cinq valeurs. La vitesse ne rachète</a:t>
+            </a:r>
+          </a:p>
+          <a:p>
+            <a:r>
+              <a:t>rien quand le modèle remplit des champs à partir de rien.</a:t>
+            </a:r>
+          </a:p>
+          <a:p>
+            <a:r>
+              <a:t>Assumer la limite si on la soulève : les dix cas ont été écrits par l'auteur du</a:t>
+            </a:r>
+          </a:p>
+          <a:p>
+            <a:r>
+              <a:t>système. C'est dit au §4.3.9 du rapport.</a:t>
+            </a:r>
+          </a:p>
+        </p:txBody>
+      </p:sp>
+      <p:sp>
+        <p:nvSpPr>
+          <p:cNvPr id="4" name="Slide Number Placeholder 3"/>
+          <p:cNvSpPr>
+            <a:spLocks noGrp="1"/>
+          </p:cNvSpPr>
+          <p:nvPr>
+            <p:ph type="sldNum" idx="5" sz="quarter"/>
+          </p:nvPr>
+        </p:nvSpPr>
+        <p:spPr/>
+      </p:sp>
+    </p:spTree>
+  </p:cSld>
+  <p:clrMapOvr>
+    <a:masterClrMapping/>
+  </p:clrMapOvr>
+</p:notes>
+</file>
+
+<file path=ppt/notesSlides/notesSlide19.xml><?xml version="1.0" encoding="utf-8"?>
+<p:notes xmlns:a="http://schemas.openxmlformats.org/drawingml/2006/main" xmlns:p="http://schemas.openxmlformats.org/presentationml/2006/main" xmlns:r="http://schemas.openxmlformats.org/officeDocument/2006/relationships">
+  <p:cSld>
+    <p:spTree>
+      <p:nvGrpSpPr>
+        <p:cNvPr id="1" name=""/>
+        <p:cNvGrpSpPr/>
+        <p:nvPr/>
+      </p:nvGrpSpPr>
+      <p:grpSpPr>
+        <a:xfrm>
+          <a:off x="0" y="0"/>
+          <a:ext cx="0" cy="0"/>
+          <a:chOff x="0" y="0"/>
+          <a:chExt cx="0" cy="0"/>
+        </a:xfrm>
+      </p:grpSpPr>
+      <p:sp>
+        <p:nvSpPr>
+          <p:cNvPr id="2" name="Slide Image Placeholder 1"/>
+          <p:cNvSpPr>
+            <a:spLocks noGrp="1"/>
+          </p:cNvSpPr>
+          <p:nvPr>
+            <p:ph type="sldImg" idx="2"/>
+          </p:nvPr>
+        </p:nvSpPr>
+        <p:spPr/>
+      </p:sp>
+      <p:sp>
+        <p:nvSpPr>
+          <p:cNvPr id="3" name="Notes Placeholder 2"/>
+          <p:cNvSpPr>
+            <a:spLocks noGrp="1"/>
+          </p:cNvSpPr>
+          <p:nvPr>
+            <p:ph type="body" idx="3" sz="quarter"/>
+          </p:nvPr>
+        </p:nvSpPr>
+        <p:spPr/>
+        <p:txBody>
+          <a:bodyPr/>
+          <a:lstStyle/>
+          <a:p>
+            <a:r>
+              <a:t>[1 min] Périmètre livré. Rester factuel, ne pas survendre : ce qui tourne, ce</a:t>
+            </a:r>
+          </a:p>
+          <a:p>
+            <a:r>
+              <a:t>qui reste à faire.</a:t>
+            </a:r>
+          </a:p>
+        </p:txBody>
+      </p:sp>
+      <p:sp>
+        <p:nvSpPr>
+          <p:cNvPr id="4" name="Slide Number Placeholder 3"/>
+          <p:cNvSpPr>
+            <a:spLocks noGrp="1"/>
+          </p:cNvSpPr>
+          <p:nvPr>
+            <p:ph type="sldNum" idx="5" sz="quarter"/>
+          </p:nvPr>
+        </p:nvSpPr>
+        <p:spPr/>
+      </p:sp>
+    </p:spTree>
+  </p:cSld>
+  <p:clrMapOvr>
+    <a:masterClrMapping/>
+  </p:clrMapOvr>
+</p:notes>
+</file>
+
+<file path=ppt/notesSlides/notesSlide2.xml><?xml version="1.0" encoding="utf-8"?>
+<p:notes xmlns:a="http://schemas.openxmlformats.org/drawingml/2006/main" xmlns:p="http://schemas.openxmlformats.org/presentationml/2006/main" xmlns:r="http://schemas.openxmlformats.org/officeDocument/2006/relationships">
+  <p:cSld>
+    <p:spTree>
+      <p:nvGrpSpPr>
+        <p:cNvPr id="1" name=""/>
+        <p:cNvGrpSpPr/>
+        <p:nvPr/>
+      </p:nvGrpSpPr>
+      <p:grpSpPr>
+        <a:xfrm>
+          <a:off x="0" y="0"/>
+          <a:ext cx="0" cy="0"/>
+          <a:chOff x="0" y="0"/>
+          <a:chExt cx="0" cy="0"/>
+        </a:xfrm>
+      </p:grpSpPr>
+      <p:sp>
+        <p:nvSpPr>
+          <p:cNvPr id="2" name="Slide Image Placeholder 1"/>
+          <p:cNvSpPr>
+            <a:spLocks noGrp="1"/>
+          </p:cNvSpPr>
+          <p:nvPr>
+            <p:ph type="sldImg" idx="2"/>
+          </p:nvPr>
+        </p:nvSpPr>
+        <p:spPr/>
+      </p:sp>
+      <p:sp>
+        <p:nvSpPr>
+          <p:cNvPr id="3" name="Notes Placeholder 2"/>
+          <p:cNvSpPr>
+            <a:spLocks noGrp="1"/>
+          </p:cNvSpPr>
+          <p:nvPr>
+            <p:ph type="body" idx="3" sz="quarter"/>
+          </p:nvPr>
+        </p:nvSpPr>
+        <p:spPr/>
+        <p:txBody>
+          <a:bodyPr/>
+          <a:lstStyle/>
+          <a:p>
+            <a:r>
+              <a:t>[30 s] Annoncer le parcours en une phrase : le problème, la conception, les</a:t>
+            </a:r>
+          </a:p>
+          <a:p>
+            <a:r>
+              <a:t>bancs d'essai, la démonstration. Ne pas lire les six points.</a:t>
+            </a:r>
+          </a:p>
+        </p:txBody>
+      </p:sp>
+      <p:sp>
+        <p:nvSpPr>
+          <p:cNvPr id="4" name="Slide Number Placeholder 3"/>
+          <p:cNvSpPr>
+            <a:spLocks noGrp="1"/>
+          </p:cNvSpPr>
+          <p:nvPr>
+            <p:ph type="sldNum" idx="5" sz="quarter"/>
+          </p:nvPr>
+        </p:nvSpPr>
+        <p:spPr/>
+      </p:sp>
+    </p:spTree>
+  </p:cSld>
+  <p:clrMapOvr>
+    <a:masterClrMapping/>
+  </p:clrMapOvr>
+</p:notes>
+</file>
+
+<file path=ppt/notesSlides/notesSlide20.xml><?xml version="1.0" encoding="utf-8"?>
+<p:notes xmlns:a="http://schemas.openxmlformats.org/drawingml/2006/main" xmlns:p="http://schemas.openxmlformats.org/presentationml/2006/main" xmlns:r="http://schemas.openxmlformats.org/officeDocument/2006/relationships">
+  <p:cSld>
+    <p:spTree>
+      <p:nvGrpSpPr>
+        <p:cNvPr id="1" name=""/>
+        <p:cNvGrpSpPr/>
+        <p:nvPr/>
+      </p:nvGrpSpPr>
+      <p:grpSpPr>
+        <a:xfrm>
+          <a:off x="0" y="0"/>
+          <a:ext cx="0" cy="0"/>
+          <a:chOff x="0" y="0"/>
+          <a:chExt cx="0" cy="0"/>
+        </a:xfrm>
+      </p:grpSpPr>
+      <p:sp>
+        <p:nvSpPr>
+          <p:cNvPr id="2" name="Slide Image Placeholder 1"/>
+          <p:cNvSpPr>
+            <a:spLocks noGrp="1"/>
+          </p:cNvSpPr>
+          <p:nvPr>
+            <p:ph type="sldImg" idx="2"/>
+          </p:nvPr>
+        </p:nvSpPr>
+        <p:spPr/>
+      </p:sp>
+      <p:sp>
+        <p:nvSpPr>
+          <p:cNvPr id="3" name="Notes Placeholder 2"/>
+          <p:cNvSpPr>
+            <a:spLocks noGrp="1"/>
+          </p:cNvSpPr>
+          <p:nvPr>
+            <p:ph type="body" idx="3" sz="quarter"/>
+          </p:nvPr>
+        </p:nvSpPr>
+        <p:spPr/>
+        <p:txBody>
+          <a:bodyPr/>
+          <a:lstStyle/>
+          <a:p>
+            <a:r>
+              <a:t>[1 min] Le tableau de bord. Trilingue, arabe en RTL, graphiques écrits à la</a:t>
+            </a:r>
+          </a:p>
+          <a:p>
+            <a:r>
+              <a:t>main — aucune bibliothèque de composants. Les vingt-deux captures sont en</a:t>
+            </a:r>
+          </a:p>
+          <a:p>
+            <a:r>
+              <a:t>annexe H du rapport.</a:t>
+            </a:r>
+          </a:p>
+        </p:txBody>
+      </p:sp>
+      <p:sp>
+        <p:nvSpPr>
+          <p:cNvPr id="4" name="Slide Number Placeholder 3"/>
+          <p:cNvSpPr>
+            <a:spLocks noGrp="1"/>
+          </p:cNvSpPr>
+          <p:nvPr>
+            <p:ph type="sldNum" idx="5" sz="quarter"/>
+          </p:nvPr>
+        </p:nvSpPr>
+        <p:spPr/>
+      </p:sp>
+    </p:spTree>
+  </p:cSld>
+  <p:clrMapOvr>
+    <a:masterClrMapping/>
+  </p:clrMapOvr>
+</p:notes>
+</file>
+
+<file path=ppt/notesSlides/notesSlide21.xml><?xml version="1.0" encoding="utf-8"?>
+<p:notes xmlns:a="http://schemas.openxmlformats.org/drawingml/2006/main" xmlns:p="http://schemas.openxmlformats.org/presentationml/2006/main" xmlns:r="http://schemas.openxmlformats.org/officeDocument/2006/relationships">
+  <p:cSld>
+    <p:spTree>
+      <p:nvGrpSpPr>
+        <p:cNvPr id="1" name=""/>
+        <p:cNvGrpSpPr/>
+        <p:nvPr/>
+      </p:nvGrpSpPr>
+      <p:grpSpPr>
+        <a:xfrm>
+          <a:off x="0" y="0"/>
+          <a:ext cx="0" cy="0"/>
+          <a:chOff x="0" y="0"/>
+          <a:chExt cx="0" cy="0"/>
+        </a:xfrm>
+      </p:grpSpPr>
+      <p:sp>
+        <p:nvSpPr>
+          <p:cNvPr id="2" name="Slide Image Placeholder 1"/>
+          <p:cNvSpPr>
+            <a:spLocks noGrp="1"/>
+          </p:cNvSpPr>
+          <p:nvPr>
+            <p:ph type="sldImg" idx="2"/>
+          </p:nvPr>
+        </p:nvSpPr>
+        <p:spPr/>
+      </p:sp>
+      <p:sp>
+        <p:nvSpPr>
+          <p:cNvPr id="3" name="Notes Placeholder 2"/>
+          <p:cNvSpPr>
+            <a:spLocks noGrp="1"/>
+          </p:cNvSpPr>
+          <p:nvPr>
+            <p:ph type="body" idx="3" sz="quarter"/>
+          </p:nvPr>
+        </p:nvSpPr>
+        <p:spPr/>
+        <p:txBody>
+          <a:bodyPr/>
+          <a:lstStyle/>
+          <a:p>
+            <a:r>
+              <a:t>[1 min] Dix-huit contrôles à chaque push. Le point honnête : Dependabot ouvre</a:t>
+            </a:r>
+          </a:p>
+          <a:p>
+            <a:r>
+              <a:t>les demandes, aucune n'a encore été fusionnée — le dispositif rend l'écart</a:t>
+            </a:r>
+          </a:p>
+          <a:p>
+            <a:r>
+              <a:t>visible, il ne l'a pas encore résorbé.</a:t>
+            </a:r>
+          </a:p>
+        </p:txBody>
+      </p:sp>
+      <p:sp>
+        <p:nvSpPr>
+          <p:cNvPr id="4" name="Slide Number Placeholder 3"/>
+          <p:cNvSpPr>
+            <a:spLocks noGrp="1"/>
+          </p:cNvSpPr>
+          <p:nvPr>
+            <p:ph type="sldNum" idx="5" sz="quarter"/>
+          </p:nvPr>
+        </p:nvSpPr>
+        <p:spPr/>
+      </p:sp>
+    </p:spTree>
+  </p:cSld>
+  <p:clrMapOvr>
+    <a:masterClrMapping/>
+  </p:clrMapOvr>
+</p:notes>
+</file>
+
+<file path=ppt/notesSlides/notesSlide22.xml><?xml version="1.0" encoding="utf-8"?>
+<p:notes xmlns:a="http://schemas.openxmlformats.org/drawingml/2006/main" xmlns:p="http://schemas.openxmlformats.org/presentationml/2006/main" xmlns:r="http://schemas.openxmlformats.org/officeDocument/2006/relationships">
+  <p:cSld>
+    <p:spTree>
+      <p:nvGrpSpPr>
+        <p:cNvPr id="1" name=""/>
+        <p:cNvGrpSpPr/>
+        <p:nvPr/>
+      </p:nvGrpSpPr>
+      <p:grpSpPr>
+        <a:xfrm>
+          <a:off x="0" y="0"/>
+          <a:ext cx="0" cy="0"/>
+          <a:chOff x="0" y="0"/>
+          <a:chExt cx="0" cy="0"/>
+        </a:xfrm>
+      </p:grpSpPr>
+      <p:sp>
+        <p:nvSpPr>
+          <p:cNvPr id="2" name="Slide Image Placeholder 1"/>
+          <p:cNvSpPr>
+            <a:spLocks noGrp="1"/>
+          </p:cNvSpPr>
+          <p:nvPr>
+            <p:ph type="sldImg" idx="2"/>
+          </p:nvPr>
+        </p:nvSpPr>
+        <p:spPr/>
+      </p:sp>
+      <p:sp>
+        <p:nvSpPr>
+          <p:cNvPr id="3" name="Notes Placeholder 2"/>
+          <p:cNvSpPr>
+            <a:spLocks noGrp="1"/>
+          </p:cNvSpPr>
+          <p:nvPr>
+            <p:ph type="body" idx="3" sz="quarter"/>
+          </p:nvPr>
+        </p:nvSpPr>
+        <p:spPr/>
+        <p:txBody>
+          <a:bodyPr/>
+          <a:lstStyle/>
+          <a:p>
+            <a:r>
+              <a:t>[45 s] SonarCloud : la porte qualité passe. Raconter le vrai bogue trouvé — un</a:t>
+            </a:r>
+          </a:p>
+          <a:p>
+            <a:r>
+              <a:t>test qui dépendait du .env local, vert sur ma machine, rouge en intégration</a:t>
+            </a:r>
+          </a:p>
+          <a:p>
+            <a:r>
+              <a:t>continue, et qui maintenait la chaîne au rouge à chaque exécution.</a:t>
+            </a:r>
+          </a:p>
+        </p:txBody>
+      </p:sp>
+      <p:sp>
+        <p:nvSpPr>
+          <p:cNvPr id="4" name="Slide Number Placeholder 3"/>
+          <p:cNvSpPr>
+            <a:spLocks noGrp="1"/>
+          </p:cNvSpPr>
+          <p:nvPr>
+            <p:ph type="sldNum" idx="5" sz="quarter"/>
+          </p:nvPr>
+        </p:nvSpPr>
+        <p:spPr/>
+      </p:sp>
+    </p:spTree>
+  </p:cSld>
+  <p:clrMapOvr>
+    <a:masterClrMapping/>
+  </p:clrMapOvr>
+</p:notes>
+</file>
+
+<file path=ppt/notesSlides/notesSlide23.xml><?xml version="1.0" encoding="utf-8"?>
+<p:notes xmlns:a="http://schemas.openxmlformats.org/drawingml/2006/main" xmlns:p="http://schemas.openxmlformats.org/presentationml/2006/main" xmlns:r="http://schemas.openxmlformats.org/officeDocument/2006/relationships">
+  <p:cSld>
+    <p:spTree>
+      <p:nvGrpSpPr>
+        <p:cNvPr id="1" name=""/>
+        <p:cNvGrpSpPr/>
+        <p:nvPr/>
+      </p:nvGrpSpPr>
+      <p:grpSpPr>
+        <a:xfrm>
+          <a:off x="0" y="0"/>
+          <a:ext cx="0" cy="0"/>
+          <a:chOff x="0" y="0"/>
+          <a:chExt cx="0" cy="0"/>
+        </a:xfrm>
+      </p:grpSpPr>
+      <p:sp>
+        <p:nvSpPr>
+          <p:cNvPr id="2" name="Slide Image Placeholder 1"/>
+          <p:cNvSpPr>
+            <a:spLocks noGrp="1"/>
+          </p:cNvSpPr>
+          <p:nvPr>
+            <p:ph type="sldImg" idx="2"/>
+          </p:nvPr>
+        </p:nvSpPr>
+        <p:spPr/>
+      </p:sp>
+      <p:sp>
+        <p:nvSpPr>
+          <p:cNvPr id="3" name="Notes Placeholder 2"/>
+          <p:cNvSpPr>
+            <a:spLocks noGrp="1"/>
+          </p:cNvSpPr>
+          <p:nvPr>
+            <p:ph type="body" idx="3" sz="quarter"/>
+          </p:nvPr>
+        </p:nvSpPr>
+        <p:spPr/>
+        <p:txBody>
+          <a:bodyPr/>
+          <a:lstStyle/>
+          <a:p>
+            <a:r>
+              <a:t>[3 min] DÉMONSTRATION EN DIRECT.</a:t>
+            </a:r>
+          </a:p>
+          <a:p>
+            <a:r>
+              <a:t>Ordre : envoyer la note vocale → montrer le ⏳ → attendre le ✅ → ouvrir le</a:t>
+            </a:r>
+          </a:p>
+          <a:p>
+            <a:r>
+              <a:t>Sheet → ouvrir la boîte de réception du tableau de bord.</a:t>
+            </a:r>
+          </a:p>
+          <a:p>
+            <a:r>
+              <a:t>Si le réseau tombe : passer aux captures d'annexe, elles suivent le même</a:t>
+            </a:r>
+          </a:p>
+          <a:p>
+            <a:r>
+              <a:t>parcours. Ne pas déboguer devant le jury.</a:t>
+            </a:r>
+          </a:p>
+        </p:txBody>
+      </p:sp>
+      <p:sp>
+        <p:nvSpPr>
+          <p:cNvPr id="4" name="Slide Number Placeholder 3"/>
+          <p:cNvSpPr>
+            <a:spLocks noGrp="1"/>
+          </p:cNvSpPr>
+          <p:nvPr>
+            <p:ph type="sldNum" idx="5" sz="quarter"/>
+          </p:nvPr>
+        </p:nvSpPr>
+        <p:spPr/>
+      </p:sp>
+    </p:spTree>
+  </p:cSld>
+  <p:clrMapOvr>
+    <a:masterClrMapping/>
+  </p:clrMapOvr>
+</p:notes>
+</file>
+
+<file path=ppt/notesSlides/notesSlide24.xml><?xml version="1.0" encoding="utf-8"?>
+<p:notes xmlns:a="http://schemas.openxmlformats.org/drawingml/2006/main" xmlns:p="http://schemas.openxmlformats.org/presentationml/2006/main" xmlns:r="http://schemas.openxmlformats.org/officeDocument/2006/relationships">
+  <p:cSld>
+    <p:spTree>
+      <p:nvGrpSpPr>
+        <p:cNvPr id="1" name=""/>
+        <p:cNvGrpSpPr/>
+        <p:nvPr/>
+      </p:nvGrpSpPr>
+      <p:grpSpPr>
+        <a:xfrm>
+          <a:off x="0" y="0"/>
+          <a:ext cx="0" cy="0"/>
+          <a:chOff x="0" y="0"/>
+          <a:chExt cx="0" cy="0"/>
+        </a:xfrm>
+      </p:grpSpPr>
+      <p:sp>
+        <p:nvSpPr>
+          <p:cNvPr id="2" name="Slide Image Placeholder 1"/>
+          <p:cNvSpPr>
+            <a:spLocks noGrp="1"/>
+          </p:cNvSpPr>
+          <p:nvPr>
+            <p:ph type="sldImg" idx="2"/>
+          </p:nvPr>
+        </p:nvSpPr>
+        <p:spPr/>
+      </p:sp>
+      <p:sp>
+        <p:nvSpPr>
+          <p:cNvPr id="3" name="Notes Placeholder 2"/>
+          <p:cNvSpPr>
+            <a:spLocks noGrp="1"/>
+          </p:cNvSpPr>
+          <p:nvPr>
+            <p:ph type="body" idx="3" sz="quarter"/>
+          </p:nvPr>
+        </p:nvSpPr>
+        <p:spPr/>
+        <p:txBody>
+          <a:bodyPr/>
+          <a:lstStyle/>
+          <a:p>
+            <a:r>
+              <a:t>[1 min 30] Compétences techniques puis méthodologiques. La leçon à énoncer :</a:t>
+            </a:r>
+          </a:p>
+          <a:p>
+            <a:r>
+              <a:t>un résultat flatteur mérite plus de vérification qu'un résultat décevant — le</a:t>
+            </a:r>
+          </a:p>
+          <a:p>
+            <a:r>
+              <a:t>banc d'essai avait un bogue silencieux qui couronnait un modèle sur une</a:t>
+            </a:r>
+          </a:p>
+          <a:p>
+            <a:r>
+              <a:t>transcription qu'il n'avait jamais produite.</a:t>
+            </a:r>
+          </a:p>
+        </p:txBody>
+      </p:sp>
+      <p:sp>
+        <p:nvSpPr>
+          <p:cNvPr id="4" name="Slide Number Placeholder 3"/>
+          <p:cNvSpPr>
+            <a:spLocks noGrp="1"/>
+          </p:cNvSpPr>
+          <p:nvPr>
+            <p:ph type="sldNum" idx="5" sz="quarter"/>
+          </p:nvPr>
+        </p:nvSpPr>
+        <p:spPr/>
+      </p:sp>
+    </p:spTree>
+  </p:cSld>
+  <p:clrMapOvr>
+    <a:masterClrMapping/>
+  </p:clrMapOvr>
+</p:notes>
+</file>
+
+<file path=ppt/notesSlides/notesSlide25.xml><?xml version="1.0" encoding="utf-8"?>
+<p:notes xmlns:a="http://schemas.openxmlformats.org/drawingml/2006/main" xmlns:p="http://schemas.openxmlformats.org/presentationml/2006/main" xmlns:r="http://schemas.openxmlformats.org/officeDocument/2006/relationships">
+  <p:cSld>
+    <p:spTree>
+      <p:nvGrpSpPr>
+        <p:cNvPr id="1" name=""/>
+        <p:cNvGrpSpPr/>
+        <p:nvPr/>
+      </p:nvGrpSpPr>
+      <p:grpSpPr>
+        <a:xfrm>
+          <a:off x="0" y="0"/>
+          <a:ext cx="0" cy="0"/>
+          <a:chOff x="0" y="0"/>
+          <a:chExt cx="0" cy="0"/>
+        </a:xfrm>
+      </p:grpSpPr>
+      <p:sp>
+        <p:nvSpPr>
+          <p:cNvPr id="2" name="Slide Image Placeholder 1"/>
+          <p:cNvSpPr>
+            <a:spLocks noGrp="1"/>
+          </p:cNvSpPr>
+          <p:nvPr>
+            <p:ph type="sldImg" idx="2"/>
+          </p:nvPr>
+        </p:nvSpPr>
+        <p:spPr/>
+      </p:sp>
+      <p:sp>
+        <p:nvSpPr>
+          <p:cNvPr id="3" name="Notes Placeholder 2"/>
+          <p:cNvSpPr>
+            <a:spLocks noGrp="1"/>
+          </p:cNvSpPr>
+          <p:nvPr>
+            <p:ph type="body" idx="3" sz="quarter"/>
+          </p:nvPr>
+        </p:nvSpPr>
+        <p:spPr/>
+        <p:txBody>
+          <a:bodyPr/>
+          <a:lstStyle/>
+          <a:p>
+            <a:r>
+              <a:t>[1 min] Perspectives, et les limites assumées. Mieux vaut nommer les limites</a:t>
+            </a:r>
+          </a:p>
+          <a:p>
+            <a:r>
+              <a:t>avant le jury : jeu de test écrit par l'auteur, pilote court, couverture qui</a:t>
+            </a:r>
+          </a:p>
+          <a:p>
+            <a:r>
+              <a:t>ne décrit que le service Python.</a:t>
+            </a:r>
+          </a:p>
+        </p:txBody>
+      </p:sp>
+      <p:sp>
+        <p:nvSpPr>
+          <p:cNvPr id="4" name="Slide Number Placeholder 3"/>
+          <p:cNvSpPr>
+            <a:spLocks noGrp="1"/>
+          </p:cNvSpPr>
+          <p:nvPr>
+            <p:ph type="sldNum" idx="5" sz="quarter"/>
+          </p:nvPr>
+        </p:nvSpPr>
+        <p:spPr/>
+      </p:sp>
+    </p:spTree>
+  </p:cSld>
+  <p:clrMapOvr>
+    <a:masterClrMapping/>
+  </p:clrMapOvr>
+</p:notes>
+</file>
+
+<file path=ppt/notesSlides/notesSlide26.xml><?xml version="1.0" encoding="utf-8"?>
+<p:notes xmlns:a="http://schemas.openxmlformats.org/drawingml/2006/main" xmlns:p="http://schemas.openxmlformats.org/presentationml/2006/main" xmlns:r="http://schemas.openxmlformats.org/officeDocument/2006/relationships">
+  <p:cSld>
+    <p:spTree>
+      <p:nvGrpSpPr>
+        <p:cNvPr id="1" name=""/>
+        <p:cNvGrpSpPr/>
+        <p:nvPr/>
+      </p:nvGrpSpPr>
+      <p:grpSpPr>
+        <a:xfrm>
+          <a:off x="0" y="0"/>
+          <a:ext cx="0" cy="0"/>
+          <a:chOff x="0" y="0"/>
+          <a:chExt cx="0" cy="0"/>
+        </a:xfrm>
+      </p:grpSpPr>
+      <p:sp>
+        <p:nvSpPr>
+          <p:cNvPr id="2" name="Slide Image Placeholder 1"/>
+          <p:cNvSpPr>
+            <a:spLocks noGrp="1"/>
+          </p:cNvSpPr>
+          <p:nvPr>
+            <p:ph type="sldImg" idx="2"/>
+          </p:nvPr>
+        </p:nvSpPr>
+        <p:spPr/>
+      </p:sp>
+      <p:sp>
+        <p:nvSpPr>
+          <p:cNvPr id="3" name="Notes Placeholder 2"/>
+          <p:cNvSpPr>
+            <a:spLocks noGrp="1"/>
+          </p:cNvSpPr>
+          <p:nvPr>
+            <p:ph type="body" idx="3" sz="quarter"/>
+          </p:nvPr>
+        </p:nvSpPr>
+        <p:spPr/>
+        <p:txBody>
+          <a:bodyPr/>
+          <a:lstStyle/>
+          <a:p>
+            <a:r>
+              <a:t>[fin] Remercier, puis se taire. Laisser venir les questions.</a:t>
+            </a:r>
+          </a:p>
+          <a:p>
+            <a:r>
+              <a:t>Questions attendues : pourquoi pas Whisper seul / pourquoi n8n et pas tout en</a:t>
+            </a:r>
+          </a:p>
+          <a:p>
+            <a:r>
+              <a:t>code / que se passe-t-il si les quotas gratuits tombent / comment on empêche</a:t>
+            </a:r>
+          </a:p>
+          <a:p>
+            <a:r>
+              <a:t>le modèle d'inventer une valeur.</a:t>
+            </a:r>
+          </a:p>
+        </p:txBody>
+      </p:sp>
+      <p:sp>
+        <p:nvSpPr>
+          <p:cNvPr id="4" name="Slide Number Placeholder 3"/>
+          <p:cNvSpPr>
+            <a:spLocks noGrp="1"/>
+          </p:cNvSpPr>
+          <p:nvPr>
+            <p:ph type="sldNum" idx="5" sz="quarter"/>
+          </p:nvPr>
+        </p:nvSpPr>
+        <p:spPr/>
+      </p:sp>
+    </p:spTree>
+  </p:cSld>
+  <p:clrMapOvr>
+    <a:masterClrMapping/>
+  </p:clrMapOvr>
+</p:notes>
+</file>
+
+<file path=ppt/notesSlides/notesSlide3.xml><?xml version="1.0" encoding="utf-8"?>
+<p:notes xmlns:a="http://schemas.openxmlformats.org/drawingml/2006/main" xmlns:p="http://schemas.openxmlformats.org/presentationml/2006/main" xmlns:r="http://schemas.openxmlformats.org/officeDocument/2006/relationships">
+  <p:cSld>
+    <p:spTree>
+      <p:nvGrpSpPr>
+        <p:cNvPr id="1" name=""/>
+        <p:cNvGrpSpPr/>
+        <p:nvPr/>
+      </p:nvGrpSpPr>
+      <p:grpSpPr>
+        <a:xfrm>
+          <a:off x="0" y="0"/>
+          <a:ext cx="0" cy="0"/>
+          <a:chOff x="0" y="0"/>
+          <a:chExt cx="0" cy="0"/>
+        </a:xfrm>
+      </p:grpSpPr>
+      <p:sp>
+        <p:nvSpPr>
+          <p:cNvPr id="2" name="Slide Image Placeholder 1"/>
+          <p:cNvSpPr>
+            <a:spLocks noGrp="1"/>
+          </p:cNvSpPr>
+          <p:nvPr>
+            <p:ph type="sldImg" idx="2"/>
+          </p:nvPr>
+        </p:nvSpPr>
+        <p:spPr/>
+      </p:sp>
+      <p:sp>
+        <p:nvSpPr>
+          <p:cNvPr id="3" name="Notes Placeholder 2"/>
+          <p:cNvSpPr>
+            <a:spLocks noGrp="1"/>
+          </p:cNvSpPr>
+          <p:nvPr>
+            <p:ph type="body" idx="3" sz="quarter"/>
+          </p:nvPr>
+        </p:nvSpPr>
+        <p:spPr/>
+        <p:txBody>
+          <a:bodyPr/>
+          <a:lstStyle/>
+          <a:p>
+            <a:r>
+              <a:t>[20 s] Laisser la citation à l'écran deux secondes avant de parler. C'est la</a:t>
+            </a:r>
+          </a:p>
+          <a:p>
+            <a:r>
+              <a:t>phrase du directeur : elle pose le problème mieux que je ne le ferais.</a:t>
+            </a:r>
+          </a:p>
+        </p:txBody>
+      </p:sp>
+      <p:sp>
+        <p:nvSpPr>
+          <p:cNvPr id="4" name="Slide Number Placeholder 3"/>
+          <p:cNvSpPr>
+            <a:spLocks noGrp="1"/>
+          </p:cNvSpPr>
+          <p:nvPr>
+            <p:ph type="sldNum" idx="5" sz="quarter"/>
+          </p:nvPr>
+        </p:nvSpPr>
+        <p:spPr/>
+      </p:sp>
+    </p:spTree>
+  </p:cSld>
+  <p:clrMapOvr>
+    <a:masterClrMapping/>
+  </p:clrMapOvr>
+</p:notes>
+</file>
+
+<file path=ppt/notesSlides/notesSlide4.xml><?xml version="1.0" encoding="utf-8"?>
+<p:notes xmlns:a="http://schemas.openxmlformats.org/drawingml/2006/main" xmlns:p="http://schemas.openxmlformats.org/presentationml/2006/main" xmlns:r="http://schemas.openxmlformats.org/officeDocument/2006/relationships">
+  <p:cSld>
+    <p:spTree>
+      <p:nvGrpSpPr>
+        <p:cNvPr id="1" name=""/>
+        <p:cNvGrpSpPr/>
+        <p:nvPr/>
+      </p:nvGrpSpPr>
+      <p:grpSpPr>
+        <a:xfrm>
+          <a:off x="0" y="0"/>
+          <a:ext cx="0" cy="0"/>
+          <a:chOff x="0" y="0"/>
+          <a:chExt cx="0" cy="0"/>
+        </a:xfrm>
+      </p:grpSpPr>
+      <p:sp>
+        <p:nvSpPr>
+          <p:cNvPr id="2" name="Slide Image Placeholder 1"/>
+          <p:cNvSpPr>
+            <a:spLocks noGrp="1"/>
+          </p:cNvSpPr>
+          <p:nvPr>
+            <p:ph type="sldImg" idx="2"/>
+          </p:nvPr>
+        </p:nvSpPr>
+        <p:spPr/>
+      </p:sp>
+      <p:sp>
+        <p:nvSpPr>
+          <p:cNvPr id="3" name="Notes Placeholder 2"/>
+          <p:cNvSpPr>
+            <a:spLocks noGrp="1"/>
+          </p:cNvSpPr>
+          <p:nvPr>
+            <p:ph type="body" idx="3" sz="quarter"/>
+          </p:nvPr>
+        </p:nvSpPr>
+        <p:spPr/>
+        <p:txBody>
+          <a:bodyPr/>
+          <a:lstStyle/>
+          <a:p>
+            <a:r>
+              <a:t>[1 min] AZNET pose des infrastructures réseau. Le suivi de chantier se fait</a:t>
+            </a:r>
+          </a:p>
+          <a:p>
+            <a:r>
+              <a:t>aujourd'hui à la main, le soir, de mémoire.</a:t>
+            </a:r>
+          </a:p>
+          <a:p>
+            <a:r>
+              <a:t>Chiffre à donner si la question vient : le directeur re-saisit les rapports</a:t>
+            </a:r>
+          </a:p>
+          <a:p>
+            <a:r>
+              <a:t>lui-même dans son fichier de suivi.</a:t>
+            </a:r>
+          </a:p>
+        </p:txBody>
+      </p:sp>
+      <p:sp>
+        <p:nvSpPr>
+          <p:cNvPr id="4" name="Slide Number Placeholder 3"/>
+          <p:cNvSpPr>
+            <a:spLocks noGrp="1"/>
+          </p:cNvSpPr>
+          <p:nvPr>
+            <p:ph type="sldNum" idx="5" sz="quarter"/>
+          </p:nvPr>
+        </p:nvSpPr>
+        <p:spPr/>
+      </p:sp>
+    </p:spTree>
+  </p:cSld>
+  <p:clrMapOvr>
+    <a:masterClrMapping/>
+  </p:clrMapOvr>
+</p:notes>
+</file>
+
+<file path=ppt/notesSlides/notesSlide5.xml><?xml version="1.0" encoding="utf-8"?>
+<p:notes xmlns:a="http://schemas.openxmlformats.org/drawingml/2006/main" xmlns:p="http://schemas.openxmlformats.org/presentationml/2006/main" xmlns:r="http://schemas.openxmlformats.org/officeDocument/2006/relationships">
+  <p:cSld>
+    <p:spTree>
+      <p:nvGrpSpPr>
+        <p:cNvPr id="1" name=""/>
+        <p:cNvGrpSpPr/>
+        <p:nvPr/>
+      </p:nvGrpSpPr>
+      <p:grpSpPr>
+        <a:xfrm>
+          <a:off x="0" y="0"/>
+          <a:ext cx="0" cy="0"/>
+          <a:chOff x="0" y="0"/>
+          <a:chExt cx="0" cy="0"/>
+        </a:xfrm>
+      </p:grpSpPr>
+      <p:sp>
+        <p:nvSpPr>
+          <p:cNvPr id="2" name="Slide Image Placeholder 1"/>
+          <p:cNvSpPr>
+            <a:spLocks noGrp="1"/>
+          </p:cNvSpPr>
+          <p:nvPr>
+            <p:ph type="sldImg" idx="2"/>
+          </p:nvPr>
+        </p:nvSpPr>
+        <p:spPr/>
+      </p:sp>
+      <p:sp>
+        <p:nvSpPr>
+          <p:cNvPr id="3" name="Notes Placeholder 2"/>
+          <p:cNvSpPr>
+            <a:spLocks noGrp="1"/>
+          </p:cNvSpPr>
+          <p:nvPr>
+            <p:ph type="body" idx="3" sz="quarter"/>
+          </p:nvPr>
+        </p:nvSpPr>
+        <p:spPr/>
+        <p:txBody>
+          <a:bodyPr/>
+          <a:lstStyle/>
+          <a:p>
+            <a:r>
+              <a:t>[1 min 30] Le cœur du problème : le technicien parle darija, mélange les</a:t>
+            </a:r>
+          </a:p>
+          <a:p>
+            <a:r>
+              <a:t>emprunts français techniques, et le journal attend des chiffres par colonne.</a:t>
+            </a:r>
+          </a:p>
+          <a:p>
+            <a:r>
+              <a:t>Insister sur l'écart entre « ce qui est dit » et « ce qui est compté » — c'est</a:t>
+            </a:r>
+          </a:p>
+          <a:p>
+            <a:r>
+              <a:t>ce que tout le reste de la présentation résout.</a:t>
+            </a:r>
+          </a:p>
+        </p:txBody>
+      </p:sp>
+      <p:sp>
+        <p:nvSpPr>
+          <p:cNvPr id="4" name="Slide Number Placeholder 3"/>
+          <p:cNvSpPr>
+            <a:spLocks noGrp="1"/>
+          </p:cNvSpPr>
+          <p:nvPr>
+            <p:ph type="sldNum" idx="5" sz="quarter"/>
+          </p:nvPr>
+        </p:nvSpPr>
+        <p:spPr/>
+      </p:sp>
+    </p:spTree>
+  </p:cSld>
+  <p:clrMapOvr>
+    <a:masterClrMapping/>
+  </p:clrMapOvr>
+</p:notes>
+</file>
+
+<file path=ppt/notesSlides/notesSlide6.xml><?xml version="1.0" encoding="utf-8"?>
+<p:notes xmlns:a="http://schemas.openxmlformats.org/drawingml/2006/main" xmlns:p="http://schemas.openxmlformats.org/presentationml/2006/main" xmlns:r="http://schemas.openxmlformats.org/officeDocument/2006/relationships">
+  <p:cSld>
+    <p:spTree>
+      <p:nvGrpSpPr>
+        <p:cNvPr id="1" name=""/>
+        <p:cNvGrpSpPr/>
+        <p:nvPr/>
+      </p:nvGrpSpPr>
+      <p:grpSpPr>
+        <a:xfrm>
+          <a:off x="0" y="0"/>
+          <a:ext cx="0" cy="0"/>
+          <a:chOff x="0" y="0"/>
+          <a:chExt cx="0" cy="0"/>
+        </a:xfrm>
+      </p:grpSpPr>
+      <p:sp>
+        <p:nvSpPr>
+          <p:cNvPr id="2" name="Slide Image Placeholder 1"/>
+          <p:cNvSpPr>
+            <a:spLocks noGrp="1"/>
+          </p:cNvSpPr>
+          <p:nvPr>
+            <p:ph type="sldImg" idx="2"/>
+          </p:nvPr>
+        </p:nvSpPr>
+        <p:spPr/>
+      </p:sp>
+      <p:sp>
+        <p:nvSpPr>
+          <p:cNvPr id="3" name="Notes Placeholder 2"/>
+          <p:cNvSpPr>
+            <a:spLocks noGrp="1"/>
+          </p:cNvSpPr>
+          <p:nvPr>
+            <p:ph type="body" idx="3" sz="quarter"/>
+          </p:nvPr>
+        </p:nvSpPr>
+        <p:spPr/>
+        <p:txBody>
+          <a:bodyPr/>
+          <a:lstStyle/>
+          <a:p>
+            <a:r>
+              <a:t>[1 min] Besoins fonctionnels puis non fonctionnels. Souligner la contrainte de</a:t>
+            </a:r>
+          </a:p>
+          <a:p>
+            <a:r>
+              <a:t>budget zéro : elle explique presque toutes les décisions techniques qui</a:t>
+            </a:r>
+          </a:p>
+          <a:p>
+            <a:r>
+              <a:t>suivent, y compris la chaîne de repli entre fournisseurs.</a:t>
+            </a:r>
+          </a:p>
+        </p:txBody>
+      </p:sp>
+      <p:sp>
+        <p:nvSpPr>
+          <p:cNvPr id="4" name="Slide Number Placeholder 3"/>
+          <p:cNvSpPr>
+            <a:spLocks noGrp="1"/>
+          </p:cNvSpPr>
+          <p:nvPr>
+            <p:ph type="sldNum" idx="5" sz="quarter"/>
+          </p:nvPr>
+        </p:nvSpPr>
+        <p:spPr/>
+      </p:sp>
+    </p:spTree>
+  </p:cSld>
+  <p:clrMapOvr>
+    <a:masterClrMapping/>
+  </p:clrMapOvr>
+</p:notes>
+</file>
+
+<file path=ppt/notesSlides/notesSlide7.xml><?xml version="1.0" encoding="utf-8"?>
+<p:notes xmlns:a="http://schemas.openxmlformats.org/drawingml/2006/main" xmlns:p="http://schemas.openxmlformats.org/presentationml/2006/main" xmlns:r="http://schemas.openxmlformats.org/officeDocument/2006/relationships">
+  <p:cSld>
+    <p:spTree>
+      <p:nvGrpSpPr>
+        <p:cNvPr id="1" name=""/>
+        <p:cNvGrpSpPr/>
+        <p:nvPr/>
+      </p:nvGrpSpPr>
+      <p:grpSpPr>
+        <a:xfrm>
+          <a:off x="0" y="0"/>
+          <a:ext cx="0" cy="0"/>
+          <a:chOff x="0" y="0"/>
+          <a:chExt cx="0" cy="0"/>
+        </a:xfrm>
+      </p:grpSpPr>
+      <p:sp>
+        <p:nvSpPr>
+          <p:cNvPr id="2" name="Slide Image Placeholder 1"/>
+          <p:cNvSpPr>
+            <a:spLocks noGrp="1"/>
+          </p:cNvSpPr>
+          <p:nvPr>
+            <p:ph type="sldImg" idx="2"/>
+          </p:nvPr>
+        </p:nvSpPr>
+        <p:spPr/>
+      </p:sp>
+      <p:sp>
+        <p:nvSpPr>
+          <p:cNvPr id="3" name="Notes Placeholder 2"/>
+          <p:cNvSpPr>
+            <a:spLocks noGrp="1"/>
+          </p:cNvSpPr>
+          <p:nvPr>
+            <p:ph type="body" idx="3" sz="quarter"/>
+          </p:nvPr>
+        </p:nvSpPr>
+        <p:spPr/>
+        <p:txBody>
+          <a:bodyPr/>
+          <a:lstStyle/>
+          <a:p>
+            <a:r>
+              <a:t>[45 s] Sept phases sur six mois. Le point à faire passer : le bout-en-bout</a:t>
+            </a:r>
+          </a:p>
+          <a:p>
+            <a:r>
+              <a:t>réel a été atteint en phase 3, une phase avant le planning — le risque</a:t>
+            </a:r>
+          </a:p>
+          <a:p>
+            <a:r>
+              <a:t>d'intégration a été neutralisé avant d'engager le reste.</a:t>
+            </a:r>
+          </a:p>
+          <a:p>
+            <a:r>
+              <a:t>Si on demande pourquoi : un défaut d'intégration ne se voit pas hors ligne.</a:t>
+            </a:r>
+          </a:p>
+        </p:txBody>
+      </p:sp>
+      <p:sp>
+        <p:nvSpPr>
+          <p:cNvPr id="4" name="Slide Number Placeholder 3"/>
+          <p:cNvSpPr>
+            <a:spLocks noGrp="1"/>
+          </p:cNvSpPr>
+          <p:nvPr>
+            <p:ph type="sldNum" idx="5" sz="quarter"/>
+          </p:nvPr>
+        </p:nvSpPr>
+        <p:spPr/>
+      </p:sp>
+    </p:spTree>
+  </p:cSld>
+  <p:clrMapOvr>
+    <a:masterClrMapping/>
+  </p:clrMapOvr>
+</p:notes>
+</file>
+
+<file path=ppt/notesSlides/notesSlide8.xml><?xml version="1.0" encoding="utf-8"?>
+<p:notes xmlns:a="http://schemas.openxmlformats.org/drawingml/2006/main" xmlns:p="http://schemas.openxmlformats.org/presentationml/2006/main" xmlns:r="http://schemas.openxmlformats.org/officeDocument/2006/relationships">
+  <p:cSld>
+    <p:spTree>
+      <p:nvGrpSpPr>
+        <p:cNvPr id="1" name=""/>
+        <p:cNvGrpSpPr/>
+        <p:nvPr/>
+      </p:nvGrpSpPr>
+      <p:grpSpPr>
+        <a:xfrm>
+          <a:off x="0" y="0"/>
+          <a:ext cx="0" cy="0"/>
+          <a:chOff x="0" y="0"/>
+          <a:chExt cx="0" cy="0"/>
+        </a:xfrm>
+      </p:grpSpPr>
+      <p:sp>
+        <p:nvSpPr>
+          <p:cNvPr id="2" name="Slide Image Placeholder 1"/>
+          <p:cNvSpPr>
+            <a:spLocks noGrp="1"/>
+          </p:cNvSpPr>
+          <p:nvPr>
+            <p:ph type="sldImg" idx="2"/>
+          </p:nvPr>
+        </p:nvSpPr>
+        <p:spPr/>
+      </p:sp>
+      <p:sp>
+        <p:nvSpPr>
+          <p:cNvPr id="3" name="Notes Placeholder 2"/>
+          <p:cNvSpPr>
+            <a:spLocks noGrp="1"/>
+          </p:cNvSpPr>
+          <p:nvPr>
+            <p:ph type="body" idx="3" sz="quarter"/>
+          </p:nvPr>
+        </p:nvSpPr>
+        <p:spPr/>
+        <p:txBody>
+          <a:bodyPr/>
+          <a:lstStyle/>
+          <a:p>
+            <a:r>
+              <a:t>[1 min] État de l'art de la transcription de l'arabe dialectal. Dire que la</a:t>
+            </a:r>
+          </a:p>
+          <a:p>
+            <a:r>
+              <a:t>littérature ne tranchait pas pour le darija : c'est ce qui a rendu le banc</a:t>
+            </a:r>
+          </a:p>
+          <a:p>
+            <a:r>
+              <a:t>d'essai nécessaire plutôt que confortable.</a:t>
+            </a:r>
+          </a:p>
+        </p:txBody>
+      </p:sp>
+      <p:sp>
+        <p:nvSpPr>
+          <p:cNvPr id="4" name="Slide Number Placeholder 3"/>
+          <p:cNvSpPr>
+            <a:spLocks noGrp="1"/>
+          </p:cNvSpPr>
+          <p:nvPr>
+            <p:ph type="sldNum" idx="5" sz="quarter"/>
+          </p:nvPr>
+        </p:nvSpPr>
+        <p:spPr/>
+      </p:sp>
+    </p:spTree>
+  </p:cSld>
+  <p:clrMapOvr>
+    <a:masterClrMapping/>
+  </p:clrMapOvr>
+</p:notes>
+</file>
+
+<file path=ppt/notesSlides/notesSlide9.xml><?xml version="1.0" encoding="utf-8"?>
+<p:notes xmlns:a="http://schemas.openxmlformats.org/drawingml/2006/main" xmlns:p="http://schemas.openxmlformats.org/presentationml/2006/main" xmlns:r="http://schemas.openxmlformats.org/officeDocument/2006/relationships">
+  <p:cSld>
+    <p:spTree>
+      <p:nvGrpSpPr>
+        <p:cNvPr id="1" name=""/>
+        <p:cNvGrpSpPr/>
+        <p:nvPr/>
+      </p:nvGrpSpPr>
+      <p:grpSpPr>
+        <a:xfrm>
+          <a:off x="0" y="0"/>
+          <a:ext cx="0" cy="0"/>
+          <a:chOff x="0" y="0"/>
+          <a:chExt cx="0" cy="0"/>
+        </a:xfrm>
+      </p:grpSpPr>
+      <p:sp>
+        <p:nvSpPr>
+          <p:cNvPr id="2" name="Slide Image Placeholder 1"/>
+          <p:cNvSpPr>
+            <a:spLocks noGrp="1"/>
+          </p:cNvSpPr>
+          <p:nvPr>
+            <p:ph type="sldImg" idx="2"/>
+          </p:nvPr>
+        </p:nvSpPr>
+        <p:spPr/>
+      </p:sp>
+      <p:sp>
+        <p:nvSpPr>
+          <p:cNvPr id="3" name="Notes Placeholder 2"/>
+          <p:cNvSpPr>
+            <a:spLocks noGrp="1"/>
+          </p:cNvSpPr>
+          <p:nvPr>
+            <p:ph type="body" idx="3" sz="quarter"/>
+          </p:nvPr>
+        </p:nvSpPr>
+        <p:spPr/>
+        <p:txBody>
+          <a:bodyPr/>
+          <a:lstStyle/>
+          <a:p>
+            <a:r>
+              <a:t>[1 min] Extraction structurée par LLM : sortie contrainte par schéma, et le</a:t>
+            </a:r>
+          </a:p>
+          <a:p>
+            <a:r>
+              <a:t>risque central — un modèle qui invente une valeur plausible. C'est le critère</a:t>
+            </a:r>
+          </a:p>
+          <a:p>
+            <a:r>
+              <a:t>qui décidera du choix au banc d'essai n°2.</a:t>
+            </a:r>
+          </a:p>
+        </p:txBody>
+      </p:sp>
+      <p:sp>
+        <p:nvSpPr>
+          <p:cNvPr id="4" name="Slide Number Placeholder 3"/>
+          <p:cNvSpPr>
+            <a:spLocks noGrp="1"/>
+          </p:cNvSpPr>
+          <p:nvPr>
+            <p:ph type="sldNum" idx="5" sz="quarter"/>
+          </p:nvPr>
+        </p:nvSpPr>
+        <p:spPr/>
+      </p:sp>
+    </p:spTree>
+  </p:cSld>
+  <p:clrMapOvr>
+    <a:masterClrMapping/>
+  </p:clrMapOvr>
+</p:notes>
 </file>
 
 <file path=ppt/slideLayouts/slideLayout1.xml><?xml version="1.0" encoding="utf-8"?>
@@ -3632,6 +6107,18 @@
   <p:clrMapOvr>
     <a:masterClrMapping/>
   </p:clrMapOvr>
+  <mc:AlternateContent xmlns:mc="http://schemas.openxmlformats.org/markup-compatibility/2006">
+    <mc:Choice xmlns:p159="http://schemas.microsoft.com/office/powerpoint/2015/09/main" Requires="p159">
+      <p:transition xmlns:p14="http://schemas.microsoft.com/office/powerpoint/2010/main" spd="slow" p14:dur="700">
+        <p159:morph option="byObject"/>
+      </p:transition>
+    </mc:Choice>
+    <mc:Fallback>
+      <p:transition xmlns:p14="http://schemas.microsoft.com/office/powerpoint/2010/main" spd="slow" p14:dur="700">
+        <p:fade/>
+      </p:transition>
+    </mc:Fallback>
+  </mc:AlternateContent>
 </p:sld>
 </file>
 
@@ -5264,11 +7751,111 @@
           </a:p>
         </p:txBody>
       </p:sp>
+      <p:sp>
+        <p:nvSpPr>
+          <p:cNvPr id="41" name="Rectangle 40"/>
+          <p:cNvSpPr/>
+          <p:nvPr/>
+        </p:nvSpPr>
+        <p:spPr>
+          <a:xfrm>
+            <a:off x="777240" y="6601968"/>
+            <a:ext cx="10637215" cy="13716"/>
+          </a:xfrm>
+          <a:prstGeom prst="rect">
+            <a:avLst/>
+          </a:prstGeom>
+          <a:solidFill>
+            <a:srgbClr val="DFE1DE"/>
+          </a:solidFill>
+          <a:ln>
+            <a:noFill/>
+          </a:ln>
+          <a:effectLst/>
+        </p:spPr>
+        <p:style>
+          <a:lnRef idx="1">
+            <a:schemeClr val="accent1"/>
+          </a:lnRef>
+          <a:fillRef idx="3">
+            <a:schemeClr val="accent1"/>
+          </a:fillRef>
+          <a:effectRef idx="2">
+            <a:schemeClr val="accent1"/>
+          </a:effectRef>
+          <a:fontRef idx="minor">
+            <a:schemeClr val="lt1"/>
+          </a:fontRef>
+        </p:style>
+        <p:txBody>
+          <a:bodyPr rtlCol="0" anchor="ctr" wrap="square"/>
+          <a:lstStyle/>
+          <a:p>
+            <a:pPr algn="ctr"/>
+          </a:p>
+        </p:txBody>
+      </p:sp>
+      <p:sp>
+        <p:nvSpPr>
+          <p:cNvPr id="42" name="Rectangle 41"/>
+          <p:cNvSpPr/>
+          <p:nvPr/>
+        </p:nvSpPr>
+        <p:spPr>
+          <a:xfrm>
+            <a:off x="777240" y="6601968"/>
+            <a:ext cx="4432173" cy="13716"/>
+          </a:xfrm>
+          <a:prstGeom prst="rect">
+            <a:avLst/>
+          </a:prstGeom>
+          <a:solidFill>
+            <a:srgbClr val="0278E4"/>
+          </a:solidFill>
+          <a:ln>
+            <a:noFill/>
+          </a:ln>
+          <a:effectLst/>
+        </p:spPr>
+        <p:style>
+          <a:lnRef idx="1">
+            <a:schemeClr val="accent1"/>
+          </a:lnRef>
+          <a:fillRef idx="3">
+            <a:schemeClr val="accent1"/>
+          </a:fillRef>
+          <a:effectRef idx="2">
+            <a:schemeClr val="accent1"/>
+          </a:effectRef>
+          <a:fontRef idx="minor">
+            <a:schemeClr val="lt1"/>
+          </a:fontRef>
+        </p:style>
+        <p:txBody>
+          <a:bodyPr rtlCol="0" anchor="ctr" wrap="square"/>
+          <a:lstStyle/>
+          <a:p>
+            <a:pPr algn="ctr"/>
+          </a:p>
+        </p:txBody>
+      </p:sp>
     </p:spTree>
   </p:cSld>
   <p:clrMapOvr>
     <a:masterClrMapping/>
   </p:clrMapOvr>
+  <mc:AlternateContent xmlns:mc="http://schemas.openxmlformats.org/markup-compatibility/2006">
+    <mc:Choice xmlns:p159="http://schemas.microsoft.com/office/powerpoint/2015/09/main" Requires="p159">
+      <p:transition xmlns:p14="http://schemas.microsoft.com/office/powerpoint/2010/main" spd="slow" p14:dur="700">
+        <p159:morph option="byObject"/>
+      </p:transition>
+    </mc:Choice>
+    <mc:Fallback>
+      <p:transition xmlns:p14="http://schemas.microsoft.com/office/powerpoint/2010/main" spd="slow" p14:dur="700">
+        <p:fade/>
+      </p:transition>
+    </mc:Fallback>
+  </mc:AlternateContent>
 </p:sld>
 </file>
 
@@ -6205,11 +8792,111 @@
           </a:p>
         </p:txBody>
       </p:sp>
+      <p:sp>
+        <p:nvSpPr>
+          <p:cNvPr id="17" name="Rectangle 16"/>
+          <p:cNvSpPr/>
+          <p:nvPr/>
+        </p:nvSpPr>
+        <p:spPr>
+          <a:xfrm>
+            <a:off x="777240" y="6601968"/>
+            <a:ext cx="10637215" cy="13716"/>
+          </a:xfrm>
+          <a:prstGeom prst="rect">
+            <a:avLst/>
+          </a:prstGeom>
+          <a:solidFill>
+            <a:srgbClr val="DFE1DE"/>
+          </a:solidFill>
+          <a:ln>
+            <a:noFill/>
+          </a:ln>
+          <a:effectLst/>
+        </p:spPr>
+        <p:style>
+          <a:lnRef idx="1">
+            <a:schemeClr val="accent1"/>
+          </a:lnRef>
+          <a:fillRef idx="3">
+            <a:schemeClr val="accent1"/>
+          </a:fillRef>
+          <a:effectRef idx="2">
+            <a:schemeClr val="accent1"/>
+          </a:effectRef>
+          <a:fontRef idx="minor">
+            <a:schemeClr val="lt1"/>
+          </a:fontRef>
+        </p:style>
+        <p:txBody>
+          <a:bodyPr rtlCol="0" anchor="ctr" wrap="square"/>
+          <a:lstStyle/>
+          <a:p>
+            <a:pPr algn="ctr"/>
+          </a:p>
+        </p:txBody>
+      </p:sp>
+      <p:sp>
+        <p:nvSpPr>
+          <p:cNvPr id="18" name="Rectangle 17"/>
+          <p:cNvSpPr/>
+          <p:nvPr/>
+        </p:nvSpPr>
+        <p:spPr>
+          <a:xfrm>
+            <a:off x="777240" y="6601968"/>
+            <a:ext cx="4875390" cy="13716"/>
+          </a:xfrm>
+          <a:prstGeom prst="rect">
+            <a:avLst/>
+          </a:prstGeom>
+          <a:solidFill>
+            <a:srgbClr val="0278E4"/>
+          </a:solidFill>
+          <a:ln>
+            <a:noFill/>
+          </a:ln>
+          <a:effectLst/>
+        </p:spPr>
+        <p:style>
+          <a:lnRef idx="1">
+            <a:schemeClr val="accent1"/>
+          </a:lnRef>
+          <a:fillRef idx="3">
+            <a:schemeClr val="accent1"/>
+          </a:fillRef>
+          <a:effectRef idx="2">
+            <a:schemeClr val="accent1"/>
+          </a:effectRef>
+          <a:fontRef idx="minor">
+            <a:schemeClr val="lt1"/>
+          </a:fontRef>
+        </p:style>
+        <p:txBody>
+          <a:bodyPr rtlCol="0" anchor="ctr" wrap="square"/>
+          <a:lstStyle/>
+          <a:p>
+            <a:pPr algn="ctr"/>
+          </a:p>
+        </p:txBody>
+      </p:sp>
     </p:spTree>
   </p:cSld>
   <p:clrMapOvr>
     <a:masterClrMapping/>
   </p:clrMapOvr>
+  <mc:AlternateContent xmlns:mc="http://schemas.openxmlformats.org/markup-compatibility/2006">
+    <mc:Choice xmlns:p159="http://schemas.microsoft.com/office/powerpoint/2015/09/main" Requires="p159">
+      <p:transition xmlns:p14="http://schemas.microsoft.com/office/powerpoint/2010/main" spd="slow" p14:dur="700">
+        <p159:morph option="byObject"/>
+      </p:transition>
+    </mc:Choice>
+    <mc:Fallback>
+      <p:transition xmlns:p14="http://schemas.microsoft.com/office/powerpoint/2010/main" spd="slow" p14:dur="700">
+        <p:fade/>
+      </p:transition>
+    </mc:Fallback>
+  </mc:AlternateContent>
 </p:sld>
 </file>
 
@@ -8175,11 +10862,111 @@
           </a:p>
         </p:txBody>
       </p:sp>
+      <p:sp>
+        <p:nvSpPr>
+          <p:cNvPr id="51" name="Rectangle 50"/>
+          <p:cNvSpPr/>
+          <p:nvPr/>
+        </p:nvSpPr>
+        <p:spPr>
+          <a:xfrm>
+            <a:off x="777240" y="6601968"/>
+            <a:ext cx="10637215" cy="13716"/>
+          </a:xfrm>
+          <a:prstGeom prst="rect">
+            <a:avLst/>
+          </a:prstGeom>
+          <a:solidFill>
+            <a:srgbClr val="DFE1DE"/>
+          </a:solidFill>
+          <a:ln>
+            <a:noFill/>
+          </a:ln>
+          <a:effectLst/>
+        </p:spPr>
+        <p:style>
+          <a:lnRef idx="1">
+            <a:schemeClr val="accent1"/>
+          </a:lnRef>
+          <a:fillRef idx="3">
+            <a:schemeClr val="accent1"/>
+          </a:fillRef>
+          <a:effectRef idx="2">
+            <a:schemeClr val="accent1"/>
+          </a:effectRef>
+          <a:fontRef idx="minor">
+            <a:schemeClr val="lt1"/>
+          </a:fontRef>
+        </p:style>
+        <p:txBody>
+          <a:bodyPr rtlCol="0" anchor="ctr" wrap="square"/>
+          <a:lstStyle/>
+          <a:p>
+            <a:pPr algn="ctr"/>
+          </a:p>
+        </p:txBody>
+      </p:sp>
+      <p:sp>
+        <p:nvSpPr>
+          <p:cNvPr id="52" name="Rectangle 51"/>
+          <p:cNvSpPr/>
+          <p:nvPr/>
+        </p:nvSpPr>
+        <p:spPr>
+          <a:xfrm>
+            <a:off x="777240" y="6601968"/>
+            <a:ext cx="5318607" cy="13716"/>
+          </a:xfrm>
+          <a:prstGeom prst="rect">
+            <a:avLst/>
+          </a:prstGeom>
+          <a:solidFill>
+            <a:srgbClr val="0278E4"/>
+          </a:solidFill>
+          <a:ln>
+            <a:noFill/>
+          </a:ln>
+          <a:effectLst/>
+        </p:spPr>
+        <p:style>
+          <a:lnRef idx="1">
+            <a:schemeClr val="accent1"/>
+          </a:lnRef>
+          <a:fillRef idx="3">
+            <a:schemeClr val="accent1"/>
+          </a:fillRef>
+          <a:effectRef idx="2">
+            <a:schemeClr val="accent1"/>
+          </a:effectRef>
+          <a:fontRef idx="minor">
+            <a:schemeClr val="lt1"/>
+          </a:fontRef>
+        </p:style>
+        <p:txBody>
+          <a:bodyPr rtlCol="0" anchor="ctr" wrap="square"/>
+          <a:lstStyle/>
+          <a:p>
+            <a:pPr algn="ctr"/>
+          </a:p>
+        </p:txBody>
+      </p:sp>
     </p:spTree>
   </p:cSld>
   <p:clrMapOvr>
     <a:masterClrMapping/>
   </p:clrMapOvr>
+  <mc:AlternateContent xmlns:mc="http://schemas.openxmlformats.org/markup-compatibility/2006">
+    <mc:Choice xmlns:p159="http://schemas.microsoft.com/office/powerpoint/2015/09/main" Requires="p159">
+      <p:transition xmlns:p14="http://schemas.microsoft.com/office/powerpoint/2010/main" spd="slow" p14:dur="700">
+        <p159:morph option="byObject"/>
+      </p:transition>
+    </mc:Choice>
+    <mc:Fallback>
+      <p:transition xmlns:p14="http://schemas.microsoft.com/office/powerpoint/2010/main" spd="slow" p14:dur="700">
+        <p:fade/>
+      </p:transition>
+    </mc:Fallback>
+  </mc:AlternateContent>
 </p:sld>
 </file>
 
@@ -9174,11 +11961,111 @@
           </a:p>
         </p:txBody>
       </p:sp>
+      <p:sp>
+        <p:nvSpPr>
+          <p:cNvPr id="24" name="Rectangle 23"/>
+          <p:cNvSpPr/>
+          <p:nvPr/>
+        </p:nvSpPr>
+        <p:spPr>
+          <a:xfrm>
+            <a:off x="777240" y="6601968"/>
+            <a:ext cx="10637215" cy="13716"/>
+          </a:xfrm>
+          <a:prstGeom prst="rect">
+            <a:avLst/>
+          </a:prstGeom>
+          <a:solidFill>
+            <a:srgbClr val="DFE1DE"/>
+          </a:solidFill>
+          <a:ln>
+            <a:noFill/>
+          </a:ln>
+          <a:effectLst/>
+        </p:spPr>
+        <p:style>
+          <a:lnRef idx="1">
+            <a:schemeClr val="accent1"/>
+          </a:lnRef>
+          <a:fillRef idx="3">
+            <a:schemeClr val="accent1"/>
+          </a:fillRef>
+          <a:effectRef idx="2">
+            <a:schemeClr val="accent1"/>
+          </a:effectRef>
+          <a:fontRef idx="minor">
+            <a:schemeClr val="lt1"/>
+          </a:fontRef>
+        </p:style>
+        <p:txBody>
+          <a:bodyPr rtlCol="0" anchor="ctr" wrap="square"/>
+          <a:lstStyle/>
+          <a:p>
+            <a:pPr algn="ctr"/>
+          </a:p>
+        </p:txBody>
+      </p:sp>
+      <p:sp>
+        <p:nvSpPr>
+          <p:cNvPr id="25" name="Rectangle 24"/>
+          <p:cNvSpPr/>
+          <p:nvPr/>
+        </p:nvSpPr>
+        <p:spPr>
+          <a:xfrm>
+            <a:off x="777240" y="6601968"/>
+            <a:ext cx="5761824" cy="13716"/>
+          </a:xfrm>
+          <a:prstGeom prst="rect">
+            <a:avLst/>
+          </a:prstGeom>
+          <a:solidFill>
+            <a:srgbClr val="0278E4"/>
+          </a:solidFill>
+          <a:ln>
+            <a:noFill/>
+          </a:ln>
+          <a:effectLst/>
+        </p:spPr>
+        <p:style>
+          <a:lnRef idx="1">
+            <a:schemeClr val="accent1"/>
+          </a:lnRef>
+          <a:fillRef idx="3">
+            <a:schemeClr val="accent1"/>
+          </a:fillRef>
+          <a:effectRef idx="2">
+            <a:schemeClr val="accent1"/>
+          </a:effectRef>
+          <a:fontRef idx="minor">
+            <a:schemeClr val="lt1"/>
+          </a:fontRef>
+        </p:style>
+        <p:txBody>
+          <a:bodyPr rtlCol="0" anchor="ctr" wrap="square"/>
+          <a:lstStyle/>
+          <a:p>
+            <a:pPr algn="ctr"/>
+          </a:p>
+        </p:txBody>
+      </p:sp>
     </p:spTree>
   </p:cSld>
   <p:clrMapOvr>
     <a:masterClrMapping/>
   </p:clrMapOvr>
+  <mc:AlternateContent xmlns:mc="http://schemas.openxmlformats.org/markup-compatibility/2006">
+    <mc:Choice xmlns:p159="http://schemas.microsoft.com/office/powerpoint/2015/09/main" Requires="p159">
+      <p:transition xmlns:p14="http://schemas.microsoft.com/office/powerpoint/2010/main" spd="slow" p14:dur="700">
+        <p159:morph option="byObject"/>
+      </p:transition>
+    </mc:Choice>
+    <mc:Fallback>
+      <p:transition xmlns:p14="http://schemas.microsoft.com/office/powerpoint/2010/main" spd="slow" p14:dur="700">
+        <p:fade/>
+      </p:transition>
+    </mc:Fallback>
+  </mc:AlternateContent>
 </p:sld>
 </file>
 
@@ -10207,11 +13094,111 @@
           </a:p>
         </p:txBody>
       </p:sp>
+      <p:sp>
+        <p:nvSpPr>
+          <p:cNvPr id="27" name="Rectangle 26"/>
+          <p:cNvSpPr/>
+          <p:nvPr/>
+        </p:nvSpPr>
+        <p:spPr>
+          <a:xfrm>
+            <a:off x="777240" y="6601968"/>
+            <a:ext cx="10637215" cy="13716"/>
+          </a:xfrm>
+          <a:prstGeom prst="rect">
+            <a:avLst/>
+          </a:prstGeom>
+          <a:solidFill>
+            <a:srgbClr val="DFE1DE"/>
+          </a:solidFill>
+          <a:ln>
+            <a:noFill/>
+          </a:ln>
+          <a:effectLst/>
+        </p:spPr>
+        <p:style>
+          <a:lnRef idx="1">
+            <a:schemeClr val="accent1"/>
+          </a:lnRef>
+          <a:fillRef idx="3">
+            <a:schemeClr val="accent1"/>
+          </a:fillRef>
+          <a:effectRef idx="2">
+            <a:schemeClr val="accent1"/>
+          </a:effectRef>
+          <a:fontRef idx="minor">
+            <a:schemeClr val="lt1"/>
+          </a:fontRef>
+        </p:style>
+        <p:txBody>
+          <a:bodyPr rtlCol="0" anchor="ctr" wrap="square"/>
+          <a:lstStyle/>
+          <a:p>
+            <a:pPr algn="ctr"/>
+          </a:p>
+        </p:txBody>
+      </p:sp>
+      <p:sp>
+        <p:nvSpPr>
+          <p:cNvPr id="28" name="Rectangle 27"/>
+          <p:cNvSpPr/>
+          <p:nvPr/>
+        </p:nvSpPr>
+        <p:spPr>
+          <a:xfrm>
+            <a:off x="777240" y="6601968"/>
+            <a:ext cx="6205042" cy="13716"/>
+          </a:xfrm>
+          <a:prstGeom prst="rect">
+            <a:avLst/>
+          </a:prstGeom>
+          <a:solidFill>
+            <a:srgbClr val="0278E4"/>
+          </a:solidFill>
+          <a:ln>
+            <a:noFill/>
+          </a:ln>
+          <a:effectLst/>
+        </p:spPr>
+        <p:style>
+          <a:lnRef idx="1">
+            <a:schemeClr val="accent1"/>
+          </a:lnRef>
+          <a:fillRef idx="3">
+            <a:schemeClr val="accent1"/>
+          </a:fillRef>
+          <a:effectRef idx="2">
+            <a:schemeClr val="accent1"/>
+          </a:effectRef>
+          <a:fontRef idx="minor">
+            <a:schemeClr val="lt1"/>
+          </a:fontRef>
+        </p:style>
+        <p:txBody>
+          <a:bodyPr rtlCol="0" anchor="ctr" wrap="square"/>
+          <a:lstStyle/>
+          <a:p>
+            <a:pPr algn="ctr"/>
+          </a:p>
+        </p:txBody>
+      </p:sp>
     </p:spTree>
   </p:cSld>
   <p:clrMapOvr>
     <a:masterClrMapping/>
   </p:clrMapOvr>
+  <mc:AlternateContent xmlns:mc="http://schemas.openxmlformats.org/markup-compatibility/2006">
+    <mc:Choice xmlns:p159="http://schemas.microsoft.com/office/powerpoint/2015/09/main" Requires="p159">
+      <p:transition xmlns:p14="http://schemas.microsoft.com/office/powerpoint/2010/main" spd="slow" p14:dur="700">
+        <p159:morph option="byObject"/>
+      </p:transition>
+    </mc:Choice>
+    <mc:Fallback>
+      <p:transition xmlns:p14="http://schemas.microsoft.com/office/powerpoint/2010/main" spd="slow" p14:dur="700">
+        <p:fade/>
+      </p:transition>
+    </mc:Fallback>
+  </mc:AlternateContent>
 </p:sld>
 </file>
 
@@ -11243,11 +14230,111 @@
           </a:p>
         </p:txBody>
       </p:sp>
+      <p:sp>
+        <p:nvSpPr>
+          <p:cNvPr id="13" name="Rectangle 12"/>
+          <p:cNvSpPr/>
+          <p:nvPr/>
+        </p:nvSpPr>
+        <p:spPr>
+          <a:xfrm>
+            <a:off x="777240" y="6601968"/>
+            <a:ext cx="10637215" cy="13716"/>
+          </a:xfrm>
+          <a:prstGeom prst="rect">
+            <a:avLst/>
+          </a:prstGeom>
+          <a:solidFill>
+            <a:srgbClr val="DFE1DE"/>
+          </a:solidFill>
+          <a:ln>
+            <a:noFill/>
+          </a:ln>
+          <a:effectLst/>
+        </p:spPr>
+        <p:style>
+          <a:lnRef idx="1">
+            <a:schemeClr val="accent1"/>
+          </a:lnRef>
+          <a:fillRef idx="3">
+            <a:schemeClr val="accent1"/>
+          </a:fillRef>
+          <a:effectRef idx="2">
+            <a:schemeClr val="accent1"/>
+          </a:effectRef>
+          <a:fontRef idx="minor">
+            <a:schemeClr val="lt1"/>
+          </a:fontRef>
+        </p:style>
+        <p:txBody>
+          <a:bodyPr rtlCol="0" anchor="ctr" wrap="square"/>
+          <a:lstStyle/>
+          <a:p>
+            <a:pPr algn="ctr"/>
+          </a:p>
+        </p:txBody>
+      </p:sp>
+      <p:sp>
+        <p:nvSpPr>
+          <p:cNvPr id="14" name="Rectangle 13"/>
+          <p:cNvSpPr/>
+          <p:nvPr/>
+        </p:nvSpPr>
+        <p:spPr>
+          <a:xfrm>
+            <a:off x="777240" y="6601968"/>
+            <a:ext cx="6648259" cy="13716"/>
+          </a:xfrm>
+          <a:prstGeom prst="rect">
+            <a:avLst/>
+          </a:prstGeom>
+          <a:solidFill>
+            <a:srgbClr val="0278E4"/>
+          </a:solidFill>
+          <a:ln>
+            <a:noFill/>
+          </a:ln>
+          <a:effectLst/>
+        </p:spPr>
+        <p:style>
+          <a:lnRef idx="1">
+            <a:schemeClr val="accent1"/>
+          </a:lnRef>
+          <a:fillRef idx="3">
+            <a:schemeClr val="accent1"/>
+          </a:fillRef>
+          <a:effectRef idx="2">
+            <a:schemeClr val="accent1"/>
+          </a:effectRef>
+          <a:fontRef idx="minor">
+            <a:schemeClr val="lt1"/>
+          </a:fontRef>
+        </p:style>
+        <p:txBody>
+          <a:bodyPr rtlCol="0" anchor="ctr" wrap="square"/>
+          <a:lstStyle/>
+          <a:p>
+            <a:pPr algn="ctr"/>
+          </a:p>
+        </p:txBody>
+      </p:sp>
     </p:spTree>
   </p:cSld>
   <p:clrMapOvr>
     <a:masterClrMapping/>
   </p:clrMapOvr>
+  <mc:AlternateContent xmlns:mc="http://schemas.openxmlformats.org/markup-compatibility/2006">
+    <mc:Choice xmlns:p159="http://schemas.microsoft.com/office/powerpoint/2015/09/main" Requires="p159">
+      <p:transition xmlns:p14="http://schemas.microsoft.com/office/powerpoint/2010/main" spd="slow" p14:dur="700">
+        <p159:morph option="byObject"/>
+      </p:transition>
+    </mc:Choice>
+    <mc:Fallback>
+      <p:transition xmlns:p14="http://schemas.microsoft.com/office/powerpoint/2010/main" spd="slow" p14:dur="700">
+        <p:fade/>
+      </p:transition>
+    </mc:Fallback>
+  </mc:AlternateContent>
 </p:sld>
 </file>
 
@@ -12542,11 +15629,111 @@
           </a:p>
         </p:txBody>
       </p:sp>
+      <p:sp>
+        <p:nvSpPr>
+          <p:cNvPr id="11" name="Rectangle 10"/>
+          <p:cNvSpPr/>
+          <p:nvPr/>
+        </p:nvSpPr>
+        <p:spPr>
+          <a:xfrm>
+            <a:off x="777240" y="6601968"/>
+            <a:ext cx="10637215" cy="13716"/>
+          </a:xfrm>
+          <a:prstGeom prst="rect">
+            <a:avLst/>
+          </a:prstGeom>
+          <a:solidFill>
+            <a:srgbClr val="DFE1DE"/>
+          </a:solidFill>
+          <a:ln>
+            <a:noFill/>
+          </a:ln>
+          <a:effectLst/>
+        </p:spPr>
+        <p:style>
+          <a:lnRef idx="1">
+            <a:schemeClr val="accent1"/>
+          </a:lnRef>
+          <a:fillRef idx="3">
+            <a:schemeClr val="accent1"/>
+          </a:fillRef>
+          <a:effectRef idx="2">
+            <a:schemeClr val="accent1"/>
+          </a:effectRef>
+          <a:fontRef idx="minor">
+            <a:schemeClr val="lt1"/>
+          </a:fontRef>
+        </p:style>
+        <p:txBody>
+          <a:bodyPr rtlCol="0" anchor="ctr" wrap="square"/>
+          <a:lstStyle/>
+          <a:p>
+            <a:pPr algn="ctr"/>
+          </a:p>
+        </p:txBody>
+      </p:sp>
+      <p:sp>
+        <p:nvSpPr>
+          <p:cNvPr id="12" name="Rectangle 11"/>
+          <p:cNvSpPr/>
+          <p:nvPr/>
+        </p:nvSpPr>
+        <p:spPr>
+          <a:xfrm>
+            <a:off x="777240" y="6601968"/>
+            <a:ext cx="7091476" cy="13716"/>
+          </a:xfrm>
+          <a:prstGeom prst="rect">
+            <a:avLst/>
+          </a:prstGeom>
+          <a:solidFill>
+            <a:srgbClr val="0278E4"/>
+          </a:solidFill>
+          <a:ln>
+            <a:noFill/>
+          </a:ln>
+          <a:effectLst/>
+        </p:spPr>
+        <p:style>
+          <a:lnRef idx="1">
+            <a:schemeClr val="accent1"/>
+          </a:lnRef>
+          <a:fillRef idx="3">
+            <a:schemeClr val="accent1"/>
+          </a:fillRef>
+          <a:effectRef idx="2">
+            <a:schemeClr val="accent1"/>
+          </a:effectRef>
+          <a:fontRef idx="minor">
+            <a:schemeClr val="lt1"/>
+          </a:fontRef>
+        </p:style>
+        <p:txBody>
+          <a:bodyPr rtlCol="0" anchor="ctr" wrap="square"/>
+          <a:lstStyle/>
+          <a:p>
+            <a:pPr algn="ctr"/>
+          </a:p>
+        </p:txBody>
+      </p:sp>
     </p:spTree>
   </p:cSld>
   <p:clrMapOvr>
     <a:masterClrMapping/>
   </p:clrMapOvr>
+  <mc:AlternateContent xmlns:mc="http://schemas.openxmlformats.org/markup-compatibility/2006">
+    <mc:Choice xmlns:p159="http://schemas.microsoft.com/office/powerpoint/2015/09/main" Requires="p159">
+      <p:transition xmlns:p14="http://schemas.microsoft.com/office/powerpoint/2010/main" spd="slow" p14:dur="700">
+        <p159:morph option="byObject"/>
+      </p:transition>
+    </mc:Choice>
+    <mc:Fallback>
+      <p:transition xmlns:p14="http://schemas.microsoft.com/office/powerpoint/2010/main" spd="slow" p14:dur="700">
+        <p:fade/>
+      </p:transition>
+    </mc:Fallback>
+  </mc:AlternateContent>
 </p:sld>
 </file>
 
@@ -13414,11 +16601,111 @@
           </a:p>
         </p:txBody>
       </p:sp>
+      <p:sp>
+        <p:nvSpPr>
+          <p:cNvPr id="16" name="Rectangle 15"/>
+          <p:cNvSpPr/>
+          <p:nvPr/>
+        </p:nvSpPr>
+        <p:spPr>
+          <a:xfrm>
+            <a:off x="777240" y="6601968"/>
+            <a:ext cx="10637215" cy="13716"/>
+          </a:xfrm>
+          <a:prstGeom prst="rect">
+            <a:avLst/>
+          </a:prstGeom>
+          <a:solidFill>
+            <a:srgbClr val="DFE1DE"/>
+          </a:solidFill>
+          <a:ln>
+            <a:noFill/>
+          </a:ln>
+          <a:effectLst/>
+        </p:spPr>
+        <p:style>
+          <a:lnRef idx="1">
+            <a:schemeClr val="accent1"/>
+          </a:lnRef>
+          <a:fillRef idx="3">
+            <a:schemeClr val="accent1"/>
+          </a:fillRef>
+          <a:effectRef idx="2">
+            <a:schemeClr val="accent1"/>
+          </a:effectRef>
+          <a:fontRef idx="minor">
+            <a:schemeClr val="lt1"/>
+          </a:fontRef>
+        </p:style>
+        <p:txBody>
+          <a:bodyPr rtlCol="0" anchor="ctr" wrap="square"/>
+          <a:lstStyle/>
+          <a:p>
+            <a:pPr algn="ctr"/>
+          </a:p>
+        </p:txBody>
+      </p:sp>
+      <p:sp>
+        <p:nvSpPr>
+          <p:cNvPr id="17" name="Rectangle 16"/>
+          <p:cNvSpPr/>
+          <p:nvPr/>
+        </p:nvSpPr>
+        <p:spPr>
+          <a:xfrm>
+            <a:off x="777240" y="6601968"/>
+            <a:ext cx="7534694" cy="13716"/>
+          </a:xfrm>
+          <a:prstGeom prst="rect">
+            <a:avLst/>
+          </a:prstGeom>
+          <a:solidFill>
+            <a:srgbClr val="0278E4"/>
+          </a:solidFill>
+          <a:ln>
+            <a:noFill/>
+          </a:ln>
+          <a:effectLst/>
+        </p:spPr>
+        <p:style>
+          <a:lnRef idx="1">
+            <a:schemeClr val="accent1"/>
+          </a:lnRef>
+          <a:fillRef idx="3">
+            <a:schemeClr val="accent1"/>
+          </a:fillRef>
+          <a:effectRef idx="2">
+            <a:schemeClr val="accent1"/>
+          </a:effectRef>
+          <a:fontRef idx="minor">
+            <a:schemeClr val="lt1"/>
+          </a:fontRef>
+        </p:style>
+        <p:txBody>
+          <a:bodyPr rtlCol="0" anchor="ctr" wrap="square"/>
+          <a:lstStyle/>
+          <a:p>
+            <a:pPr algn="ctr"/>
+          </a:p>
+        </p:txBody>
+      </p:sp>
     </p:spTree>
   </p:cSld>
   <p:clrMapOvr>
     <a:masterClrMapping/>
   </p:clrMapOvr>
+  <mc:AlternateContent xmlns:mc="http://schemas.openxmlformats.org/markup-compatibility/2006">
+    <mc:Choice xmlns:p159="http://schemas.microsoft.com/office/powerpoint/2015/09/main" Requires="p159">
+      <p:transition xmlns:p14="http://schemas.microsoft.com/office/powerpoint/2010/main" spd="slow" p14:dur="700">
+        <p159:morph option="byObject"/>
+      </p:transition>
+    </mc:Choice>
+    <mc:Fallback>
+      <p:transition xmlns:p14="http://schemas.microsoft.com/office/powerpoint/2010/main" spd="slow" p14:dur="700">
+        <p:fade/>
+      </p:transition>
+    </mc:Fallback>
+  </mc:AlternateContent>
 </p:sld>
 </file>
 
@@ -14990,11 +18277,111 @@
           </a:p>
         </p:txBody>
       </p:sp>
+      <p:sp>
+        <p:nvSpPr>
+          <p:cNvPr id="16" name="Rectangle 15"/>
+          <p:cNvSpPr/>
+          <p:nvPr/>
+        </p:nvSpPr>
+        <p:spPr>
+          <a:xfrm>
+            <a:off x="777240" y="6601968"/>
+            <a:ext cx="10637215" cy="13716"/>
+          </a:xfrm>
+          <a:prstGeom prst="rect">
+            <a:avLst/>
+          </a:prstGeom>
+          <a:solidFill>
+            <a:srgbClr val="DFE1DE"/>
+          </a:solidFill>
+          <a:ln>
+            <a:noFill/>
+          </a:ln>
+          <a:effectLst/>
+        </p:spPr>
+        <p:style>
+          <a:lnRef idx="1">
+            <a:schemeClr val="accent1"/>
+          </a:lnRef>
+          <a:fillRef idx="3">
+            <a:schemeClr val="accent1"/>
+          </a:fillRef>
+          <a:effectRef idx="2">
+            <a:schemeClr val="accent1"/>
+          </a:effectRef>
+          <a:fontRef idx="minor">
+            <a:schemeClr val="lt1"/>
+          </a:fontRef>
+        </p:style>
+        <p:txBody>
+          <a:bodyPr rtlCol="0" anchor="ctr" wrap="square"/>
+          <a:lstStyle/>
+          <a:p>
+            <a:pPr algn="ctr"/>
+          </a:p>
+        </p:txBody>
+      </p:sp>
+      <p:sp>
+        <p:nvSpPr>
+          <p:cNvPr id="17" name="Rectangle 16"/>
+          <p:cNvSpPr/>
+          <p:nvPr/>
+        </p:nvSpPr>
+        <p:spPr>
+          <a:xfrm>
+            <a:off x="777240" y="6601968"/>
+            <a:ext cx="7977911" cy="13716"/>
+          </a:xfrm>
+          <a:prstGeom prst="rect">
+            <a:avLst/>
+          </a:prstGeom>
+          <a:solidFill>
+            <a:srgbClr val="0278E4"/>
+          </a:solidFill>
+          <a:ln>
+            <a:noFill/>
+          </a:ln>
+          <a:effectLst/>
+        </p:spPr>
+        <p:style>
+          <a:lnRef idx="1">
+            <a:schemeClr val="accent1"/>
+          </a:lnRef>
+          <a:fillRef idx="3">
+            <a:schemeClr val="accent1"/>
+          </a:fillRef>
+          <a:effectRef idx="2">
+            <a:schemeClr val="accent1"/>
+          </a:effectRef>
+          <a:fontRef idx="minor">
+            <a:schemeClr val="lt1"/>
+          </a:fontRef>
+        </p:style>
+        <p:txBody>
+          <a:bodyPr rtlCol="0" anchor="ctr" wrap="square"/>
+          <a:lstStyle/>
+          <a:p>
+            <a:pPr algn="ctr"/>
+          </a:p>
+        </p:txBody>
+      </p:sp>
     </p:spTree>
   </p:cSld>
   <p:clrMapOvr>
     <a:masterClrMapping/>
   </p:clrMapOvr>
+  <mc:AlternateContent xmlns:mc="http://schemas.openxmlformats.org/markup-compatibility/2006">
+    <mc:Choice xmlns:p159="http://schemas.microsoft.com/office/powerpoint/2015/09/main" Requires="p159">
+      <p:transition xmlns:p14="http://schemas.microsoft.com/office/powerpoint/2010/main" spd="slow" p14:dur="700">
+        <p159:morph option="byObject"/>
+      </p:transition>
+    </mc:Choice>
+    <mc:Fallback>
+      <p:transition xmlns:p14="http://schemas.microsoft.com/office/powerpoint/2010/main" spd="slow" p14:dur="700">
+        <p:fade/>
+      </p:transition>
+    </mc:Fallback>
+  </mc:AlternateContent>
 </p:sld>
 </file>
 
@@ -15747,11 +19134,111 @@
           </a:p>
         </p:txBody>
       </p:sp>
+      <p:sp>
+        <p:nvSpPr>
+          <p:cNvPr id="12" name="Rectangle 11"/>
+          <p:cNvSpPr/>
+          <p:nvPr/>
+        </p:nvSpPr>
+        <p:spPr>
+          <a:xfrm>
+            <a:off x="777240" y="6601968"/>
+            <a:ext cx="10637215" cy="13716"/>
+          </a:xfrm>
+          <a:prstGeom prst="rect">
+            <a:avLst/>
+          </a:prstGeom>
+          <a:solidFill>
+            <a:srgbClr val="DFE1DE"/>
+          </a:solidFill>
+          <a:ln>
+            <a:noFill/>
+          </a:ln>
+          <a:effectLst/>
+        </p:spPr>
+        <p:style>
+          <a:lnRef idx="1">
+            <a:schemeClr val="accent1"/>
+          </a:lnRef>
+          <a:fillRef idx="3">
+            <a:schemeClr val="accent1"/>
+          </a:fillRef>
+          <a:effectRef idx="2">
+            <a:schemeClr val="accent1"/>
+          </a:effectRef>
+          <a:fontRef idx="minor">
+            <a:schemeClr val="lt1"/>
+          </a:fontRef>
+        </p:style>
+        <p:txBody>
+          <a:bodyPr rtlCol="0" anchor="ctr" wrap="square"/>
+          <a:lstStyle/>
+          <a:p>
+            <a:pPr algn="ctr"/>
+          </a:p>
+        </p:txBody>
+      </p:sp>
+      <p:sp>
+        <p:nvSpPr>
+          <p:cNvPr id="13" name="Rectangle 12"/>
+          <p:cNvSpPr/>
+          <p:nvPr/>
+        </p:nvSpPr>
+        <p:spPr>
+          <a:xfrm>
+            <a:off x="777240" y="6601968"/>
+            <a:ext cx="8421128" cy="13716"/>
+          </a:xfrm>
+          <a:prstGeom prst="rect">
+            <a:avLst/>
+          </a:prstGeom>
+          <a:solidFill>
+            <a:srgbClr val="0278E4"/>
+          </a:solidFill>
+          <a:ln>
+            <a:noFill/>
+          </a:ln>
+          <a:effectLst/>
+        </p:spPr>
+        <p:style>
+          <a:lnRef idx="1">
+            <a:schemeClr val="accent1"/>
+          </a:lnRef>
+          <a:fillRef idx="3">
+            <a:schemeClr val="accent1"/>
+          </a:fillRef>
+          <a:effectRef idx="2">
+            <a:schemeClr val="accent1"/>
+          </a:effectRef>
+          <a:fontRef idx="minor">
+            <a:schemeClr val="lt1"/>
+          </a:fontRef>
+        </p:style>
+        <p:txBody>
+          <a:bodyPr rtlCol="0" anchor="ctr" wrap="square"/>
+          <a:lstStyle/>
+          <a:p>
+            <a:pPr algn="ctr"/>
+          </a:p>
+        </p:txBody>
+      </p:sp>
     </p:spTree>
   </p:cSld>
   <p:clrMapOvr>
     <a:masterClrMapping/>
   </p:clrMapOvr>
+  <mc:AlternateContent xmlns:mc="http://schemas.openxmlformats.org/markup-compatibility/2006">
+    <mc:Choice xmlns:p159="http://schemas.microsoft.com/office/powerpoint/2015/09/main" Requires="p159">
+      <p:transition xmlns:p14="http://schemas.microsoft.com/office/powerpoint/2010/main" spd="slow" p14:dur="700">
+        <p159:morph option="byObject"/>
+      </p:transition>
+    </mc:Choice>
+    <mc:Fallback>
+      <p:transition xmlns:p14="http://schemas.microsoft.com/office/powerpoint/2010/main" spd="slow" p14:dur="700">
+        <p:fade/>
+      </p:transition>
+    </mc:Fallback>
+  </mc:AlternateContent>
 </p:sld>
 </file>
 
@@ -16687,11 +20174,111 @@
           </a:p>
         </p:txBody>
       </p:sp>
+      <p:sp>
+        <p:nvSpPr>
+          <p:cNvPr id="25" name="Rectangle 24"/>
+          <p:cNvSpPr/>
+          <p:nvPr/>
+        </p:nvSpPr>
+        <p:spPr>
+          <a:xfrm>
+            <a:off x="777240" y="6601968"/>
+            <a:ext cx="10637215" cy="13716"/>
+          </a:xfrm>
+          <a:prstGeom prst="rect">
+            <a:avLst/>
+          </a:prstGeom>
+          <a:solidFill>
+            <a:srgbClr val="DFE1DE"/>
+          </a:solidFill>
+          <a:ln>
+            <a:noFill/>
+          </a:ln>
+          <a:effectLst/>
+        </p:spPr>
+        <p:style>
+          <a:lnRef idx="1">
+            <a:schemeClr val="accent1"/>
+          </a:lnRef>
+          <a:fillRef idx="3">
+            <a:schemeClr val="accent1"/>
+          </a:fillRef>
+          <a:effectRef idx="2">
+            <a:schemeClr val="accent1"/>
+          </a:effectRef>
+          <a:fontRef idx="minor">
+            <a:schemeClr val="lt1"/>
+          </a:fontRef>
+        </p:style>
+        <p:txBody>
+          <a:bodyPr rtlCol="0" anchor="ctr" wrap="square"/>
+          <a:lstStyle/>
+          <a:p>
+            <a:pPr algn="ctr"/>
+          </a:p>
+        </p:txBody>
+      </p:sp>
+      <p:sp>
+        <p:nvSpPr>
+          <p:cNvPr id="26" name="Rectangle 25"/>
+          <p:cNvSpPr/>
+          <p:nvPr/>
+        </p:nvSpPr>
+        <p:spPr>
+          <a:xfrm>
+            <a:off x="777240" y="6601968"/>
+            <a:ext cx="886434" cy="13716"/>
+          </a:xfrm>
+          <a:prstGeom prst="rect">
+            <a:avLst/>
+          </a:prstGeom>
+          <a:solidFill>
+            <a:srgbClr val="0278E4"/>
+          </a:solidFill>
+          <a:ln>
+            <a:noFill/>
+          </a:ln>
+          <a:effectLst/>
+        </p:spPr>
+        <p:style>
+          <a:lnRef idx="1">
+            <a:schemeClr val="accent1"/>
+          </a:lnRef>
+          <a:fillRef idx="3">
+            <a:schemeClr val="accent1"/>
+          </a:fillRef>
+          <a:effectRef idx="2">
+            <a:schemeClr val="accent1"/>
+          </a:effectRef>
+          <a:fontRef idx="minor">
+            <a:schemeClr val="lt1"/>
+          </a:fontRef>
+        </p:style>
+        <p:txBody>
+          <a:bodyPr rtlCol="0" anchor="ctr" wrap="square"/>
+          <a:lstStyle/>
+          <a:p>
+            <a:pPr algn="ctr"/>
+          </a:p>
+        </p:txBody>
+      </p:sp>
     </p:spTree>
   </p:cSld>
   <p:clrMapOvr>
     <a:masterClrMapping/>
   </p:clrMapOvr>
+  <mc:AlternateContent xmlns:mc="http://schemas.openxmlformats.org/markup-compatibility/2006">
+    <mc:Choice xmlns:p159="http://schemas.microsoft.com/office/powerpoint/2015/09/main" Requires="p159">
+      <p:transition xmlns:p14="http://schemas.microsoft.com/office/powerpoint/2010/main" spd="slow" p14:dur="700">
+        <p159:morph option="byObject"/>
+      </p:transition>
+    </mc:Choice>
+    <mc:Fallback>
+      <p:transition xmlns:p14="http://schemas.microsoft.com/office/powerpoint/2010/main" spd="slow" p14:dur="700">
+        <p:fade/>
+      </p:transition>
+    </mc:Fallback>
+  </mc:AlternateContent>
 </p:sld>
 </file>
 
@@ -17162,11 +20749,111 @@
           </a:p>
         </p:txBody>
       </p:sp>
+      <p:sp>
+        <p:nvSpPr>
+          <p:cNvPr id="11" name="Rectangle 10"/>
+          <p:cNvSpPr/>
+          <p:nvPr/>
+        </p:nvSpPr>
+        <p:spPr>
+          <a:xfrm>
+            <a:off x="777240" y="6601968"/>
+            <a:ext cx="10637215" cy="13716"/>
+          </a:xfrm>
+          <a:prstGeom prst="rect">
+            <a:avLst/>
+          </a:prstGeom>
+          <a:solidFill>
+            <a:srgbClr val="DFE1DE"/>
+          </a:solidFill>
+          <a:ln>
+            <a:noFill/>
+          </a:ln>
+          <a:effectLst/>
+        </p:spPr>
+        <p:style>
+          <a:lnRef idx="1">
+            <a:schemeClr val="accent1"/>
+          </a:lnRef>
+          <a:fillRef idx="3">
+            <a:schemeClr val="accent1"/>
+          </a:fillRef>
+          <a:effectRef idx="2">
+            <a:schemeClr val="accent1"/>
+          </a:effectRef>
+          <a:fontRef idx="minor">
+            <a:schemeClr val="lt1"/>
+          </a:fontRef>
+        </p:style>
+        <p:txBody>
+          <a:bodyPr rtlCol="0" anchor="ctr" wrap="square"/>
+          <a:lstStyle/>
+          <a:p>
+            <a:pPr algn="ctr"/>
+          </a:p>
+        </p:txBody>
+      </p:sp>
+      <p:sp>
+        <p:nvSpPr>
+          <p:cNvPr id="12" name="Rectangle 11"/>
+          <p:cNvSpPr/>
+          <p:nvPr/>
+        </p:nvSpPr>
+        <p:spPr>
+          <a:xfrm>
+            <a:off x="777240" y="6601968"/>
+            <a:ext cx="8864346" cy="13716"/>
+          </a:xfrm>
+          <a:prstGeom prst="rect">
+            <a:avLst/>
+          </a:prstGeom>
+          <a:solidFill>
+            <a:srgbClr val="0278E4"/>
+          </a:solidFill>
+          <a:ln>
+            <a:noFill/>
+          </a:ln>
+          <a:effectLst/>
+        </p:spPr>
+        <p:style>
+          <a:lnRef idx="1">
+            <a:schemeClr val="accent1"/>
+          </a:lnRef>
+          <a:fillRef idx="3">
+            <a:schemeClr val="accent1"/>
+          </a:fillRef>
+          <a:effectRef idx="2">
+            <a:schemeClr val="accent1"/>
+          </a:effectRef>
+          <a:fontRef idx="minor">
+            <a:schemeClr val="lt1"/>
+          </a:fontRef>
+        </p:style>
+        <p:txBody>
+          <a:bodyPr rtlCol="0" anchor="ctr" wrap="square"/>
+          <a:lstStyle/>
+          <a:p>
+            <a:pPr algn="ctr"/>
+          </a:p>
+        </p:txBody>
+      </p:sp>
     </p:spTree>
   </p:cSld>
   <p:clrMapOvr>
     <a:masterClrMapping/>
   </p:clrMapOvr>
+  <mc:AlternateContent xmlns:mc="http://schemas.openxmlformats.org/markup-compatibility/2006">
+    <mc:Choice xmlns:p159="http://schemas.microsoft.com/office/powerpoint/2015/09/main" Requires="p159">
+      <p:transition xmlns:p14="http://schemas.microsoft.com/office/powerpoint/2010/main" spd="slow" p14:dur="700">
+        <p159:morph option="byObject"/>
+      </p:transition>
+    </mc:Choice>
+    <mc:Fallback>
+      <p:transition xmlns:p14="http://schemas.microsoft.com/office/powerpoint/2010/main" spd="slow" p14:dur="700">
+        <p:fade/>
+      </p:transition>
+    </mc:Fallback>
+  </mc:AlternateContent>
 </p:sld>
 </file>
 
@@ -18602,11 +22289,111 @@
           </a:p>
         </p:txBody>
       </p:sp>
+      <p:sp>
+        <p:nvSpPr>
+          <p:cNvPr id="38" name="Rectangle 37"/>
+          <p:cNvSpPr/>
+          <p:nvPr/>
+        </p:nvSpPr>
+        <p:spPr>
+          <a:xfrm>
+            <a:off x="777240" y="6601968"/>
+            <a:ext cx="10637215" cy="13716"/>
+          </a:xfrm>
+          <a:prstGeom prst="rect">
+            <a:avLst/>
+          </a:prstGeom>
+          <a:solidFill>
+            <a:srgbClr val="DFE1DE"/>
+          </a:solidFill>
+          <a:ln>
+            <a:noFill/>
+          </a:ln>
+          <a:effectLst/>
+        </p:spPr>
+        <p:style>
+          <a:lnRef idx="1">
+            <a:schemeClr val="accent1"/>
+          </a:lnRef>
+          <a:fillRef idx="3">
+            <a:schemeClr val="accent1"/>
+          </a:fillRef>
+          <a:effectRef idx="2">
+            <a:schemeClr val="accent1"/>
+          </a:effectRef>
+          <a:fontRef idx="minor">
+            <a:schemeClr val="lt1"/>
+          </a:fontRef>
+        </p:style>
+        <p:txBody>
+          <a:bodyPr rtlCol="0" anchor="ctr" wrap="square"/>
+          <a:lstStyle/>
+          <a:p>
+            <a:pPr algn="ctr"/>
+          </a:p>
+        </p:txBody>
+      </p:sp>
+      <p:sp>
+        <p:nvSpPr>
+          <p:cNvPr id="39" name="Rectangle 38"/>
+          <p:cNvSpPr/>
+          <p:nvPr/>
+        </p:nvSpPr>
+        <p:spPr>
+          <a:xfrm>
+            <a:off x="777240" y="6601968"/>
+            <a:ext cx="9307563" cy="13716"/>
+          </a:xfrm>
+          <a:prstGeom prst="rect">
+            <a:avLst/>
+          </a:prstGeom>
+          <a:solidFill>
+            <a:srgbClr val="0278E4"/>
+          </a:solidFill>
+          <a:ln>
+            <a:noFill/>
+          </a:ln>
+          <a:effectLst/>
+        </p:spPr>
+        <p:style>
+          <a:lnRef idx="1">
+            <a:schemeClr val="accent1"/>
+          </a:lnRef>
+          <a:fillRef idx="3">
+            <a:schemeClr val="accent1"/>
+          </a:fillRef>
+          <a:effectRef idx="2">
+            <a:schemeClr val="accent1"/>
+          </a:effectRef>
+          <a:fontRef idx="minor">
+            <a:schemeClr val="lt1"/>
+          </a:fontRef>
+        </p:style>
+        <p:txBody>
+          <a:bodyPr rtlCol="0" anchor="ctr" wrap="square"/>
+          <a:lstStyle/>
+          <a:p>
+            <a:pPr algn="ctr"/>
+          </a:p>
+        </p:txBody>
+      </p:sp>
     </p:spTree>
   </p:cSld>
   <p:clrMapOvr>
     <a:masterClrMapping/>
   </p:clrMapOvr>
+  <mc:AlternateContent xmlns:mc="http://schemas.openxmlformats.org/markup-compatibility/2006">
+    <mc:Choice xmlns:p159="http://schemas.microsoft.com/office/powerpoint/2015/09/main" Requires="p159">
+      <p:transition xmlns:p14="http://schemas.microsoft.com/office/powerpoint/2010/main" spd="slow" p14:dur="700">
+        <p159:morph option="byObject"/>
+      </p:transition>
+    </mc:Choice>
+    <mc:Fallback>
+      <p:transition xmlns:p14="http://schemas.microsoft.com/office/powerpoint/2010/main" spd="slow" p14:dur="700">
+        <p:fade/>
+      </p:transition>
+    </mc:Fallback>
+  </mc:AlternateContent>
 </p:sld>
 </file>
 
@@ -19672,11 +23459,111 @@
           </a:p>
         </p:txBody>
       </p:sp>
+      <p:sp>
+        <p:nvSpPr>
+          <p:cNvPr id="26" name="Rectangle 25"/>
+          <p:cNvSpPr/>
+          <p:nvPr/>
+        </p:nvSpPr>
+        <p:spPr>
+          <a:xfrm>
+            <a:off x="777240" y="6601968"/>
+            <a:ext cx="10637215" cy="13716"/>
+          </a:xfrm>
+          <a:prstGeom prst="rect">
+            <a:avLst/>
+          </a:prstGeom>
+          <a:solidFill>
+            <a:srgbClr val="DFE1DE"/>
+          </a:solidFill>
+          <a:ln>
+            <a:noFill/>
+          </a:ln>
+          <a:effectLst/>
+        </p:spPr>
+        <p:style>
+          <a:lnRef idx="1">
+            <a:schemeClr val="accent1"/>
+          </a:lnRef>
+          <a:fillRef idx="3">
+            <a:schemeClr val="accent1"/>
+          </a:fillRef>
+          <a:effectRef idx="2">
+            <a:schemeClr val="accent1"/>
+          </a:effectRef>
+          <a:fontRef idx="minor">
+            <a:schemeClr val="lt1"/>
+          </a:fontRef>
+        </p:style>
+        <p:txBody>
+          <a:bodyPr rtlCol="0" anchor="ctr" wrap="square"/>
+          <a:lstStyle/>
+          <a:p>
+            <a:pPr algn="ctr"/>
+          </a:p>
+        </p:txBody>
+      </p:sp>
+      <p:sp>
+        <p:nvSpPr>
+          <p:cNvPr id="27" name="Rectangle 26"/>
+          <p:cNvSpPr/>
+          <p:nvPr/>
+        </p:nvSpPr>
+        <p:spPr>
+          <a:xfrm>
+            <a:off x="777240" y="6601968"/>
+            <a:ext cx="9750780" cy="13716"/>
+          </a:xfrm>
+          <a:prstGeom prst="rect">
+            <a:avLst/>
+          </a:prstGeom>
+          <a:solidFill>
+            <a:srgbClr val="0278E4"/>
+          </a:solidFill>
+          <a:ln>
+            <a:noFill/>
+          </a:ln>
+          <a:effectLst/>
+        </p:spPr>
+        <p:style>
+          <a:lnRef idx="1">
+            <a:schemeClr val="accent1"/>
+          </a:lnRef>
+          <a:fillRef idx="3">
+            <a:schemeClr val="accent1"/>
+          </a:fillRef>
+          <a:effectRef idx="2">
+            <a:schemeClr val="accent1"/>
+          </a:effectRef>
+          <a:fontRef idx="minor">
+            <a:schemeClr val="lt1"/>
+          </a:fontRef>
+        </p:style>
+        <p:txBody>
+          <a:bodyPr rtlCol="0" anchor="ctr" wrap="square"/>
+          <a:lstStyle/>
+          <a:p>
+            <a:pPr algn="ctr"/>
+          </a:p>
+        </p:txBody>
+      </p:sp>
     </p:spTree>
   </p:cSld>
   <p:clrMapOvr>
     <a:masterClrMapping/>
   </p:clrMapOvr>
+  <mc:AlternateContent xmlns:mc="http://schemas.openxmlformats.org/markup-compatibility/2006">
+    <mc:Choice xmlns:p159="http://schemas.microsoft.com/office/powerpoint/2015/09/main" Requires="p159">
+      <p:transition xmlns:p14="http://schemas.microsoft.com/office/powerpoint/2010/main" spd="slow" p14:dur="700">
+        <p159:morph option="byObject"/>
+      </p:transition>
+    </mc:Choice>
+    <mc:Fallback>
+      <p:transition xmlns:p14="http://schemas.microsoft.com/office/powerpoint/2010/main" spd="slow" p14:dur="700">
+        <p:fade/>
+      </p:transition>
+    </mc:Fallback>
+  </mc:AlternateContent>
 </p:sld>
 </file>
 
@@ -20142,11 +24029,111 @@
           </a:p>
         </p:txBody>
       </p:sp>
+      <p:sp>
+        <p:nvSpPr>
+          <p:cNvPr id="10" name="Rectangle 9"/>
+          <p:cNvSpPr/>
+          <p:nvPr/>
+        </p:nvSpPr>
+        <p:spPr>
+          <a:xfrm>
+            <a:off x="777240" y="6601968"/>
+            <a:ext cx="10637215" cy="13716"/>
+          </a:xfrm>
+          <a:prstGeom prst="rect">
+            <a:avLst/>
+          </a:prstGeom>
+          <a:solidFill>
+            <a:srgbClr val="33363B"/>
+          </a:solidFill>
+          <a:ln>
+            <a:noFill/>
+          </a:ln>
+          <a:effectLst/>
+        </p:spPr>
+        <p:style>
+          <a:lnRef idx="1">
+            <a:schemeClr val="accent1"/>
+          </a:lnRef>
+          <a:fillRef idx="3">
+            <a:schemeClr val="accent1"/>
+          </a:fillRef>
+          <a:effectRef idx="2">
+            <a:schemeClr val="accent1"/>
+          </a:effectRef>
+          <a:fontRef idx="minor">
+            <a:schemeClr val="lt1"/>
+          </a:fontRef>
+        </p:style>
+        <p:txBody>
+          <a:bodyPr rtlCol="0" anchor="ctr" wrap="square"/>
+          <a:lstStyle/>
+          <a:p>
+            <a:pPr algn="ctr"/>
+          </a:p>
+        </p:txBody>
+      </p:sp>
+      <p:sp>
+        <p:nvSpPr>
+          <p:cNvPr id="11" name="Rectangle 10"/>
+          <p:cNvSpPr/>
+          <p:nvPr/>
+        </p:nvSpPr>
+        <p:spPr>
+          <a:xfrm>
+            <a:off x="777240" y="6601968"/>
+            <a:ext cx="10193997" cy="13716"/>
+          </a:xfrm>
+          <a:prstGeom prst="rect">
+            <a:avLst/>
+          </a:prstGeom>
+          <a:solidFill>
+            <a:srgbClr val="4FA9F5"/>
+          </a:solidFill>
+          <a:ln>
+            <a:noFill/>
+          </a:ln>
+          <a:effectLst/>
+        </p:spPr>
+        <p:style>
+          <a:lnRef idx="1">
+            <a:schemeClr val="accent1"/>
+          </a:lnRef>
+          <a:fillRef idx="3">
+            <a:schemeClr val="accent1"/>
+          </a:fillRef>
+          <a:effectRef idx="2">
+            <a:schemeClr val="accent1"/>
+          </a:effectRef>
+          <a:fontRef idx="minor">
+            <a:schemeClr val="lt1"/>
+          </a:fontRef>
+        </p:style>
+        <p:txBody>
+          <a:bodyPr rtlCol="0" anchor="ctr" wrap="square"/>
+          <a:lstStyle/>
+          <a:p>
+            <a:pPr algn="ctr"/>
+          </a:p>
+        </p:txBody>
+      </p:sp>
     </p:spTree>
   </p:cSld>
   <p:clrMapOvr>
     <a:masterClrMapping/>
   </p:clrMapOvr>
+  <mc:AlternateContent xmlns:mc="http://schemas.openxmlformats.org/markup-compatibility/2006">
+    <mc:Choice xmlns:p159="http://schemas.microsoft.com/office/powerpoint/2015/09/main" Requires="p159">
+      <p:transition xmlns:p14="http://schemas.microsoft.com/office/powerpoint/2010/main" spd="slow" p14:dur="700">
+        <p159:morph option="byObject"/>
+      </p:transition>
+    </mc:Choice>
+    <mc:Fallback>
+      <p:transition xmlns:p14="http://schemas.microsoft.com/office/powerpoint/2010/main" spd="slow" p14:dur="700">
+        <p:fade/>
+      </p:transition>
+    </mc:Fallback>
+  </mc:AlternateContent>
 </p:sld>
 </file>
 
@@ -20687,11 +24674,111 @@
           </a:p>
         </p:txBody>
       </p:sp>
+      <p:sp>
+        <p:nvSpPr>
+          <p:cNvPr id="11" name="Rectangle 10"/>
+          <p:cNvSpPr/>
+          <p:nvPr/>
+        </p:nvSpPr>
+        <p:spPr>
+          <a:xfrm>
+            <a:off x="777240" y="6601968"/>
+            <a:ext cx="10637215" cy="13716"/>
+          </a:xfrm>
+          <a:prstGeom prst="rect">
+            <a:avLst/>
+          </a:prstGeom>
+          <a:solidFill>
+            <a:srgbClr val="DFE1DE"/>
+          </a:solidFill>
+          <a:ln>
+            <a:noFill/>
+          </a:ln>
+          <a:effectLst/>
+        </p:spPr>
+        <p:style>
+          <a:lnRef idx="1">
+            <a:schemeClr val="accent1"/>
+          </a:lnRef>
+          <a:fillRef idx="3">
+            <a:schemeClr val="accent1"/>
+          </a:fillRef>
+          <a:effectRef idx="2">
+            <a:schemeClr val="accent1"/>
+          </a:effectRef>
+          <a:fontRef idx="minor">
+            <a:schemeClr val="lt1"/>
+          </a:fontRef>
+        </p:style>
+        <p:txBody>
+          <a:bodyPr rtlCol="0" anchor="ctr" wrap="square"/>
+          <a:lstStyle/>
+          <a:p>
+            <a:pPr algn="ctr"/>
+          </a:p>
+        </p:txBody>
+      </p:sp>
+      <p:sp>
+        <p:nvSpPr>
+          <p:cNvPr id="12" name="Rectangle 11"/>
+          <p:cNvSpPr/>
+          <p:nvPr/>
+        </p:nvSpPr>
+        <p:spPr>
+          <a:xfrm>
+            <a:off x="777240" y="6601968"/>
+            <a:ext cx="10637215" cy="13716"/>
+          </a:xfrm>
+          <a:prstGeom prst="rect">
+            <a:avLst/>
+          </a:prstGeom>
+          <a:solidFill>
+            <a:srgbClr val="0278E4"/>
+          </a:solidFill>
+          <a:ln>
+            <a:noFill/>
+          </a:ln>
+          <a:effectLst/>
+        </p:spPr>
+        <p:style>
+          <a:lnRef idx="1">
+            <a:schemeClr val="accent1"/>
+          </a:lnRef>
+          <a:fillRef idx="3">
+            <a:schemeClr val="accent1"/>
+          </a:fillRef>
+          <a:effectRef idx="2">
+            <a:schemeClr val="accent1"/>
+          </a:effectRef>
+          <a:fontRef idx="minor">
+            <a:schemeClr val="lt1"/>
+          </a:fontRef>
+        </p:style>
+        <p:txBody>
+          <a:bodyPr rtlCol="0" anchor="ctr" wrap="square"/>
+          <a:lstStyle/>
+          <a:p>
+            <a:pPr algn="ctr"/>
+          </a:p>
+        </p:txBody>
+      </p:sp>
     </p:spTree>
   </p:cSld>
   <p:clrMapOvr>
     <a:masterClrMapping/>
   </p:clrMapOvr>
+  <mc:AlternateContent xmlns:mc="http://schemas.openxmlformats.org/markup-compatibility/2006">
+    <mc:Choice xmlns:p159="http://schemas.microsoft.com/office/powerpoint/2015/09/main" Requires="p159">
+      <p:transition xmlns:p14="http://schemas.microsoft.com/office/powerpoint/2010/main" spd="slow" p14:dur="700">
+        <p159:morph option="byObject"/>
+      </p:transition>
+    </mc:Choice>
+    <mc:Fallback>
+      <p:transition xmlns:p14="http://schemas.microsoft.com/office/powerpoint/2010/main" spd="slow" p14:dur="700">
+        <p:fade/>
+      </p:transition>
+    </mc:Fallback>
+  </mc:AlternateContent>
 </p:sld>
 </file>
 
@@ -21173,11 +25260,111 @@
           </a:p>
         </p:txBody>
       </p:sp>
+      <p:sp>
+        <p:nvSpPr>
+          <p:cNvPr id="10" name="Rectangle 9"/>
+          <p:cNvSpPr/>
+          <p:nvPr/>
+        </p:nvSpPr>
+        <p:spPr>
+          <a:xfrm>
+            <a:off x="777240" y="6601968"/>
+            <a:ext cx="10637215" cy="13716"/>
+          </a:xfrm>
+          <a:prstGeom prst="rect">
+            <a:avLst/>
+          </a:prstGeom>
+          <a:solidFill>
+            <a:srgbClr val="DFE1DE"/>
+          </a:solidFill>
+          <a:ln>
+            <a:noFill/>
+          </a:ln>
+          <a:effectLst/>
+        </p:spPr>
+        <p:style>
+          <a:lnRef idx="1">
+            <a:schemeClr val="accent1"/>
+          </a:lnRef>
+          <a:fillRef idx="3">
+            <a:schemeClr val="accent1"/>
+          </a:fillRef>
+          <a:effectRef idx="2">
+            <a:schemeClr val="accent1"/>
+          </a:effectRef>
+          <a:fontRef idx="minor">
+            <a:schemeClr val="lt1"/>
+          </a:fontRef>
+        </p:style>
+        <p:txBody>
+          <a:bodyPr rtlCol="0" anchor="ctr" wrap="square"/>
+          <a:lstStyle/>
+          <a:p>
+            <a:pPr algn="ctr"/>
+          </a:p>
+        </p:txBody>
+      </p:sp>
+      <p:sp>
+        <p:nvSpPr>
+          <p:cNvPr id="11" name="Rectangle 10"/>
+          <p:cNvSpPr/>
+          <p:nvPr/>
+        </p:nvSpPr>
+        <p:spPr>
+          <a:xfrm>
+            <a:off x="777240" y="6601968"/>
+            <a:ext cx="10637215" cy="13716"/>
+          </a:xfrm>
+          <a:prstGeom prst="rect">
+            <a:avLst/>
+          </a:prstGeom>
+          <a:solidFill>
+            <a:srgbClr val="0278E4"/>
+          </a:solidFill>
+          <a:ln>
+            <a:noFill/>
+          </a:ln>
+          <a:effectLst/>
+        </p:spPr>
+        <p:style>
+          <a:lnRef idx="1">
+            <a:schemeClr val="accent1"/>
+          </a:lnRef>
+          <a:fillRef idx="3">
+            <a:schemeClr val="accent1"/>
+          </a:fillRef>
+          <a:effectRef idx="2">
+            <a:schemeClr val="accent1"/>
+          </a:effectRef>
+          <a:fontRef idx="minor">
+            <a:schemeClr val="lt1"/>
+          </a:fontRef>
+        </p:style>
+        <p:txBody>
+          <a:bodyPr rtlCol="0" anchor="ctr" wrap="square"/>
+          <a:lstStyle/>
+          <a:p>
+            <a:pPr algn="ctr"/>
+          </a:p>
+        </p:txBody>
+      </p:sp>
     </p:spTree>
   </p:cSld>
   <p:clrMapOvr>
     <a:masterClrMapping/>
   </p:clrMapOvr>
+  <mc:AlternateContent xmlns:mc="http://schemas.openxmlformats.org/markup-compatibility/2006">
+    <mc:Choice xmlns:p159="http://schemas.microsoft.com/office/powerpoint/2015/09/main" Requires="p159">
+      <p:transition xmlns:p14="http://schemas.microsoft.com/office/powerpoint/2010/main" spd="slow" p14:dur="700">
+        <p159:morph option="byObject"/>
+      </p:transition>
+    </mc:Choice>
+    <mc:Fallback>
+      <p:transition xmlns:p14="http://schemas.microsoft.com/office/powerpoint/2010/main" spd="slow" p14:dur="700">
+        <p:fade/>
+      </p:transition>
+    </mc:Fallback>
+  </mc:AlternateContent>
 </p:sld>
 </file>
 
@@ -21410,6 +25597,18 @@
   <p:clrMapOvr>
     <a:masterClrMapping/>
   </p:clrMapOvr>
+  <mc:AlternateContent xmlns:mc="http://schemas.openxmlformats.org/markup-compatibility/2006">
+    <mc:Choice xmlns:p159="http://schemas.microsoft.com/office/powerpoint/2015/09/main" Requires="p159">
+      <p:transition xmlns:p14="http://schemas.microsoft.com/office/powerpoint/2010/main" spd="slow" p14:dur="700">
+        <p159:morph option="byObject"/>
+      </p:transition>
+    </mc:Choice>
+    <mc:Fallback>
+      <p:transition xmlns:p14="http://schemas.microsoft.com/office/powerpoint/2010/main" spd="slow" p14:dur="700">
+        <p:fade/>
+      </p:transition>
+    </mc:Fallback>
+  </mc:AlternateContent>
 </p:sld>
 </file>
 
@@ -21682,11 +25881,111 @@
           </a:p>
         </p:txBody>
       </p:sp>
+      <p:sp>
+        <p:nvSpPr>
+          <p:cNvPr id="9" name="Rectangle 8"/>
+          <p:cNvSpPr/>
+          <p:nvPr/>
+        </p:nvSpPr>
+        <p:spPr>
+          <a:xfrm>
+            <a:off x="777240" y="6601968"/>
+            <a:ext cx="10637215" cy="13716"/>
+          </a:xfrm>
+          <a:prstGeom prst="rect">
+            <a:avLst/>
+          </a:prstGeom>
+          <a:solidFill>
+            <a:srgbClr val="DFE1DE"/>
+          </a:solidFill>
+          <a:ln>
+            <a:noFill/>
+          </a:ln>
+          <a:effectLst/>
+        </p:spPr>
+        <p:style>
+          <a:lnRef idx="1">
+            <a:schemeClr val="accent1"/>
+          </a:lnRef>
+          <a:fillRef idx="3">
+            <a:schemeClr val="accent1"/>
+          </a:fillRef>
+          <a:effectRef idx="2">
+            <a:schemeClr val="accent1"/>
+          </a:effectRef>
+          <a:fontRef idx="minor">
+            <a:schemeClr val="lt1"/>
+          </a:fontRef>
+        </p:style>
+        <p:txBody>
+          <a:bodyPr rtlCol="0" anchor="ctr" wrap="square"/>
+          <a:lstStyle/>
+          <a:p>
+            <a:pPr algn="ctr"/>
+          </a:p>
+        </p:txBody>
+      </p:sp>
+      <p:sp>
+        <p:nvSpPr>
+          <p:cNvPr id="10" name="Rectangle 9"/>
+          <p:cNvSpPr/>
+          <p:nvPr/>
+        </p:nvSpPr>
+        <p:spPr>
+          <a:xfrm>
+            <a:off x="777240" y="6601968"/>
+            <a:ext cx="10637215" cy="13716"/>
+          </a:xfrm>
+          <a:prstGeom prst="rect">
+            <a:avLst/>
+          </a:prstGeom>
+          <a:solidFill>
+            <a:srgbClr val="0278E4"/>
+          </a:solidFill>
+          <a:ln>
+            <a:noFill/>
+          </a:ln>
+          <a:effectLst/>
+        </p:spPr>
+        <p:style>
+          <a:lnRef idx="1">
+            <a:schemeClr val="accent1"/>
+          </a:lnRef>
+          <a:fillRef idx="3">
+            <a:schemeClr val="accent1"/>
+          </a:fillRef>
+          <a:effectRef idx="2">
+            <a:schemeClr val="accent1"/>
+          </a:effectRef>
+          <a:fontRef idx="minor">
+            <a:schemeClr val="lt1"/>
+          </a:fontRef>
+        </p:style>
+        <p:txBody>
+          <a:bodyPr rtlCol="0" anchor="ctr" wrap="square"/>
+          <a:lstStyle/>
+          <a:p>
+            <a:pPr algn="ctr"/>
+          </a:p>
+        </p:txBody>
+      </p:sp>
     </p:spTree>
   </p:cSld>
   <p:clrMapOvr>
     <a:masterClrMapping/>
   </p:clrMapOvr>
+  <mc:AlternateContent xmlns:mc="http://schemas.openxmlformats.org/markup-compatibility/2006">
+    <mc:Choice xmlns:p159="http://schemas.microsoft.com/office/powerpoint/2015/09/main" Requires="p159">
+      <p:transition xmlns:p14="http://schemas.microsoft.com/office/powerpoint/2010/main" spd="slow" p14:dur="700">
+        <p159:morph option="byObject"/>
+      </p:transition>
+    </mc:Choice>
+    <mc:Fallback>
+      <p:transition xmlns:p14="http://schemas.microsoft.com/office/powerpoint/2010/main" spd="slow" p14:dur="700">
+        <p:fade/>
+      </p:transition>
+    </mc:Fallback>
+  </mc:AlternateContent>
 </p:sld>
 </file>
 
@@ -21959,11 +26258,111 @@
           </a:p>
         </p:txBody>
       </p:sp>
+      <p:sp>
+        <p:nvSpPr>
+          <p:cNvPr id="9" name="Rectangle 8"/>
+          <p:cNvSpPr/>
+          <p:nvPr/>
+        </p:nvSpPr>
+        <p:spPr>
+          <a:xfrm>
+            <a:off x="777240" y="6601968"/>
+            <a:ext cx="10637215" cy="13716"/>
+          </a:xfrm>
+          <a:prstGeom prst="rect">
+            <a:avLst/>
+          </a:prstGeom>
+          <a:solidFill>
+            <a:srgbClr val="DFE1DE"/>
+          </a:solidFill>
+          <a:ln>
+            <a:noFill/>
+          </a:ln>
+          <a:effectLst/>
+        </p:spPr>
+        <p:style>
+          <a:lnRef idx="1">
+            <a:schemeClr val="accent1"/>
+          </a:lnRef>
+          <a:fillRef idx="3">
+            <a:schemeClr val="accent1"/>
+          </a:fillRef>
+          <a:effectRef idx="2">
+            <a:schemeClr val="accent1"/>
+          </a:effectRef>
+          <a:fontRef idx="minor">
+            <a:schemeClr val="lt1"/>
+          </a:fontRef>
+        </p:style>
+        <p:txBody>
+          <a:bodyPr rtlCol="0" anchor="ctr" wrap="square"/>
+          <a:lstStyle/>
+          <a:p>
+            <a:pPr algn="ctr"/>
+          </a:p>
+        </p:txBody>
+      </p:sp>
+      <p:sp>
+        <p:nvSpPr>
+          <p:cNvPr id="10" name="Rectangle 9"/>
+          <p:cNvSpPr/>
+          <p:nvPr/>
+        </p:nvSpPr>
+        <p:spPr>
+          <a:xfrm>
+            <a:off x="777240" y="6601968"/>
+            <a:ext cx="10637215" cy="13716"/>
+          </a:xfrm>
+          <a:prstGeom prst="rect">
+            <a:avLst/>
+          </a:prstGeom>
+          <a:solidFill>
+            <a:srgbClr val="0278E4"/>
+          </a:solidFill>
+          <a:ln>
+            <a:noFill/>
+          </a:ln>
+          <a:effectLst/>
+        </p:spPr>
+        <p:style>
+          <a:lnRef idx="1">
+            <a:schemeClr val="accent1"/>
+          </a:lnRef>
+          <a:fillRef idx="3">
+            <a:schemeClr val="accent1"/>
+          </a:fillRef>
+          <a:effectRef idx="2">
+            <a:schemeClr val="accent1"/>
+          </a:effectRef>
+          <a:fontRef idx="minor">
+            <a:schemeClr val="lt1"/>
+          </a:fontRef>
+        </p:style>
+        <p:txBody>
+          <a:bodyPr rtlCol="0" anchor="ctr" wrap="square"/>
+          <a:lstStyle/>
+          <a:p>
+            <a:pPr algn="ctr"/>
+          </a:p>
+        </p:txBody>
+      </p:sp>
     </p:spTree>
   </p:cSld>
   <p:clrMapOvr>
     <a:masterClrMapping/>
   </p:clrMapOvr>
+  <mc:AlternateContent xmlns:mc="http://schemas.openxmlformats.org/markup-compatibility/2006">
+    <mc:Choice xmlns:p159="http://schemas.microsoft.com/office/powerpoint/2015/09/main" Requires="p159">
+      <p:transition xmlns:p14="http://schemas.microsoft.com/office/powerpoint/2010/main" spd="slow" p14:dur="700">
+        <p159:morph option="byObject"/>
+      </p:transition>
+    </mc:Choice>
+    <mc:Fallback>
+      <p:transition xmlns:p14="http://schemas.microsoft.com/office/powerpoint/2010/main" spd="slow" p14:dur="700">
+        <p:fade/>
+      </p:transition>
+    </mc:Fallback>
+  </mc:AlternateContent>
 </p:sld>
 </file>
 
@@ -22236,11 +26635,111 @@
           </a:p>
         </p:txBody>
       </p:sp>
+      <p:sp>
+        <p:nvSpPr>
+          <p:cNvPr id="9" name="Rectangle 8"/>
+          <p:cNvSpPr/>
+          <p:nvPr/>
+        </p:nvSpPr>
+        <p:spPr>
+          <a:xfrm>
+            <a:off x="777240" y="6601968"/>
+            <a:ext cx="10637215" cy="13716"/>
+          </a:xfrm>
+          <a:prstGeom prst="rect">
+            <a:avLst/>
+          </a:prstGeom>
+          <a:solidFill>
+            <a:srgbClr val="DFE1DE"/>
+          </a:solidFill>
+          <a:ln>
+            <a:noFill/>
+          </a:ln>
+          <a:effectLst/>
+        </p:spPr>
+        <p:style>
+          <a:lnRef idx="1">
+            <a:schemeClr val="accent1"/>
+          </a:lnRef>
+          <a:fillRef idx="3">
+            <a:schemeClr val="accent1"/>
+          </a:fillRef>
+          <a:effectRef idx="2">
+            <a:schemeClr val="accent1"/>
+          </a:effectRef>
+          <a:fontRef idx="minor">
+            <a:schemeClr val="lt1"/>
+          </a:fontRef>
+        </p:style>
+        <p:txBody>
+          <a:bodyPr rtlCol="0" anchor="ctr" wrap="square"/>
+          <a:lstStyle/>
+          <a:p>
+            <a:pPr algn="ctr"/>
+          </a:p>
+        </p:txBody>
+      </p:sp>
+      <p:sp>
+        <p:nvSpPr>
+          <p:cNvPr id="10" name="Rectangle 9"/>
+          <p:cNvSpPr/>
+          <p:nvPr/>
+        </p:nvSpPr>
+        <p:spPr>
+          <a:xfrm>
+            <a:off x="777240" y="6601968"/>
+            <a:ext cx="10637215" cy="13716"/>
+          </a:xfrm>
+          <a:prstGeom prst="rect">
+            <a:avLst/>
+          </a:prstGeom>
+          <a:solidFill>
+            <a:srgbClr val="0278E4"/>
+          </a:solidFill>
+          <a:ln>
+            <a:noFill/>
+          </a:ln>
+          <a:effectLst/>
+        </p:spPr>
+        <p:style>
+          <a:lnRef idx="1">
+            <a:schemeClr val="accent1"/>
+          </a:lnRef>
+          <a:fillRef idx="3">
+            <a:schemeClr val="accent1"/>
+          </a:fillRef>
+          <a:effectRef idx="2">
+            <a:schemeClr val="accent1"/>
+          </a:effectRef>
+          <a:fontRef idx="minor">
+            <a:schemeClr val="lt1"/>
+          </a:fontRef>
+        </p:style>
+        <p:txBody>
+          <a:bodyPr rtlCol="0" anchor="ctr" wrap="square"/>
+          <a:lstStyle/>
+          <a:p>
+            <a:pPr algn="ctr"/>
+          </a:p>
+        </p:txBody>
+      </p:sp>
     </p:spTree>
   </p:cSld>
   <p:clrMapOvr>
     <a:masterClrMapping/>
   </p:clrMapOvr>
+  <mc:AlternateContent xmlns:mc="http://schemas.openxmlformats.org/markup-compatibility/2006">
+    <mc:Choice xmlns:p159="http://schemas.microsoft.com/office/powerpoint/2015/09/main" Requires="p159">
+      <p:transition xmlns:p14="http://schemas.microsoft.com/office/powerpoint/2010/main" spd="slow" p14:dur="700">
+        <p159:morph option="byObject"/>
+      </p:transition>
+    </mc:Choice>
+    <mc:Fallback>
+      <p:transition xmlns:p14="http://schemas.microsoft.com/office/powerpoint/2010/main" spd="slow" p14:dur="700">
+        <p:fade/>
+      </p:transition>
+    </mc:Fallback>
+  </mc:AlternateContent>
 </p:sld>
 </file>
 
@@ -22291,6 +26790,18 @@
   <p:clrMapOvr>
     <a:masterClrMapping/>
   </p:clrMapOvr>
+  <mc:AlternateContent xmlns:mc="http://schemas.openxmlformats.org/markup-compatibility/2006">
+    <mc:Choice xmlns:p159="http://schemas.microsoft.com/office/powerpoint/2015/09/main" Requires="p159">
+      <p:transition xmlns:p14="http://schemas.microsoft.com/office/powerpoint/2010/main" spd="slow" p14:dur="700">
+        <p159:morph option="byObject"/>
+      </p:transition>
+    </mc:Choice>
+    <mc:Fallback>
+      <p:transition xmlns:p14="http://schemas.microsoft.com/office/powerpoint/2010/main" spd="slow" p14:dur="700">
+        <p:fade/>
+      </p:transition>
+    </mc:Fallback>
+  </mc:AlternateContent>
 </p:sld>
 </file>
 
@@ -22563,11 +27074,111 @@
           </a:p>
         </p:txBody>
       </p:sp>
+      <p:sp>
+        <p:nvSpPr>
+          <p:cNvPr id="9" name="Rectangle 8"/>
+          <p:cNvSpPr/>
+          <p:nvPr/>
+        </p:nvSpPr>
+        <p:spPr>
+          <a:xfrm>
+            <a:off x="777240" y="6601968"/>
+            <a:ext cx="10637215" cy="13716"/>
+          </a:xfrm>
+          <a:prstGeom prst="rect">
+            <a:avLst/>
+          </a:prstGeom>
+          <a:solidFill>
+            <a:srgbClr val="DFE1DE"/>
+          </a:solidFill>
+          <a:ln>
+            <a:noFill/>
+          </a:ln>
+          <a:effectLst/>
+        </p:spPr>
+        <p:style>
+          <a:lnRef idx="1">
+            <a:schemeClr val="accent1"/>
+          </a:lnRef>
+          <a:fillRef idx="3">
+            <a:schemeClr val="accent1"/>
+          </a:fillRef>
+          <a:effectRef idx="2">
+            <a:schemeClr val="accent1"/>
+          </a:effectRef>
+          <a:fontRef idx="minor">
+            <a:schemeClr val="lt1"/>
+          </a:fontRef>
+        </p:style>
+        <p:txBody>
+          <a:bodyPr rtlCol="0" anchor="ctr" wrap="square"/>
+          <a:lstStyle/>
+          <a:p>
+            <a:pPr algn="ctr"/>
+          </a:p>
+        </p:txBody>
+      </p:sp>
+      <p:sp>
+        <p:nvSpPr>
+          <p:cNvPr id="10" name="Rectangle 9"/>
+          <p:cNvSpPr/>
+          <p:nvPr/>
+        </p:nvSpPr>
+        <p:spPr>
+          <a:xfrm>
+            <a:off x="777240" y="6601968"/>
+            <a:ext cx="10637215" cy="13716"/>
+          </a:xfrm>
+          <a:prstGeom prst="rect">
+            <a:avLst/>
+          </a:prstGeom>
+          <a:solidFill>
+            <a:srgbClr val="0278E4"/>
+          </a:solidFill>
+          <a:ln>
+            <a:noFill/>
+          </a:ln>
+          <a:effectLst/>
+        </p:spPr>
+        <p:style>
+          <a:lnRef idx="1">
+            <a:schemeClr val="accent1"/>
+          </a:lnRef>
+          <a:fillRef idx="3">
+            <a:schemeClr val="accent1"/>
+          </a:fillRef>
+          <a:effectRef idx="2">
+            <a:schemeClr val="accent1"/>
+          </a:effectRef>
+          <a:fontRef idx="minor">
+            <a:schemeClr val="lt1"/>
+          </a:fontRef>
+        </p:style>
+        <p:txBody>
+          <a:bodyPr rtlCol="0" anchor="ctr" wrap="square"/>
+          <a:lstStyle/>
+          <a:p>
+            <a:pPr algn="ctr"/>
+          </a:p>
+        </p:txBody>
+      </p:sp>
     </p:spTree>
   </p:cSld>
   <p:clrMapOvr>
     <a:masterClrMapping/>
   </p:clrMapOvr>
+  <mc:AlternateContent xmlns:mc="http://schemas.openxmlformats.org/markup-compatibility/2006">
+    <mc:Choice xmlns:p159="http://schemas.microsoft.com/office/powerpoint/2015/09/main" Requires="p159">
+      <p:transition xmlns:p14="http://schemas.microsoft.com/office/powerpoint/2010/main" spd="slow" p14:dur="700">
+        <p159:morph option="byObject"/>
+      </p:transition>
+    </mc:Choice>
+    <mc:Fallback>
+      <p:transition xmlns:p14="http://schemas.microsoft.com/office/powerpoint/2010/main" spd="slow" p14:dur="700">
+        <p:fade/>
+      </p:transition>
+    </mc:Fallback>
+  </mc:AlternateContent>
 </p:sld>
 </file>
 
@@ -22840,11 +27451,111 @@
           </a:p>
         </p:txBody>
       </p:sp>
+      <p:sp>
+        <p:nvSpPr>
+          <p:cNvPr id="9" name="Rectangle 8"/>
+          <p:cNvSpPr/>
+          <p:nvPr/>
+        </p:nvSpPr>
+        <p:spPr>
+          <a:xfrm>
+            <a:off x="777240" y="6601968"/>
+            <a:ext cx="10637215" cy="13716"/>
+          </a:xfrm>
+          <a:prstGeom prst="rect">
+            <a:avLst/>
+          </a:prstGeom>
+          <a:solidFill>
+            <a:srgbClr val="DFE1DE"/>
+          </a:solidFill>
+          <a:ln>
+            <a:noFill/>
+          </a:ln>
+          <a:effectLst/>
+        </p:spPr>
+        <p:style>
+          <a:lnRef idx="1">
+            <a:schemeClr val="accent1"/>
+          </a:lnRef>
+          <a:fillRef idx="3">
+            <a:schemeClr val="accent1"/>
+          </a:fillRef>
+          <a:effectRef idx="2">
+            <a:schemeClr val="accent1"/>
+          </a:effectRef>
+          <a:fontRef idx="minor">
+            <a:schemeClr val="lt1"/>
+          </a:fontRef>
+        </p:style>
+        <p:txBody>
+          <a:bodyPr rtlCol="0" anchor="ctr" wrap="square"/>
+          <a:lstStyle/>
+          <a:p>
+            <a:pPr algn="ctr"/>
+          </a:p>
+        </p:txBody>
+      </p:sp>
+      <p:sp>
+        <p:nvSpPr>
+          <p:cNvPr id="10" name="Rectangle 9"/>
+          <p:cNvSpPr/>
+          <p:nvPr/>
+        </p:nvSpPr>
+        <p:spPr>
+          <a:xfrm>
+            <a:off x="777240" y="6601968"/>
+            <a:ext cx="10637215" cy="13716"/>
+          </a:xfrm>
+          <a:prstGeom prst="rect">
+            <a:avLst/>
+          </a:prstGeom>
+          <a:solidFill>
+            <a:srgbClr val="0278E4"/>
+          </a:solidFill>
+          <a:ln>
+            <a:noFill/>
+          </a:ln>
+          <a:effectLst/>
+        </p:spPr>
+        <p:style>
+          <a:lnRef idx="1">
+            <a:schemeClr val="accent1"/>
+          </a:lnRef>
+          <a:fillRef idx="3">
+            <a:schemeClr val="accent1"/>
+          </a:fillRef>
+          <a:effectRef idx="2">
+            <a:schemeClr val="accent1"/>
+          </a:effectRef>
+          <a:fontRef idx="minor">
+            <a:schemeClr val="lt1"/>
+          </a:fontRef>
+        </p:style>
+        <p:txBody>
+          <a:bodyPr rtlCol="0" anchor="ctr" wrap="square"/>
+          <a:lstStyle/>
+          <a:p>
+            <a:pPr algn="ctr"/>
+          </a:p>
+        </p:txBody>
+      </p:sp>
     </p:spTree>
   </p:cSld>
   <p:clrMapOvr>
     <a:masterClrMapping/>
   </p:clrMapOvr>
+  <mc:AlternateContent xmlns:mc="http://schemas.openxmlformats.org/markup-compatibility/2006">
+    <mc:Choice xmlns:p159="http://schemas.microsoft.com/office/powerpoint/2015/09/main" Requires="p159">
+      <p:transition xmlns:p14="http://schemas.microsoft.com/office/powerpoint/2010/main" spd="slow" p14:dur="700">
+        <p159:morph option="byObject"/>
+      </p:transition>
+    </mc:Choice>
+    <mc:Fallback>
+      <p:transition xmlns:p14="http://schemas.microsoft.com/office/powerpoint/2010/main" spd="slow" p14:dur="700">
+        <p:fade/>
+      </p:transition>
+    </mc:Fallback>
+  </mc:AlternateContent>
 </p:sld>
 </file>
 
@@ -23117,11 +27828,111 @@
           </a:p>
         </p:txBody>
       </p:sp>
+      <p:sp>
+        <p:nvSpPr>
+          <p:cNvPr id="9" name="Rectangle 8"/>
+          <p:cNvSpPr/>
+          <p:nvPr/>
+        </p:nvSpPr>
+        <p:spPr>
+          <a:xfrm>
+            <a:off x="777240" y="6601968"/>
+            <a:ext cx="10637215" cy="13716"/>
+          </a:xfrm>
+          <a:prstGeom prst="rect">
+            <a:avLst/>
+          </a:prstGeom>
+          <a:solidFill>
+            <a:srgbClr val="DFE1DE"/>
+          </a:solidFill>
+          <a:ln>
+            <a:noFill/>
+          </a:ln>
+          <a:effectLst/>
+        </p:spPr>
+        <p:style>
+          <a:lnRef idx="1">
+            <a:schemeClr val="accent1"/>
+          </a:lnRef>
+          <a:fillRef idx="3">
+            <a:schemeClr val="accent1"/>
+          </a:fillRef>
+          <a:effectRef idx="2">
+            <a:schemeClr val="accent1"/>
+          </a:effectRef>
+          <a:fontRef idx="minor">
+            <a:schemeClr val="lt1"/>
+          </a:fontRef>
+        </p:style>
+        <p:txBody>
+          <a:bodyPr rtlCol="0" anchor="ctr" wrap="square"/>
+          <a:lstStyle/>
+          <a:p>
+            <a:pPr algn="ctr"/>
+          </a:p>
+        </p:txBody>
+      </p:sp>
+      <p:sp>
+        <p:nvSpPr>
+          <p:cNvPr id="10" name="Rectangle 9"/>
+          <p:cNvSpPr/>
+          <p:nvPr/>
+        </p:nvSpPr>
+        <p:spPr>
+          <a:xfrm>
+            <a:off x="777240" y="6601968"/>
+            <a:ext cx="10637215" cy="13716"/>
+          </a:xfrm>
+          <a:prstGeom prst="rect">
+            <a:avLst/>
+          </a:prstGeom>
+          <a:solidFill>
+            <a:srgbClr val="0278E4"/>
+          </a:solidFill>
+          <a:ln>
+            <a:noFill/>
+          </a:ln>
+          <a:effectLst/>
+        </p:spPr>
+        <p:style>
+          <a:lnRef idx="1">
+            <a:schemeClr val="accent1"/>
+          </a:lnRef>
+          <a:fillRef idx="3">
+            <a:schemeClr val="accent1"/>
+          </a:fillRef>
+          <a:effectRef idx="2">
+            <a:schemeClr val="accent1"/>
+          </a:effectRef>
+          <a:fontRef idx="minor">
+            <a:schemeClr val="lt1"/>
+          </a:fontRef>
+        </p:style>
+        <p:txBody>
+          <a:bodyPr rtlCol="0" anchor="ctr" wrap="square"/>
+          <a:lstStyle/>
+          <a:p>
+            <a:pPr algn="ctr"/>
+          </a:p>
+        </p:txBody>
+      </p:sp>
     </p:spTree>
   </p:cSld>
   <p:clrMapOvr>
     <a:masterClrMapping/>
   </p:clrMapOvr>
+  <mc:AlternateContent xmlns:mc="http://schemas.openxmlformats.org/markup-compatibility/2006">
+    <mc:Choice xmlns:p159="http://schemas.microsoft.com/office/powerpoint/2015/09/main" Requires="p159">
+      <p:transition xmlns:p14="http://schemas.microsoft.com/office/powerpoint/2010/main" spd="slow" p14:dur="700">
+        <p159:morph option="byObject"/>
+      </p:transition>
+    </mc:Choice>
+    <mc:Fallback>
+      <p:transition xmlns:p14="http://schemas.microsoft.com/office/powerpoint/2010/main" spd="slow" p14:dur="700">
+        <p:fade/>
+      </p:transition>
+    </mc:Fallback>
+  </mc:AlternateContent>
 </p:sld>
 </file>
 
@@ -23578,11 +28389,111 @@
           </a:p>
         </p:txBody>
       </p:sp>
+      <p:sp>
+        <p:nvSpPr>
+          <p:cNvPr id="10" name="Rectangle 9"/>
+          <p:cNvSpPr/>
+          <p:nvPr/>
+        </p:nvSpPr>
+        <p:spPr>
+          <a:xfrm>
+            <a:off x="777240" y="6601968"/>
+            <a:ext cx="10637215" cy="13716"/>
+          </a:xfrm>
+          <a:prstGeom prst="rect">
+            <a:avLst/>
+          </a:prstGeom>
+          <a:solidFill>
+            <a:srgbClr val="DFE1DE"/>
+          </a:solidFill>
+          <a:ln>
+            <a:noFill/>
+          </a:ln>
+          <a:effectLst/>
+        </p:spPr>
+        <p:style>
+          <a:lnRef idx="1">
+            <a:schemeClr val="accent1"/>
+          </a:lnRef>
+          <a:fillRef idx="3">
+            <a:schemeClr val="accent1"/>
+          </a:fillRef>
+          <a:effectRef idx="2">
+            <a:schemeClr val="accent1"/>
+          </a:effectRef>
+          <a:fontRef idx="minor">
+            <a:schemeClr val="lt1"/>
+          </a:fontRef>
+        </p:style>
+        <p:txBody>
+          <a:bodyPr rtlCol="0" anchor="ctr" wrap="square"/>
+          <a:lstStyle/>
+          <a:p>
+            <a:pPr algn="ctr"/>
+          </a:p>
+        </p:txBody>
+      </p:sp>
+      <p:sp>
+        <p:nvSpPr>
+          <p:cNvPr id="11" name="Rectangle 10"/>
+          <p:cNvSpPr/>
+          <p:nvPr/>
+        </p:nvSpPr>
+        <p:spPr>
+          <a:xfrm>
+            <a:off x="777240" y="6601968"/>
+            <a:ext cx="1772869" cy="13716"/>
+          </a:xfrm>
+          <a:prstGeom prst="rect">
+            <a:avLst/>
+          </a:prstGeom>
+          <a:solidFill>
+            <a:srgbClr val="0278E4"/>
+          </a:solidFill>
+          <a:ln>
+            <a:noFill/>
+          </a:ln>
+          <a:effectLst/>
+        </p:spPr>
+        <p:style>
+          <a:lnRef idx="1">
+            <a:schemeClr val="accent1"/>
+          </a:lnRef>
+          <a:fillRef idx="3">
+            <a:schemeClr val="accent1"/>
+          </a:fillRef>
+          <a:effectRef idx="2">
+            <a:schemeClr val="accent1"/>
+          </a:effectRef>
+          <a:fontRef idx="minor">
+            <a:schemeClr val="lt1"/>
+          </a:fontRef>
+        </p:style>
+        <p:txBody>
+          <a:bodyPr rtlCol="0" anchor="ctr" wrap="square"/>
+          <a:lstStyle/>
+          <a:p>
+            <a:pPr algn="ctr"/>
+          </a:p>
+        </p:txBody>
+      </p:sp>
     </p:spTree>
   </p:cSld>
   <p:clrMapOvr>
     <a:masterClrMapping/>
   </p:clrMapOvr>
+  <mc:AlternateContent xmlns:mc="http://schemas.openxmlformats.org/markup-compatibility/2006">
+    <mc:Choice xmlns:p159="http://schemas.microsoft.com/office/powerpoint/2015/09/main" Requires="p159">
+      <p:transition xmlns:p14="http://schemas.microsoft.com/office/powerpoint/2010/main" spd="slow" p14:dur="700">
+        <p159:morph option="byObject"/>
+      </p:transition>
+    </mc:Choice>
+    <mc:Fallback>
+      <p:transition xmlns:p14="http://schemas.microsoft.com/office/powerpoint/2010/main" spd="slow" p14:dur="700">
+        <p:fade/>
+      </p:transition>
+    </mc:Fallback>
+  </mc:AlternateContent>
 </p:sld>
 </file>
 
@@ -24427,11 +29338,111 @@
           </a:p>
         </p:txBody>
       </p:sp>
+      <p:sp>
+        <p:nvSpPr>
+          <p:cNvPr id="23" name="Rectangle 22"/>
+          <p:cNvSpPr/>
+          <p:nvPr/>
+        </p:nvSpPr>
+        <p:spPr>
+          <a:xfrm>
+            <a:off x="777240" y="6601968"/>
+            <a:ext cx="10637215" cy="13716"/>
+          </a:xfrm>
+          <a:prstGeom prst="rect">
+            <a:avLst/>
+          </a:prstGeom>
+          <a:solidFill>
+            <a:srgbClr val="DFE1DE"/>
+          </a:solidFill>
+          <a:ln>
+            <a:noFill/>
+          </a:ln>
+          <a:effectLst/>
+        </p:spPr>
+        <p:style>
+          <a:lnRef idx="1">
+            <a:schemeClr val="accent1"/>
+          </a:lnRef>
+          <a:fillRef idx="3">
+            <a:schemeClr val="accent1"/>
+          </a:fillRef>
+          <a:effectRef idx="2">
+            <a:schemeClr val="accent1"/>
+          </a:effectRef>
+          <a:fontRef idx="minor">
+            <a:schemeClr val="lt1"/>
+          </a:fontRef>
+        </p:style>
+        <p:txBody>
+          <a:bodyPr rtlCol="0" anchor="ctr" wrap="square"/>
+          <a:lstStyle/>
+          <a:p>
+            <a:pPr algn="ctr"/>
+          </a:p>
+        </p:txBody>
+      </p:sp>
+      <p:sp>
+        <p:nvSpPr>
+          <p:cNvPr id="24" name="Rectangle 23"/>
+          <p:cNvSpPr/>
+          <p:nvPr/>
+        </p:nvSpPr>
+        <p:spPr>
+          <a:xfrm>
+            <a:off x="777240" y="6601968"/>
+            <a:ext cx="2216086" cy="13716"/>
+          </a:xfrm>
+          <a:prstGeom prst="rect">
+            <a:avLst/>
+          </a:prstGeom>
+          <a:solidFill>
+            <a:srgbClr val="0278E4"/>
+          </a:solidFill>
+          <a:ln>
+            <a:noFill/>
+          </a:ln>
+          <a:effectLst/>
+        </p:spPr>
+        <p:style>
+          <a:lnRef idx="1">
+            <a:schemeClr val="accent1"/>
+          </a:lnRef>
+          <a:fillRef idx="3">
+            <a:schemeClr val="accent1"/>
+          </a:fillRef>
+          <a:effectRef idx="2">
+            <a:schemeClr val="accent1"/>
+          </a:effectRef>
+          <a:fontRef idx="minor">
+            <a:schemeClr val="lt1"/>
+          </a:fontRef>
+        </p:style>
+        <p:txBody>
+          <a:bodyPr rtlCol="0" anchor="ctr" wrap="square"/>
+          <a:lstStyle/>
+          <a:p>
+            <a:pPr algn="ctr"/>
+          </a:p>
+        </p:txBody>
+      </p:sp>
     </p:spTree>
   </p:cSld>
   <p:clrMapOvr>
     <a:masterClrMapping/>
   </p:clrMapOvr>
+  <mc:AlternateContent xmlns:mc="http://schemas.openxmlformats.org/markup-compatibility/2006">
+    <mc:Choice xmlns:p159="http://schemas.microsoft.com/office/powerpoint/2015/09/main" Requires="p159">
+      <p:transition xmlns:p14="http://schemas.microsoft.com/office/powerpoint/2010/main" spd="slow" p14:dur="700">
+        <p159:morph option="byObject"/>
+      </p:transition>
+    </mc:Choice>
+    <mc:Fallback>
+      <p:transition xmlns:p14="http://schemas.microsoft.com/office/powerpoint/2010/main" spd="slow" p14:dur="700">
+        <p:fade/>
+      </p:transition>
+    </mc:Fallback>
+  </mc:AlternateContent>
 </p:sld>
 </file>
 
@@ -25137,11 +30148,111 @@
           </a:p>
         </p:txBody>
       </p:sp>
+      <p:sp>
+        <p:nvSpPr>
+          <p:cNvPr id="13" name="Rectangle 12"/>
+          <p:cNvSpPr/>
+          <p:nvPr/>
+        </p:nvSpPr>
+        <p:spPr>
+          <a:xfrm>
+            <a:off x="777240" y="6601968"/>
+            <a:ext cx="10637215" cy="13716"/>
+          </a:xfrm>
+          <a:prstGeom prst="rect">
+            <a:avLst/>
+          </a:prstGeom>
+          <a:solidFill>
+            <a:srgbClr val="DFE1DE"/>
+          </a:solidFill>
+          <a:ln>
+            <a:noFill/>
+          </a:ln>
+          <a:effectLst/>
+        </p:spPr>
+        <p:style>
+          <a:lnRef idx="1">
+            <a:schemeClr val="accent1"/>
+          </a:lnRef>
+          <a:fillRef idx="3">
+            <a:schemeClr val="accent1"/>
+          </a:fillRef>
+          <a:effectRef idx="2">
+            <a:schemeClr val="accent1"/>
+          </a:effectRef>
+          <a:fontRef idx="minor">
+            <a:schemeClr val="lt1"/>
+          </a:fontRef>
+        </p:style>
+        <p:txBody>
+          <a:bodyPr rtlCol="0" anchor="ctr" wrap="square"/>
+          <a:lstStyle/>
+          <a:p>
+            <a:pPr algn="ctr"/>
+          </a:p>
+        </p:txBody>
+      </p:sp>
+      <p:sp>
+        <p:nvSpPr>
+          <p:cNvPr id="14" name="Rectangle 13"/>
+          <p:cNvSpPr/>
+          <p:nvPr/>
+        </p:nvSpPr>
+        <p:spPr>
+          <a:xfrm>
+            <a:off x="777240" y="6601968"/>
+            <a:ext cx="2659303" cy="13716"/>
+          </a:xfrm>
+          <a:prstGeom prst="rect">
+            <a:avLst/>
+          </a:prstGeom>
+          <a:solidFill>
+            <a:srgbClr val="0278E4"/>
+          </a:solidFill>
+          <a:ln>
+            <a:noFill/>
+          </a:ln>
+          <a:effectLst/>
+        </p:spPr>
+        <p:style>
+          <a:lnRef idx="1">
+            <a:schemeClr val="accent1"/>
+          </a:lnRef>
+          <a:fillRef idx="3">
+            <a:schemeClr val="accent1"/>
+          </a:fillRef>
+          <a:effectRef idx="2">
+            <a:schemeClr val="accent1"/>
+          </a:effectRef>
+          <a:fontRef idx="minor">
+            <a:schemeClr val="lt1"/>
+          </a:fontRef>
+        </p:style>
+        <p:txBody>
+          <a:bodyPr rtlCol="0" anchor="ctr" wrap="square"/>
+          <a:lstStyle/>
+          <a:p>
+            <a:pPr algn="ctr"/>
+          </a:p>
+        </p:txBody>
+      </p:sp>
     </p:spTree>
   </p:cSld>
   <p:clrMapOvr>
     <a:masterClrMapping/>
   </p:clrMapOvr>
+  <mc:AlternateContent xmlns:mc="http://schemas.openxmlformats.org/markup-compatibility/2006">
+    <mc:Choice xmlns:p159="http://schemas.microsoft.com/office/powerpoint/2015/09/main" Requires="p159">
+      <p:transition xmlns:p14="http://schemas.microsoft.com/office/powerpoint/2010/main" spd="slow" p14:dur="700">
+        <p159:morph option="byObject"/>
+      </p:transition>
+    </mc:Choice>
+    <mc:Fallback>
+      <p:transition xmlns:p14="http://schemas.microsoft.com/office/powerpoint/2010/main" spd="slow" p14:dur="700">
+        <p:fade/>
+      </p:transition>
+    </mc:Fallback>
+  </mc:AlternateContent>
 </p:sld>
 </file>
 
@@ -26022,11 +31133,111 @@
           </a:p>
         </p:txBody>
       </p:sp>
+      <p:sp>
+        <p:nvSpPr>
+          <p:cNvPr id="10" name="Rectangle 9"/>
+          <p:cNvSpPr/>
+          <p:nvPr/>
+        </p:nvSpPr>
+        <p:spPr>
+          <a:xfrm>
+            <a:off x="777240" y="6601968"/>
+            <a:ext cx="10637215" cy="13716"/>
+          </a:xfrm>
+          <a:prstGeom prst="rect">
+            <a:avLst/>
+          </a:prstGeom>
+          <a:solidFill>
+            <a:srgbClr val="DFE1DE"/>
+          </a:solidFill>
+          <a:ln>
+            <a:noFill/>
+          </a:ln>
+          <a:effectLst/>
+        </p:spPr>
+        <p:style>
+          <a:lnRef idx="1">
+            <a:schemeClr val="accent1"/>
+          </a:lnRef>
+          <a:fillRef idx="3">
+            <a:schemeClr val="accent1"/>
+          </a:fillRef>
+          <a:effectRef idx="2">
+            <a:schemeClr val="accent1"/>
+          </a:effectRef>
+          <a:fontRef idx="minor">
+            <a:schemeClr val="lt1"/>
+          </a:fontRef>
+        </p:style>
+        <p:txBody>
+          <a:bodyPr rtlCol="0" anchor="ctr" wrap="square"/>
+          <a:lstStyle/>
+          <a:p>
+            <a:pPr algn="ctr"/>
+          </a:p>
+        </p:txBody>
+      </p:sp>
+      <p:sp>
+        <p:nvSpPr>
+          <p:cNvPr id="11" name="Rectangle 10"/>
+          <p:cNvSpPr/>
+          <p:nvPr/>
+        </p:nvSpPr>
+        <p:spPr>
+          <a:xfrm>
+            <a:off x="777240" y="6601968"/>
+            <a:ext cx="3102521" cy="13716"/>
+          </a:xfrm>
+          <a:prstGeom prst="rect">
+            <a:avLst/>
+          </a:prstGeom>
+          <a:solidFill>
+            <a:srgbClr val="0278E4"/>
+          </a:solidFill>
+          <a:ln>
+            <a:noFill/>
+          </a:ln>
+          <a:effectLst/>
+        </p:spPr>
+        <p:style>
+          <a:lnRef idx="1">
+            <a:schemeClr val="accent1"/>
+          </a:lnRef>
+          <a:fillRef idx="3">
+            <a:schemeClr val="accent1"/>
+          </a:fillRef>
+          <a:effectRef idx="2">
+            <a:schemeClr val="accent1"/>
+          </a:effectRef>
+          <a:fontRef idx="minor">
+            <a:schemeClr val="lt1"/>
+          </a:fontRef>
+        </p:style>
+        <p:txBody>
+          <a:bodyPr rtlCol="0" anchor="ctr" wrap="square"/>
+          <a:lstStyle/>
+          <a:p>
+            <a:pPr algn="ctr"/>
+          </a:p>
+        </p:txBody>
+      </p:sp>
     </p:spTree>
   </p:cSld>
   <p:clrMapOvr>
     <a:masterClrMapping/>
   </p:clrMapOvr>
+  <mc:AlternateContent xmlns:mc="http://schemas.openxmlformats.org/markup-compatibility/2006">
+    <mc:Choice xmlns:p159="http://schemas.microsoft.com/office/powerpoint/2015/09/main" Requires="p159">
+      <p:transition xmlns:p14="http://schemas.microsoft.com/office/powerpoint/2010/main" spd="slow" p14:dur="700">
+        <p159:morph option="byObject"/>
+      </p:transition>
+    </mc:Choice>
+    <mc:Fallback>
+      <p:transition xmlns:p14="http://schemas.microsoft.com/office/powerpoint/2010/main" spd="slow" p14:dur="700">
+        <p:fade/>
+      </p:transition>
+    </mc:Fallback>
+  </mc:AlternateContent>
 </p:sld>
 </file>
 
@@ -26499,11 +31710,111 @@
           </a:p>
         </p:txBody>
       </p:sp>
+      <p:sp>
+        <p:nvSpPr>
+          <p:cNvPr id="11" name="Rectangle 10"/>
+          <p:cNvSpPr/>
+          <p:nvPr/>
+        </p:nvSpPr>
+        <p:spPr>
+          <a:xfrm>
+            <a:off x="777240" y="6601968"/>
+            <a:ext cx="10637215" cy="13716"/>
+          </a:xfrm>
+          <a:prstGeom prst="rect">
+            <a:avLst/>
+          </a:prstGeom>
+          <a:solidFill>
+            <a:srgbClr val="DFE1DE"/>
+          </a:solidFill>
+          <a:ln>
+            <a:noFill/>
+          </a:ln>
+          <a:effectLst/>
+        </p:spPr>
+        <p:style>
+          <a:lnRef idx="1">
+            <a:schemeClr val="accent1"/>
+          </a:lnRef>
+          <a:fillRef idx="3">
+            <a:schemeClr val="accent1"/>
+          </a:fillRef>
+          <a:effectRef idx="2">
+            <a:schemeClr val="accent1"/>
+          </a:effectRef>
+          <a:fontRef idx="minor">
+            <a:schemeClr val="lt1"/>
+          </a:fontRef>
+        </p:style>
+        <p:txBody>
+          <a:bodyPr rtlCol="0" anchor="ctr" wrap="square"/>
+          <a:lstStyle/>
+          <a:p>
+            <a:pPr algn="ctr"/>
+          </a:p>
+        </p:txBody>
+      </p:sp>
+      <p:sp>
+        <p:nvSpPr>
+          <p:cNvPr id="12" name="Rectangle 11"/>
+          <p:cNvSpPr/>
+          <p:nvPr/>
+        </p:nvSpPr>
+        <p:spPr>
+          <a:xfrm>
+            <a:off x="777240" y="6601968"/>
+            <a:ext cx="3545738" cy="13716"/>
+          </a:xfrm>
+          <a:prstGeom prst="rect">
+            <a:avLst/>
+          </a:prstGeom>
+          <a:solidFill>
+            <a:srgbClr val="0278E4"/>
+          </a:solidFill>
+          <a:ln>
+            <a:noFill/>
+          </a:ln>
+          <a:effectLst/>
+        </p:spPr>
+        <p:style>
+          <a:lnRef idx="1">
+            <a:schemeClr val="accent1"/>
+          </a:lnRef>
+          <a:fillRef idx="3">
+            <a:schemeClr val="accent1"/>
+          </a:fillRef>
+          <a:effectRef idx="2">
+            <a:schemeClr val="accent1"/>
+          </a:effectRef>
+          <a:fontRef idx="minor">
+            <a:schemeClr val="lt1"/>
+          </a:fontRef>
+        </p:style>
+        <p:txBody>
+          <a:bodyPr rtlCol="0" anchor="ctr" wrap="square"/>
+          <a:lstStyle/>
+          <a:p>
+            <a:pPr algn="ctr"/>
+          </a:p>
+        </p:txBody>
+      </p:sp>
     </p:spTree>
   </p:cSld>
   <p:clrMapOvr>
     <a:masterClrMapping/>
   </p:clrMapOvr>
+  <mc:AlternateContent xmlns:mc="http://schemas.openxmlformats.org/markup-compatibility/2006">
+    <mc:Choice xmlns:p159="http://schemas.microsoft.com/office/powerpoint/2015/09/main" Requires="p159">
+      <p:transition xmlns:p14="http://schemas.microsoft.com/office/powerpoint/2010/main" spd="slow" p14:dur="700">
+        <p159:morph option="byObject"/>
+      </p:transition>
+    </mc:Choice>
+    <mc:Fallback>
+      <p:transition xmlns:p14="http://schemas.microsoft.com/office/powerpoint/2010/main" spd="slow" p14:dur="700">
+        <p:fade/>
+      </p:transition>
+    </mc:Fallback>
+  </mc:AlternateContent>
 </p:sld>
 </file>
 
@@ -27434,11 +32745,111 @@
           </a:p>
         </p:txBody>
       </p:sp>
+      <p:sp>
+        <p:nvSpPr>
+          <p:cNvPr id="13" name="Rectangle 12"/>
+          <p:cNvSpPr/>
+          <p:nvPr/>
+        </p:nvSpPr>
+        <p:spPr>
+          <a:xfrm>
+            <a:off x="777240" y="6601968"/>
+            <a:ext cx="10637215" cy="13716"/>
+          </a:xfrm>
+          <a:prstGeom prst="rect">
+            <a:avLst/>
+          </a:prstGeom>
+          <a:solidFill>
+            <a:srgbClr val="DFE1DE"/>
+          </a:solidFill>
+          <a:ln>
+            <a:noFill/>
+          </a:ln>
+          <a:effectLst/>
+        </p:spPr>
+        <p:style>
+          <a:lnRef idx="1">
+            <a:schemeClr val="accent1"/>
+          </a:lnRef>
+          <a:fillRef idx="3">
+            <a:schemeClr val="accent1"/>
+          </a:fillRef>
+          <a:effectRef idx="2">
+            <a:schemeClr val="accent1"/>
+          </a:effectRef>
+          <a:fontRef idx="minor">
+            <a:schemeClr val="lt1"/>
+          </a:fontRef>
+        </p:style>
+        <p:txBody>
+          <a:bodyPr rtlCol="0" anchor="ctr" wrap="square"/>
+          <a:lstStyle/>
+          <a:p>
+            <a:pPr algn="ctr"/>
+          </a:p>
+        </p:txBody>
+      </p:sp>
+      <p:sp>
+        <p:nvSpPr>
+          <p:cNvPr id="14" name="Rectangle 13"/>
+          <p:cNvSpPr/>
+          <p:nvPr/>
+        </p:nvSpPr>
+        <p:spPr>
+          <a:xfrm>
+            <a:off x="777240" y="6601968"/>
+            <a:ext cx="3988955" cy="13716"/>
+          </a:xfrm>
+          <a:prstGeom prst="rect">
+            <a:avLst/>
+          </a:prstGeom>
+          <a:solidFill>
+            <a:srgbClr val="0278E4"/>
+          </a:solidFill>
+          <a:ln>
+            <a:noFill/>
+          </a:ln>
+          <a:effectLst/>
+        </p:spPr>
+        <p:style>
+          <a:lnRef idx="1">
+            <a:schemeClr val="accent1"/>
+          </a:lnRef>
+          <a:fillRef idx="3">
+            <a:schemeClr val="accent1"/>
+          </a:fillRef>
+          <a:effectRef idx="2">
+            <a:schemeClr val="accent1"/>
+          </a:effectRef>
+          <a:fontRef idx="minor">
+            <a:schemeClr val="lt1"/>
+          </a:fontRef>
+        </p:style>
+        <p:txBody>
+          <a:bodyPr rtlCol="0" anchor="ctr" wrap="square"/>
+          <a:lstStyle/>
+          <a:p>
+            <a:pPr algn="ctr"/>
+          </a:p>
+        </p:txBody>
+      </p:sp>
     </p:spTree>
   </p:cSld>
   <p:clrMapOvr>
     <a:masterClrMapping/>
   </p:clrMapOvr>
+  <mc:AlternateContent xmlns:mc="http://schemas.openxmlformats.org/markup-compatibility/2006">
+    <mc:Choice xmlns:p159="http://schemas.microsoft.com/office/powerpoint/2015/09/main" Requires="p159">
+      <p:transition xmlns:p14="http://schemas.microsoft.com/office/powerpoint/2010/main" spd="slow" p14:dur="700">
+        <p159:morph option="byObject"/>
+      </p:transition>
+    </mc:Choice>
+    <mc:Fallback>
+      <p:transition xmlns:p14="http://schemas.microsoft.com/office/powerpoint/2010/main" spd="slow" p14:dur="700">
+        <p:fade/>
+      </p:transition>
+    </mc:Fallback>
+  </mc:AlternateContent>
 </p:sld>
 </file>
 
@@ -27760,4 +33171,324 @@
   </a:objectDefaults>
   <a:extraClrSchemeLst/>
 </a:theme>
+</file>
+
+<file path=ppt/theme/theme2.xml><?xml version="1.0" encoding="utf-8"?>
+<a:theme xmlns:a="http://schemas.openxmlformats.org/drawingml/2006/main" name="Office Theme">
+  <a:themeElements>
+    <a:clrScheme name="Office">
+      <a:dk1>
+        <a:sysClr val="windowText" lastClr="000000"/>
+      </a:dk1>
+      <a:lt1>
+        <a:sysClr val="window" lastClr="FFFFFF"/>
+      </a:lt1>
+      <a:dk2>
+        <a:srgbClr val="1F497D"/>
+      </a:dk2>
+      <a:lt2>
+        <a:srgbClr val="EEECE1"/>
+      </a:lt2>
+      <a:accent1>
+        <a:srgbClr val="4F81BD"/>
+      </a:accent1>
+      <a:accent2>
+        <a:srgbClr val="C0504D"/>
+      </a:accent2>
+      <a:accent3>
+        <a:srgbClr val="9BBB59"/>
+      </a:accent3>
+      <a:accent4>
+        <a:srgbClr val="8064A2"/>
+      </a:accent4>
+      <a:accent5>
+        <a:srgbClr val="4BACC6"/>
+      </a:accent5>
+      <a:accent6>
+        <a:srgbClr val="F79646"/>
+      </a:accent6>
+      <a:hlink>
+        <a:srgbClr val="0000FF"/>
+      </a:hlink>
+      <a:folHlink>
+        <a:srgbClr val="800080"/>
+      </a:folHlink>
+    </a:clrScheme>
+    <a:fontScheme name="Office">
+      <a:majorFont>
+        <a:latin typeface="Calibri"/>
+        <a:ea typeface=""/>
+        <a:cs typeface=""/>
+        <a:font script="Jpan" typeface="ＭＳ Ｐゴシック"/>
+        <a:font script="Hang" typeface="맑은 고딕"/>
+        <a:font script="Hans" typeface="宋体"/>
+        <a:font script="Hant" typeface="新細明體"/>
+        <a:font script="Arab" typeface="Times New Roman"/>
+        <a:font script="Hebr" typeface="Times New Roman"/>
+        <a:font script="Thai" typeface="Angsana New"/>
+        <a:font script="Ethi" typeface="Nyala"/>
+        <a:font script="Beng" typeface="Vrinda"/>
+        <a:font script="Gujr" typeface="Shruti"/>
+        <a:font script="Khmr" typeface="MoolBoran"/>
+        <a:font script="Knda" typeface="Tunga"/>
+        <a:font script="Guru" typeface="Raavi"/>
+        <a:font script="Cans" typeface="Euphemia"/>
+        <a:font script="Cher" typeface="Plantagenet Cherokee"/>
+        <a:font script="Yiii" typeface="Microsoft Yi Baiti"/>
+        <a:font script="Tibt" typeface="Microsoft Himalaya"/>
+        <a:font script="Thaa" typeface="MV Boli"/>
+        <a:font script="Deva" typeface="Mangal"/>
+        <a:font script="Telu" typeface="Gautami"/>
+        <a:font script="Taml" typeface="Latha"/>
+        <a:font script="Syrc" typeface="Estrangelo Edessa"/>
+        <a:font script="Orya" typeface="Kalinga"/>
+        <a:font script="Mlym" typeface="Kartika"/>
+        <a:font script="Laoo" typeface="DokChampa"/>
+        <a:font script="Sinh" typeface="Iskoola Pota"/>
+        <a:font script="Mong" typeface="Mongolian Baiti"/>
+        <a:font script="Viet" typeface="Times New Roman"/>
+        <a:font script="Uigh" typeface="Microsoft Uighur"/>
+        <a:font script="Geor" typeface="Sylfaen"/>
+      </a:majorFont>
+      <a:minorFont>
+        <a:latin typeface="Calibri"/>
+        <a:ea typeface=""/>
+        <a:cs typeface=""/>
+        <a:font script="Jpan" typeface="ＭＳ Ｐゴシック"/>
+        <a:font script="Hang" typeface="맑은 고딕"/>
+        <a:font script="Hans" typeface="宋体"/>
+        <a:font script="Hant" typeface="新細明體"/>
+        <a:font script="Arab" typeface="Arial"/>
+        <a:font script="Hebr" typeface="Arial"/>
+        <a:font script="Thai" typeface="Cordia New"/>
+        <a:font script="Ethi" typeface="Nyala"/>
+        <a:font script="Beng" typeface="Vrinda"/>
+        <a:font script="Gujr" typeface="Shruti"/>
+        <a:font script="Khmr" typeface="DaunPenh"/>
+        <a:font script="Knda" typeface="Tunga"/>
+        <a:font script="Guru" typeface="Raavi"/>
+        <a:font script="Cans" typeface="Euphemia"/>
+        <a:font script="Cher" typeface="Plantagenet Cherokee"/>
+        <a:font script="Yiii" typeface="Microsoft Yi Baiti"/>
+        <a:font script="Tibt" typeface="Microsoft Himalaya"/>
+        <a:font script="Thaa" typeface="MV Boli"/>
+        <a:font script="Deva" typeface="Mangal"/>
+        <a:font script="Telu" typeface="Gautami"/>
+        <a:font script="Taml" typeface="Latha"/>
+        <a:font script="Syrc" typeface="Estrangelo Edessa"/>
+        <a:font script="Orya" typeface="Kalinga"/>
+        <a:font script="Mlym" typeface="Kartika"/>
+        <a:font script="Laoo" typeface="DokChampa"/>
+        <a:font script="Sinh" typeface="Iskoola Pota"/>
+        <a:font script="Mong" typeface="Mongolian Baiti"/>
+        <a:font script="Viet" typeface="Arial"/>
+        <a:font script="Uigh" typeface="Microsoft Uighur"/>
+        <a:font script="Geor" typeface="Sylfaen"/>
+      </a:minorFont>
+    </a:fontScheme>
+    <a:fmtScheme name="Office">
+      <a:fillStyleLst>
+        <a:solidFill>
+          <a:schemeClr val="phClr"/>
+        </a:solidFill>
+        <a:gradFill rotWithShape="1">
+          <a:gsLst>
+            <a:gs pos="0">
+              <a:schemeClr val="phClr">
+                <a:tint val="50000"/>
+                <a:satMod val="300000"/>
+              </a:schemeClr>
+            </a:gs>
+            <a:gs pos="35000">
+              <a:schemeClr val="phClr">
+                <a:tint val="37000"/>
+                <a:satMod val="300000"/>
+              </a:schemeClr>
+            </a:gs>
+            <a:gs pos="100000">
+              <a:schemeClr val="phClr">
+                <a:tint val="15000"/>
+                <a:satMod val="350000"/>
+              </a:schemeClr>
+            </a:gs>
+          </a:gsLst>
+          <a:lin ang="16200000" scaled="1"/>
+        </a:gradFill>
+        <a:gradFill rotWithShape="1">
+          <a:gsLst>
+            <a:gs pos="0">
+              <a:schemeClr val="phClr">
+                <a:tint val="100000"/>
+                <a:shade val="100000"/>
+                <a:satMod val="130000"/>
+              </a:schemeClr>
+            </a:gs>
+            <a:gs pos="100000">
+              <a:schemeClr val="phClr">
+                <a:tint val="50000"/>
+                <a:shade val="100000"/>
+                <a:satMod val="350000"/>
+              </a:schemeClr>
+            </a:gs>
+          </a:gsLst>
+          <a:lin ang="16200000" scaled="0"/>
+        </a:gradFill>
+      </a:fillStyleLst>
+      <a:lnStyleLst>
+        <a:ln w="9525" cap="flat" cmpd="sng" algn="ctr">
+          <a:solidFill>
+            <a:schemeClr val="phClr">
+              <a:shade val="95000"/>
+              <a:satMod val="105000"/>
+            </a:schemeClr>
+          </a:solidFill>
+          <a:prstDash val="solid"/>
+        </a:ln>
+        <a:ln w="25400" cap="flat" cmpd="sng" algn="ctr">
+          <a:solidFill>
+            <a:schemeClr val="phClr"/>
+          </a:solidFill>
+          <a:prstDash val="solid"/>
+        </a:ln>
+        <a:ln w="38100" cap="flat" cmpd="sng" algn="ctr">
+          <a:solidFill>
+            <a:schemeClr val="phClr"/>
+          </a:solidFill>
+          <a:prstDash val="solid"/>
+        </a:ln>
+      </a:lnStyleLst>
+      <a:effectStyleLst>
+        <a:effectStyle>
+          <a:effectLst>
+            <a:outerShdw blurRad="40000" dist="20000" dir="5400000" rotWithShape="0">
+              <a:srgbClr val="000000">
+                <a:alpha val="38000"/>
+              </a:srgbClr>
+            </a:outerShdw>
+          </a:effectLst>
+        </a:effectStyle>
+        <a:effectStyle>
+          <a:effectLst>
+            <a:outerShdw blurRad="40000" dist="23000" dir="5400000" rotWithShape="0">
+              <a:srgbClr val="000000">
+                <a:alpha val="35000"/>
+              </a:srgbClr>
+            </a:outerShdw>
+          </a:effectLst>
+        </a:effectStyle>
+        <a:effectStyle>
+          <a:effectLst>
+            <a:outerShdw blurRad="40000" dist="23000" dir="5400000" rotWithShape="0">
+              <a:srgbClr val="000000">
+                <a:alpha val="35000"/>
+              </a:srgbClr>
+            </a:outerShdw>
+          </a:effectLst>
+          <a:scene3d>
+            <a:camera prst="orthographicFront">
+              <a:rot lat="0" lon="0" rev="0"/>
+            </a:camera>
+            <a:lightRig rig="threePt" dir="t">
+              <a:rot lat="0" lon="0" rev="1200000"/>
+            </a:lightRig>
+          </a:scene3d>
+          <a:sp3d>
+            <a:bevelT w="63500" h="25400"/>
+          </a:sp3d>
+        </a:effectStyle>
+      </a:effectStyleLst>
+      <a:bgFillStyleLst>
+        <a:solidFill>
+          <a:schemeClr val="phClr"/>
+        </a:solidFill>
+        <a:gradFill rotWithShape="1">
+          <a:gsLst>
+            <a:gs pos="0">
+              <a:schemeClr val="phClr">
+                <a:tint val="40000"/>
+                <a:satMod val="350000"/>
+              </a:schemeClr>
+            </a:gs>
+            <a:gs pos="40000">
+              <a:schemeClr val="phClr">
+                <a:tint val="45000"/>
+                <a:shade val="99000"/>
+                <a:satMod val="350000"/>
+              </a:schemeClr>
+            </a:gs>
+            <a:gs pos="100000">
+              <a:schemeClr val="phClr">
+                <a:shade val="20000"/>
+                <a:satMod val="255000"/>
+              </a:schemeClr>
+            </a:gs>
+          </a:gsLst>
+          <a:path path="circle">
+            <a:fillToRect l="50000" t="-80000" r="50000" b="180000"/>
+          </a:path>
+        </a:gradFill>
+        <a:gradFill rotWithShape="1">
+          <a:gsLst>
+            <a:gs pos="0">
+              <a:schemeClr val="phClr">
+                <a:tint val="80000"/>
+                <a:satMod val="300000"/>
+              </a:schemeClr>
+            </a:gs>
+            <a:gs pos="100000">
+              <a:schemeClr val="phClr">
+                <a:shade val="30000"/>
+                <a:satMod val="200000"/>
+              </a:schemeClr>
+            </a:gs>
+          </a:gsLst>
+          <a:path path="circle">
+            <a:fillToRect l="50000" t="50000" r="50000" b="50000"/>
+          </a:path>
+        </a:gradFill>
+      </a:bgFillStyleLst>
+    </a:fmtScheme>
+  </a:themeElements>
+  <a:objectDefaults>
+    <a:spDef>
+      <a:spPr/>
+      <a:bodyPr/>
+      <a:lstStyle/>
+      <a:style>
+        <a:lnRef idx="1">
+          <a:schemeClr val="accent1"/>
+        </a:lnRef>
+        <a:fillRef idx="3">
+          <a:schemeClr val="accent1"/>
+        </a:fillRef>
+        <a:effectRef idx="2">
+          <a:schemeClr val="accent1"/>
+        </a:effectRef>
+        <a:fontRef idx="minor">
+          <a:schemeClr val="lt1"/>
+        </a:fontRef>
+      </a:style>
+    </a:spDef>
+    <a:lnDef>
+      <a:spPr/>
+      <a:bodyPr/>
+      <a:lstStyle/>
+      <a:style>
+        <a:lnRef idx="2">
+          <a:schemeClr val="accent1"/>
+        </a:lnRef>
+        <a:fillRef idx="0">
+          <a:schemeClr val="accent1"/>
+        </a:fillRef>
+        <a:effectRef idx="1">
+          <a:schemeClr val="accent1"/>
+        </a:effectRef>
+        <a:fontRef idx="minor">
+          <a:schemeClr val="tx1"/>
+        </a:fontRef>
+      </a:style>
+    </a:lnDef>
+  </a:objectDefaults>
+  <a:extraClrSchemeLst/>
+</a:theme>
 </file>
--- a/Pres+report/Soutenance-PFE.pptx
+++ b/Pres+report/Soutenance-PFE.pptx
@@ -700,7 +700,7 @@
           </a:p>
           <a:p>
             <a:r>
-              <a:t>→ Exemple : la fusion d'une ligne a quitté n8n, un IF ne relit pas une ligne.</a:t>
+              <a:t>→ Exemple : la tenue du journal a quitté n8n, un IF ne relit pas un onglet.</a:t>
             </a:r>
           </a:p>
           <a:p/>
@@ -857,7 +857,12 @@
           <a:lstStyle/>
           <a:p>
             <a:r>
-              <a:t>1:30 · Une ligne par message, jamais de réécriture.</a:t>
+              <a:t>1:30 · Une ligne par message, JAMAIS de réécriture.</a:t>
+            </a:r>
+          </a:p>
+          <a:p>
+            <a:r>
+              <a:t>→ Un chiffre faux ne peut plus écraser un chiffre juste : 50 puis +80.</a:t>
             </a:r>
           </a:p>
           <a:p>
@@ -10333,7 +10338,7 @@
                 </a:solidFill>
                 <a:latin typeface="Arial"/>
               </a:rPr>
-              <a:t>Ensuite seulement : POST /journal fusionne la ligne dans l'onglet du chantier.</a:t>
+              <a:t>Ensuite seulement : POST /journal ajoute la ligne dans l'onglet du chantier.</a:t>
             </a:r>
           </a:p>
         </p:txBody>
@@ -10957,7 +10962,7 @@
                 </a:solidFill>
                 <a:latin typeface="Arial"/>
               </a:rPr>
-              <a:t>Règle 1 — accumulation</a:t>
+              <a:t>Règle 1 — une ligne par message</a:t>
             </a:r>
           </a:p>
         </p:txBody>
@@ -18225,7 +18230,7 @@
                 </a:solidFill>
                 <a:latin typeface="Arial"/>
               </a:rPr>
-              <a:t>Journal de chantier par site — fusion, stock</a:t>
+              <a:t>Journal de chantier par site — ajout, stock</a:t>
             </a:r>
           </a:p>
           <a:p>
@@ -23122,7 +23127,7 @@
                 </a:solidFill>
                 <a:latin typeface="Arial"/>
               </a:rPr>
-              <a:t>dans l'onglet du chantier, fusionnée s'il en existe déjà une pour la journée.</a:t>
+              <a:t>dans l'onglet du chantier ; si la journée est déjà ouverte, les quantités s'affichent +80.</a:t>
             </a:r>
           </a:p>
           <a:p>
@@ -23687,7 +23692,7 @@
                 </a:solidFill>
                 <a:latin typeface="Arial"/>
               </a:rPr>
-              <a:t>Un modèle métier reconstruit sur le fichier réel du client, avec accumulation intra-journalière et réconciliation de stock.</a:t>
+              <a:t>Un modèle métier reconstruit sur le fichier réel du client : une ligne par message, jamais réécrite, et réconciliation de stock.</a:t>
             </a:r>
           </a:p>
           <a:p>
